--- a/docs/nexa-vs-bitcoin-ethereum/Nexa-vs-Bitcoin-Ethereum.pptx
+++ b/docs/nexa-vs-bitcoin-ethereum/Nexa-vs-Bitcoin-Ethereum.pptx
@@ -20,9 +20,10 @@
     <p:sldId id="268" r:id="rId14"/>
     <p:sldId id="269" r:id="rId15"/>
     <p:sldId id="270" r:id="rId16"/>
+    <p:sldId id="271" r:id="rId17"/>
   </p:sldIdLst>
   <p:notesMasterIdLst>
-    <p:notesMasterId r:id="rId17"/>
+    <p:notesMasterId r:id="rId18"/>
   </p:notesMasterIdLst>
   <p:sldSz cx="12192000" cy="6858000"/>
   <p:notesSz cx="6858000" cy="12192000"/>
@@ -780,7 +781,7 @@
           <a:p>
             <a:r>
               <a:rPr lang="en-US" dirty="0"/>
-              <a:t>nexa.org: 'Native on-chain programmability without EVM complexity', 'No EVM overhead'. The developer stack: Wally wallet, TDPP payment protocol, nexid identity, CAPD messaging, NexaJS and libnexakotlin. Keep this slide short for a non-developer audience; expand only if asked.</a:t>
+              <a:t>CAPD is unique to Nexa: a decentralised, proof-of-work-rate-limited, ephemeral message bus on the P2P network (spec: spec.nexa.org/network/capd). Open outcry: the trading-floor model where offers are called out publicly and anyone can take them. Mechanics: the offer is a partially signed transaction; the advertised summary (which token for which) is only indicative, the half-signed transaction is authoritative, so a lying advertisement is harmless: the taker gets exactly what the transaction says or it is invalid. Messages carry a create time and an expiration, relay priority decays to zero after about 600 seconds, and a rescind hash lets the sender withdraw an offer early. Uses: token and NFT marketplaces without a marketplace operator, in-game item trading, atomic swaps, multisig wallet formation and signing rounds. Contrast: Bitcoin has no discovery layer, so trading means centralised exchanges; Ethereum needs an on-chain DEX contract and pays gas for every order and trade.</a:t>
             </a:r>
             <a:endParaRPr lang="en-US" dirty="0"/>
           </a:p>
@@ -868,7 +869,7 @@
           <a:p>
             <a:r>
               <a:rPr lang="en-US" dirty="0"/>
-              <a:t>SSB: 98% of Norway's electricity from hydro and wind (late 2025); normal annual production ~157 TWh, consumption ~140 TWh. June 2025: the government announced a temporary ban on new proof-of-work mining data centres, with a mandatory data-centre registry; officials have hinted it may become permanent. Be honest: the ban applies to PoW mining generally, so a Nexa farm would be covered too. The point is that Nexa's network does not depend on farms anywhere.</a:t>
+              <a:t>nexa.org: 'Native on-chain programmability without EVM complexity', 'No EVM overhead'. The developer stack: Wally wallet, TDPP payment protocol, nexid identity, CAPD messaging, NexaJS and libnexakotlin. Keep this slide short for a non-developer audience; expand only if asked.</a:t>
             </a:r>
             <a:endParaRPr lang="en-US" dirty="0"/>
           </a:p>
@@ -956,7 +957,7 @@
           <a:p>
             <a:r>
               <a:rPr lang="en-US" dirty="0"/>
-              <a:t>One-slide answer to the organisers' three themes: energy and e-waste, who benefits, and NFT speculation. Every figure appears earlier in the deck with its source.</a:t>
+              <a:t>SSB: 98% of Norway's electricity from hydro and wind (late 2025); normal annual production ~157 TWh, consumption ~140 TWh. June 2025: the government announced a temporary ban on new proof-of-work mining data centres, with a mandatory data-centre registry; officials have hinted it may become permanent. Be honest: the ban applies to PoW mining generally, so a Nexa farm would be covered too. The point is that Nexa's network does not depend on farms anywhere.</a:t>
             </a:r>
             <a:endParaRPr lang="en-US" dirty="0"/>
           </a:p>
@@ -1044,7 +1045,7 @@
           <a:p>
             <a:r>
               <a:rPr lang="en-US" dirty="0"/>
-              <a:t>Close on the three answers to the three concerns. If challenged on the 13,000x figure: it is a capacity comparison at equal network power, 5,600x on today's benchmark and 13,000x with Blitz; the floor is 1,000x because Bitcoin cannot exceed ~14 TPS.</a:t>
+              <a:t>One-slide answer to the organisers' three themes: energy and e-waste, who benefits, and NFT speculation. Every figure appears earlier in the deck with its source.</a:t>
             </a:r>
             <a:endParaRPr lang="en-US" dirty="0"/>
           </a:p>
@@ -1068,6 +1069,94 @@
             <a:fld id="{F7021451-1387-4CA6-816F-3879F97B5CBC}" type="slidenum">
               <a:rPr lang="en-US"/>
               <a:t>15</a:t>
+            </a:fld>
+            <a:endParaRPr lang="en-US"/>
+          </a:p>
+        </p:txBody>
+      </p:sp>
+    </p:spTree>
+    <p:extLst>
+      <p:ext uri="{BB962C8B-B14F-4D97-AF65-F5344CB8AC3E}">
+        <p14:creationId xmlns:p14="http://schemas.microsoft.com/office/powerpoint/2010/main" val="1024086991"/>
+      </p:ext>
+    </p:extLst>
+  </p:cSld>
+  <p:clrMapOvr>
+    <a:masterClrMapping/>
+  </p:clrMapOvr>
+</p:notes>
+</file>
+
+<file path=ppt/notesSlides/notesSlide16.xml><?xml version="1.0" encoding="utf-8"?>
+<p:notes xmlns:a="http://schemas.openxmlformats.org/drawingml/2006/main" xmlns:r="http://schemas.openxmlformats.org/officeDocument/2006/relationships" xmlns:p="http://schemas.openxmlformats.org/presentationml/2006/main">
+  <p:cSld>
+    <p:spTree>
+      <p:nvGrpSpPr>
+        <p:cNvPr id="1" name=""/>
+        <p:cNvGrpSpPr/>
+        <p:nvPr/>
+      </p:nvGrpSpPr>
+      <p:grpSpPr>
+        <a:xfrm>
+          <a:off x="0" y="0"/>
+          <a:ext cx="0" cy="0"/>
+          <a:chOff x="0" y="0"/>
+          <a:chExt cx="0" cy="0"/>
+        </a:xfrm>
+      </p:grpSpPr>
+      <p:sp>
+        <p:nvSpPr>
+          <p:cNvPr id="2" name="Slide Image Placeholder 1"/>
+          <p:cNvSpPr>
+            <a:spLocks noGrp="1" noRot="1" noChangeAspect="1"/>
+          </p:cNvSpPr>
+          <p:nvPr>
+            <p:ph type="sldImg"/>
+          </p:nvPr>
+        </p:nvSpPr>
+        <p:spPr/>
+      </p:sp>
+      <p:sp>
+        <p:nvSpPr>
+          <p:cNvPr id="3" name="Notes Placeholder 2"/>
+          <p:cNvSpPr>
+            <a:spLocks noGrp="1"/>
+          </p:cNvSpPr>
+          <p:nvPr>
+            <p:ph type="body" idx="1"/>
+          </p:nvPr>
+        </p:nvSpPr>
+        <p:spPr/>
+        <p:txBody>
+          <a:bodyPr/>
+          <a:lstStyle/>
+          <a:p>
+            <a:r>
+              <a:rPr lang="en-US" dirty="0"/>
+              <a:t>Close on the three answers to the three concerns. If challenged on the 13,000x figure: it is a capacity comparison at equal network power, 5,600x on today's benchmark and 13,000x with Blitz; the floor is 1,000x because Bitcoin cannot exceed ~14 TPS.</a:t>
+            </a:r>
+            <a:endParaRPr lang="en-US" dirty="0"/>
+          </a:p>
+        </p:txBody>
+      </p:sp>
+      <p:sp>
+        <p:nvSpPr>
+          <p:cNvPr id="4" name="Slide Number Placeholder 3"/>
+          <p:cNvSpPr>
+            <a:spLocks noGrp="1"/>
+          </p:cNvSpPr>
+          <p:nvPr>
+            <p:ph type="sldNum" sz="quarter" idx="10"/>
+          </p:nvPr>
+        </p:nvSpPr>
+        <p:spPr/>
+        <p:txBody>
+          <a:bodyPr/>
+          <a:lstStyle/>
+          <a:p>
+            <a:fld id="{F7021451-1387-4CA6-816F-3879F97B5CBC}" type="slidenum">
+              <a:rPr lang="en-US"/>
+              <a:t>16</a:t>
             </a:fld>
             <a:endParaRPr lang="en-US"/>
           </a:p>
@@ -3842,7 +3931,7 @@
                 <a:ea typeface="Calibri" pitchFamily="34" charset="-122"/>
                 <a:cs typeface="Calibri" pitchFamily="34" charset="-120"/>
               </a:rPr>
-              <a:t>Smart contracts without the EVM</a:t>
+              <a:t>Open outcry trading over CAPD: shout an offer, anyone can take it</a:t>
             </a:r>
             <a:endParaRPr lang="en-US" sz="3000" dirty="0"/>
           </a:p>
@@ -3957,7 +4046,7 @@
                 <a:ea typeface="Calibri" pitchFamily="34" charset="-122"/>
                 <a:cs typeface="Calibri" pitchFamily="34" charset="-120"/>
               </a:rPr>
-              <a:t>Script templates</a:t>
+              <a:t>Shout the offer to the network</a:t>
             </a:r>
             <a:endParaRPr lang="en-US" sz="1800" dirty="0"/>
           </a:p>
@@ -3999,7 +4088,7 @@
                 <a:ea typeface="Calibri" pitchFamily="34" charset="-122"/>
                 <a:cs typeface="Calibri" pitchFamily="34" charset="-120"/>
               </a:rPr>
-              <a:t>Contracts are small, deterministic scripts attached to coins and validated in parallel like any other transaction. There is no global state machine to congest.</a:t>
+              <a:t>CAPD (Counterparty and Protocol Discovery) is a message bus carried by the same nodes that relay transactions. You broadcast a half-signed offer, say 100 tokens for 5,000 NEXA, and every node passes it on, like a trader calling out a price on the floor.</a:t>
             </a:r>
             <a:endParaRPr lang="en-US" sz="1500" dirty="0"/>
           </a:p>
@@ -4114,7 +4203,7 @@
                 <a:ea typeface="Calibri" pitchFamily="34" charset="-122"/>
                 <a:cs typeface="Calibri" pitchFamily="34" charset="-120"/>
               </a:rPr>
-              <a:t>No EVM overhead</a:t>
+              <a:t>No exchange, no order-book server</a:t>
             </a:r>
             <a:endParaRPr lang="en-US" sz="1800" dirty="0"/>
           </a:p>
@@ -4156,7 +4245,7 @@
                 <a:ea typeface="Calibri" pitchFamily="34" charset="-122"/>
                 <a:cs typeface="Calibri" pitchFamily="34" charset="-120"/>
               </a:rPr>
-              <a:t>No gas market, no reentrancy class of bugs, no fee spike for everyone when one app gets popular. Contracts run at the same 42,000 TPS as plain payments.</a:t>
+              <a:t>Whoever wants the deal completes the half-signed transaction and broadcasts it. The swap settles on-chain in one atomic transaction, with no exchange, listing fee or matching server in between. Bitcoin has no such layer; on Ethereum it takes a DEX contract and gas per trade.</a:t>
             </a:r>
             <a:endParaRPr lang="en-US" sz="1500" dirty="0"/>
           </a:p>
@@ -4271,7 +4360,7 @@
                 <a:ea typeface="Calibri" pitchFamily="34" charset="-122"/>
                 <a:cs typeface="Calibri" pitchFamily="34" charset="-120"/>
               </a:rPr>
-              <a:t>A full platform</a:t>
+              <a:t>Proof of work instead of fees, then it disappears</a:t>
             </a:r>
             <a:endParaRPr lang="en-US" sz="1800" dirty="0"/>
           </a:p>
@@ -4313,7 +4402,7 @@
                 <a:ea typeface="Calibri" pitchFamily="34" charset="-122"/>
                 <a:cs typeface="Calibri" pitchFamily="34" charset="-120"/>
               </a:rPr>
-              <a:t>Wallet login with on-chain identity, payment requests to the user's wallet and peer-to-peer messaging are part of the stack, with Kotlin and JavaScript libraries.</a:t>
+              <a:t>Senders solve a small proof of work instead of paying a fee, which keeps spam out. Offers are ephemeral: they fade from relay in about ten minutes unless re-broadcast, can be withdrawn early, and never touch the blockchain until someone takes them.</a:t>
             </a:r>
             <a:endParaRPr lang="en-US" sz="1500" dirty="0"/>
           </a:p>
@@ -4486,7 +4575,7 @@
                 <a:ea typeface="Calibri" pitchFamily="34" charset="-122"/>
                 <a:cs typeface="Calibri" pitchFamily="34" charset="-120"/>
               </a:rPr>
-              <a:t>Why this matters in Norway</a:t>
+              <a:t>Smart contracts without the EVM</a:t>
             </a:r>
             <a:endParaRPr lang="en-US" sz="3000" dirty="0"/>
           </a:p>
@@ -4601,7 +4690,7 @@
                 <a:ea typeface="Calibri" pitchFamily="34" charset="-122"/>
                 <a:cs typeface="Calibri" pitchFamily="34" charset="-120"/>
               </a:rPr>
-              <a:t>A clean grid under pressure</a:t>
+              <a:t>Script templates</a:t>
             </a:r>
             <a:endParaRPr lang="en-US" sz="1800" dirty="0"/>
           </a:p>
@@ -4643,7 +4732,7 @@
                 <a:ea typeface="Calibri" pitchFamily="34" charset="-122"/>
                 <a:cs typeface="Calibri" pitchFamily="34" charset="-120"/>
               </a:rPr>
-              <a:t>98% of Norway's electricity is hydro and wind, yet in 2025 the government froze new proof-of-work data centres to protect grid capacity. Nexa mining runs on ordinary GPUs and does not depend on data centres.</a:t>
+              <a:t>Contracts are small, deterministic scripts attached to coins and validated in parallel like any other transaction. There is no global state machine to congest.</a:t>
             </a:r>
             <a:endParaRPr lang="en-US" sz="1500" dirty="0"/>
           </a:p>
@@ -4691,11 +4780,11 @@
             <a:avLst/>
           </a:prstGeom>
           <a:solidFill>
-            <a:srgbClr val="F7931A"/>
+            <a:srgbClr val="F2CD3A"/>
           </a:solidFill>
           <a:ln w="12700">
             <a:solidFill>
-              <a:srgbClr val="F7931A"/>
+              <a:srgbClr val="F2CD3A"/>
             </a:solidFill>
             <a:prstDash val="solid"/>
           </a:ln>
@@ -4758,7 +4847,7 @@
                 <a:ea typeface="Calibri" pitchFamily="34" charset="-122"/>
                 <a:cs typeface="Calibri" pitchFamily="34" charset="-120"/>
               </a:rPr>
-              <a:t>Bitcoin ≈ Norway</a:t>
+              <a:t>No EVM overhead</a:t>
             </a:r>
             <a:endParaRPr lang="en-US" sz="1800" dirty="0"/>
           </a:p>
@@ -4800,7 +4889,7 @@
                 <a:ea typeface="Calibri" pitchFamily="34" charset="-122"/>
                 <a:cs typeface="Calibri" pitchFamily="34" charset="-120"/>
               </a:rPr>
-              <a:t>Bitcoin's roughly 140 TWh a year equals Norway's entire electricity consumption, for 7 transactions per second. The same electricity on Nexa would carry thousands of times more payments.</a:t>
+              <a:t>No gas market, no reentrancy class of bugs, no fee spike for everyone when one app gets popular. Contracts run at the same 42,000 TPS as plain payments.</a:t>
             </a:r>
             <a:endParaRPr lang="en-US" sz="1500" dirty="0"/>
           </a:p>
@@ -4915,7 +5004,7 @@
                 <a:ea typeface="Calibri" pitchFamily="34" charset="-122"/>
                 <a:cs typeface="Calibri" pitchFamily="34" charset="-120"/>
               </a:rPr>
-              <a:t>A cashless country</a:t>
+              <a:t>A full platform</a:t>
             </a:r>
             <a:endParaRPr lang="en-US" sz="1800" dirty="0"/>
           </a:p>
@@ -4957,7 +5046,7 @@
                 <a:ea typeface="Calibri" pitchFamily="34" charset="-122"/>
                 <a:cs typeface="Calibri" pitchFamily="34" charset="-120"/>
               </a:rPr>
-              <a:t>Norwegians already pay by phone in seconds. A sound-money rail that settles in two seconds for a fraction of an øre fits how people here already live.</a:t>
+              <a:t>Wallet login with on-chain identity, payment requests to the user's wallet and peer-to-peer messaging are part of the stack, with Kotlin and JavaScript libraries.</a:t>
             </a:r>
             <a:endParaRPr lang="en-US" sz="1500" dirty="0"/>
           </a:p>
@@ -5130,6 +5219,650 @@
                 <a:ea typeface="Calibri" pitchFamily="34" charset="-122"/>
                 <a:cs typeface="Calibri" pitchFamily="34" charset="-120"/>
               </a:rPr>
+              <a:t>Why this matters in Norway</a:t>
+            </a:r>
+            <a:endParaRPr lang="en-US" sz="3000" dirty="0"/>
+          </a:p>
+        </p:txBody>
+      </p:sp>
+      <p:sp>
+        <p:nvSpPr>
+          <p:cNvPr id="3" name="Shape 1"/>
+          <p:cNvSpPr/>
+          <p:nvPr/>
+        </p:nvSpPr>
+        <p:spPr>
+          <a:xfrm>
+            <a:off x="548640" y="1691640"/>
+            <a:ext cx="3515258" cy="3657600"/>
+          </a:xfrm>
+          <a:prstGeom prst="roundRect">
+            <a:avLst>
+              <a:gd name="adj" fmla="val 3121"/>
+            </a:avLst>
+          </a:prstGeom>
+          <a:solidFill>
+            <a:srgbClr val="18181B"/>
+          </a:solidFill>
+          <a:ln w="9525">
+            <a:solidFill>
+              <a:srgbClr val="2E2E35"/>
+            </a:solidFill>
+            <a:prstDash val="solid"/>
+          </a:ln>
+        </p:spPr>
+      </p:sp>
+      <p:sp>
+        <p:nvSpPr>
+          <p:cNvPr id="4" name="Shape 2"/>
+          <p:cNvSpPr/>
+          <p:nvPr/>
+        </p:nvSpPr>
+        <p:spPr>
+          <a:xfrm>
+            <a:off x="822960" y="1965960"/>
+            <a:ext cx="640080" cy="640080"/>
+          </a:xfrm>
+          <a:prstGeom prst="ellipse">
+            <a:avLst/>
+          </a:prstGeom>
+          <a:solidFill>
+            <a:srgbClr val="F2CD3A"/>
+          </a:solidFill>
+          <a:ln w="12700">
+            <a:solidFill>
+              <a:srgbClr val="F2CD3A"/>
+            </a:solidFill>
+            <a:prstDash val="solid"/>
+          </a:ln>
+        </p:spPr>
+      </p:sp>
+      <p:pic>
+        <p:nvPicPr>
+          <p:cNvPr id="5" name="Image 0" descr="preencoded.png">    </p:cNvPr>
+          <p:cNvPicPr>
+            <a:picLocks noChangeAspect="1"/>
+          </p:cNvPicPr>
+          <p:nvPr/>
+        </p:nvPicPr>
+        <p:blipFill>
+          <a:blip r:embed="rId1"/>
+          <a:stretch>
+            <a:fillRect/>
+          </a:stretch>
+        </p:blipFill>
+        <p:spPr>
+          <a:xfrm>
+            <a:off x="976579" y="2119579"/>
+            <a:ext cx="332842" cy="332842"/>
+          </a:xfrm>
+          <a:prstGeom prst="rect">
+            <a:avLst/>
+          </a:prstGeom>
+        </p:spPr>
+      </p:pic>
+      <p:sp>
+        <p:nvSpPr>
+          <p:cNvPr id="6" name="Text 3"/>
+          <p:cNvSpPr txBox="1"/>
+          <p:nvPr/>
+        </p:nvSpPr>
+        <p:spPr>
+          <a:xfrm>
+            <a:off x="822960" y="2788920"/>
+            <a:ext cx="2966618" cy="640080"/>
+          </a:xfrm>
+          <a:prstGeom prst="rect">
+            <a:avLst/>
+          </a:prstGeom>
+          <a:noFill/>
+          <a:ln/>
+        </p:spPr>
+        <p:txBody>
+          <a:bodyPr wrap="square" lIns="0" tIns="0" rIns="0" bIns="0" rtlCol="0" anchor="t"/>
+          <a:lstStyle/>
+          <a:p>
+            <a:pPr indent="0" marL="0">
+              <a:buNone/>
+            </a:pPr>
+            <a:r>
+              <a:rPr lang="en-US" sz="1800" b="1" dirty="0">
+                <a:solidFill>
+                  <a:srgbClr val="FFFFFF"/>
+                </a:solidFill>
+                <a:latin typeface="Calibri" pitchFamily="34" charset="0"/>
+                <a:ea typeface="Calibri" pitchFamily="34" charset="-122"/>
+                <a:cs typeface="Calibri" pitchFamily="34" charset="-120"/>
+              </a:rPr>
+              <a:t>A clean grid under pressure</a:t>
+            </a:r>
+            <a:endParaRPr lang="en-US" sz="1800" dirty="0"/>
+          </a:p>
+        </p:txBody>
+      </p:sp>
+      <p:sp>
+        <p:nvSpPr>
+          <p:cNvPr id="7" name="Text 4"/>
+          <p:cNvSpPr txBox="1"/>
+          <p:nvPr/>
+        </p:nvSpPr>
+        <p:spPr>
+          <a:xfrm>
+            <a:off x="822960" y="3474720"/>
+            <a:ext cx="2966618" cy="1600200"/>
+          </a:xfrm>
+          <a:prstGeom prst="rect">
+            <a:avLst/>
+          </a:prstGeom>
+          <a:noFill/>
+          <a:ln/>
+        </p:spPr>
+        <p:txBody>
+          <a:bodyPr wrap="square" lIns="0" tIns="0" rIns="0" bIns="0" rtlCol="0" anchor="t"/>
+          <a:lstStyle/>
+          <a:p>
+            <a:pPr indent="0" marL="0">
+              <a:spcAft>
+                <a:spcPts val="600"/>
+              </a:spcAft>
+              <a:buNone/>
+            </a:pPr>
+            <a:r>
+              <a:rPr lang="en-US" sz="1500" dirty="0">
+                <a:solidFill>
+                  <a:srgbClr val="E4E4E7"/>
+                </a:solidFill>
+                <a:latin typeface="Calibri" pitchFamily="34" charset="0"/>
+                <a:ea typeface="Calibri" pitchFamily="34" charset="-122"/>
+                <a:cs typeface="Calibri" pitchFamily="34" charset="-120"/>
+              </a:rPr>
+              <a:t>98% of Norway's electricity is hydro and wind, yet in 2025 the government froze new proof-of-work data centres to protect grid capacity. Nexa mining runs on ordinary GPUs and does not depend on data centres.</a:t>
+            </a:r>
+            <a:endParaRPr lang="en-US" sz="1500" dirty="0"/>
+          </a:p>
+        </p:txBody>
+      </p:sp>
+      <p:sp>
+        <p:nvSpPr>
+          <p:cNvPr id="8" name="Shape 5"/>
+          <p:cNvSpPr/>
+          <p:nvPr/>
+        </p:nvSpPr>
+        <p:spPr>
+          <a:xfrm>
+            <a:off x="4338218" y="1691640"/>
+            <a:ext cx="3515258" cy="3657600"/>
+          </a:xfrm>
+          <a:prstGeom prst="roundRect">
+            <a:avLst>
+              <a:gd name="adj" fmla="val 3121"/>
+            </a:avLst>
+          </a:prstGeom>
+          <a:solidFill>
+            <a:srgbClr val="18181B"/>
+          </a:solidFill>
+          <a:ln w="9525">
+            <a:solidFill>
+              <a:srgbClr val="2E2E35"/>
+            </a:solidFill>
+            <a:prstDash val="solid"/>
+          </a:ln>
+        </p:spPr>
+      </p:sp>
+      <p:sp>
+        <p:nvSpPr>
+          <p:cNvPr id="9" name="Shape 6"/>
+          <p:cNvSpPr/>
+          <p:nvPr/>
+        </p:nvSpPr>
+        <p:spPr>
+          <a:xfrm>
+            <a:off x="4612538" y="1965960"/>
+            <a:ext cx="640080" cy="640080"/>
+          </a:xfrm>
+          <a:prstGeom prst="ellipse">
+            <a:avLst/>
+          </a:prstGeom>
+          <a:solidFill>
+            <a:srgbClr val="F7931A"/>
+          </a:solidFill>
+          <a:ln w="12700">
+            <a:solidFill>
+              <a:srgbClr val="F7931A"/>
+            </a:solidFill>
+            <a:prstDash val="solid"/>
+          </a:ln>
+        </p:spPr>
+      </p:sp>
+      <p:pic>
+        <p:nvPicPr>
+          <p:cNvPr id="10" name="Image 1" descr="preencoded.png">    </p:cNvPr>
+          <p:cNvPicPr>
+            <a:picLocks noChangeAspect="1"/>
+          </p:cNvPicPr>
+          <p:nvPr/>
+        </p:nvPicPr>
+        <p:blipFill>
+          <a:blip r:embed="rId2"/>
+          <a:stretch>
+            <a:fillRect/>
+          </a:stretch>
+        </p:blipFill>
+        <p:spPr>
+          <a:xfrm>
+            <a:off x="4766158" y="2119579"/>
+            <a:ext cx="332842" cy="332842"/>
+          </a:xfrm>
+          <a:prstGeom prst="rect">
+            <a:avLst/>
+          </a:prstGeom>
+        </p:spPr>
+      </p:pic>
+      <p:sp>
+        <p:nvSpPr>
+          <p:cNvPr id="11" name="Text 7"/>
+          <p:cNvSpPr txBox="1"/>
+          <p:nvPr/>
+        </p:nvSpPr>
+        <p:spPr>
+          <a:xfrm>
+            <a:off x="4612538" y="2788920"/>
+            <a:ext cx="2966618" cy="640080"/>
+          </a:xfrm>
+          <a:prstGeom prst="rect">
+            <a:avLst/>
+          </a:prstGeom>
+          <a:noFill/>
+          <a:ln/>
+        </p:spPr>
+        <p:txBody>
+          <a:bodyPr wrap="square" lIns="0" tIns="0" rIns="0" bIns="0" rtlCol="0" anchor="t"/>
+          <a:lstStyle/>
+          <a:p>
+            <a:pPr indent="0" marL="0">
+              <a:buNone/>
+            </a:pPr>
+            <a:r>
+              <a:rPr lang="en-US" sz="1800" b="1" dirty="0">
+                <a:solidFill>
+                  <a:srgbClr val="FFFFFF"/>
+                </a:solidFill>
+                <a:latin typeface="Calibri" pitchFamily="34" charset="0"/>
+                <a:ea typeface="Calibri" pitchFamily="34" charset="-122"/>
+                <a:cs typeface="Calibri" pitchFamily="34" charset="-120"/>
+              </a:rPr>
+              <a:t>Bitcoin ≈ Norway</a:t>
+            </a:r>
+            <a:endParaRPr lang="en-US" sz="1800" dirty="0"/>
+          </a:p>
+        </p:txBody>
+      </p:sp>
+      <p:sp>
+        <p:nvSpPr>
+          <p:cNvPr id="12" name="Text 8"/>
+          <p:cNvSpPr txBox="1"/>
+          <p:nvPr/>
+        </p:nvSpPr>
+        <p:spPr>
+          <a:xfrm>
+            <a:off x="4612538" y="3474720"/>
+            <a:ext cx="2966618" cy="1600200"/>
+          </a:xfrm>
+          <a:prstGeom prst="rect">
+            <a:avLst/>
+          </a:prstGeom>
+          <a:noFill/>
+          <a:ln/>
+        </p:spPr>
+        <p:txBody>
+          <a:bodyPr wrap="square" lIns="0" tIns="0" rIns="0" bIns="0" rtlCol="0" anchor="t"/>
+          <a:lstStyle/>
+          <a:p>
+            <a:pPr indent="0" marL="0">
+              <a:spcAft>
+                <a:spcPts val="600"/>
+              </a:spcAft>
+              <a:buNone/>
+            </a:pPr>
+            <a:r>
+              <a:rPr lang="en-US" sz="1500" dirty="0">
+                <a:solidFill>
+                  <a:srgbClr val="E4E4E7"/>
+                </a:solidFill>
+                <a:latin typeface="Calibri" pitchFamily="34" charset="0"/>
+                <a:ea typeface="Calibri" pitchFamily="34" charset="-122"/>
+                <a:cs typeface="Calibri" pitchFamily="34" charset="-120"/>
+              </a:rPr>
+              <a:t>Bitcoin's roughly 140 TWh a year equals Norway's entire electricity consumption, for 7 transactions per second. The same electricity on Nexa would carry thousands of times more payments.</a:t>
+            </a:r>
+            <a:endParaRPr lang="en-US" sz="1500" dirty="0"/>
+          </a:p>
+        </p:txBody>
+      </p:sp>
+      <p:sp>
+        <p:nvSpPr>
+          <p:cNvPr id="13" name="Shape 9"/>
+          <p:cNvSpPr/>
+          <p:nvPr/>
+        </p:nvSpPr>
+        <p:spPr>
+          <a:xfrm>
+            <a:off x="8127797" y="1691640"/>
+            <a:ext cx="3515258" cy="3657600"/>
+          </a:xfrm>
+          <a:prstGeom prst="roundRect">
+            <a:avLst>
+              <a:gd name="adj" fmla="val 3121"/>
+            </a:avLst>
+          </a:prstGeom>
+          <a:solidFill>
+            <a:srgbClr val="18181B"/>
+          </a:solidFill>
+          <a:ln w="9525">
+            <a:solidFill>
+              <a:srgbClr val="2E2E35"/>
+            </a:solidFill>
+            <a:prstDash val="solid"/>
+          </a:ln>
+        </p:spPr>
+      </p:sp>
+      <p:sp>
+        <p:nvSpPr>
+          <p:cNvPr id="14" name="Shape 10"/>
+          <p:cNvSpPr/>
+          <p:nvPr/>
+        </p:nvSpPr>
+        <p:spPr>
+          <a:xfrm>
+            <a:off x="8402117" y="1965960"/>
+            <a:ext cx="640080" cy="640080"/>
+          </a:xfrm>
+          <a:prstGeom prst="ellipse">
+            <a:avLst/>
+          </a:prstGeom>
+          <a:solidFill>
+            <a:srgbClr val="F2CD3A"/>
+          </a:solidFill>
+          <a:ln w="12700">
+            <a:solidFill>
+              <a:srgbClr val="F2CD3A"/>
+            </a:solidFill>
+            <a:prstDash val="solid"/>
+          </a:ln>
+        </p:spPr>
+      </p:sp>
+      <p:pic>
+        <p:nvPicPr>
+          <p:cNvPr id="15" name="Image 2" descr="preencoded.png">    </p:cNvPr>
+          <p:cNvPicPr>
+            <a:picLocks noChangeAspect="1"/>
+          </p:cNvPicPr>
+          <p:nvPr/>
+        </p:nvPicPr>
+        <p:blipFill>
+          <a:blip r:embed="rId3"/>
+          <a:stretch>
+            <a:fillRect/>
+          </a:stretch>
+        </p:blipFill>
+        <p:spPr>
+          <a:xfrm>
+            <a:off x="8555736" y="2119579"/>
+            <a:ext cx="332842" cy="332842"/>
+          </a:xfrm>
+          <a:prstGeom prst="rect">
+            <a:avLst/>
+          </a:prstGeom>
+        </p:spPr>
+      </p:pic>
+      <p:sp>
+        <p:nvSpPr>
+          <p:cNvPr id="16" name="Text 11"/>
+          <p:cNvSpPr txBox="1"/>
+          <p:nvPr/>
+        </p:nvSpPr>
+        <p:spPr>
+          <a:xfrm>
+            <a:off x="8402117" y="2788920"/>
+            <a:ext cx="2966618" cy="640080"/>
+          </a:xfrm>
+          <a:prstGeom prst="rect">
+            <a:avLst/>
+          </a:prstGeom>
+          <a:noFill/>
+          <a:ln/>
+        </p:spPr>
+        <p:txBody>
+          <a:bodyPr wrap="square" lIns="0" tIns="0" rIns="0" bIns="0" rtlCol="0" anchor="t"/>
+          <a:lstStyle/>
+          <a:p>
+            <a:pPr indent="0" marL="0">
+              <a:buNone/>
+            </a:pPr>
+            <a:r>
+              <a:rPr lang="en-US" sz="1800" b="1" dirty="0">
+                <a:solidFill>
+                  <a:srgbClr val="FFFFFF"/>
+                </a:solidFill>
+                <a:latin typeface="Calibri" pitchFamily="34" charset="0"/>
+                <a:ea typeface="Calibri" pitchFamily="34" charset="-122"/>
+                <a:cs typeface="Calibri" pitchFamily="34" charset="-120"/>
+              </a:rPr>
+              <a:t>A cashless country</a:t>
+            </a:r>
+            <a:endParaRPr lang="en-US" sz="1800" dirty="0"/>
+          </a:p>
+        </p:txBody>
+      </p:sp>
+      <p:sp>
+        <p:nvSpPr>
+          <p:cNvPr id="17" name="Text 12"/>
+          <p:cNvSpPr txBox="1"/>
+          <p:nvPr/>
+        </p:nvSpPr>
+        <p:spPr>
+          <a:xfrm>
+            <a:off x="8402117" y="3474720"/>
+            <a:ext cx="2966618" cy="1600200"/>
+          </a:xfrm>
+          <a:prstGeom prst="rect">
+            <a:avLst/>
+          </a:prstGeom>
+          <a:noFill/>
+          <a:ln/>
+        </p:spPr>
+        <p:txBody>
+          <a:bodyPr wrap="square" lIns="0" tIns="0" rIns="0" bIns="0" rtlCol="0" anchor="t"/>
+          <a:lstStyle/>
+          <a:p>
+            <a:pPr indent="0" marL="0">
+              <a:spcAft>
+                <a:spcPts val="600"/>
+              </a:spcAft>
+              <a:buNone/>
+            </a:pPr>
+            <a:r>
+              <a:rPr lang="en-US" sz="1500" dirty="0">
+                <a:solidFill>
+                  <a:srgbClr val="E4E4E7"/>
+                </a:solidFill>
+                <a:latin typeface="Calibri" pitchFamily="34" charset="0"/>
+                <a:ea typeface="Calibri" pitchFamily="34" charset="-122"/>
+                <a:cs typeface="Calibri" pitchFamily="34" charset="-120"/>
+              </a:rPr>
+              <a:t>Norwegians already pay by phone in seconds. A sound-money rail that settles in two seconds for a fraction of an øre fits how people here already live.</a:t>
+            </a:r>
+            <a:endParaRPr lang="en-US" sz="1500" dirty="0"/>
+          </a:p>
+        </p:txBody>
+      </p:sp>
+      <p:pic>
+        <p:nvPicPr>
+          <p:cNvPr id="19" name="Image 3" descr="preencoded.png">    </p:cNvPr>
+          <p:cNvPicPr>
+            <a:picLocks noChangeAspect="1"/>
+          </p:cNvPicPr>
+          <p:nvPr/>
+        </p:nvPicPr>
+        <p:blipFill>
+          <a:blip r:embed="rId4"/>
+          <a:stretch>
+            <a:fillRect/>
+          </a:stretch>
+        </p:blipFill>
+        <p:spPr>
+          <a:xfrm>
+            <a:off x="548640" y="6355080"/>
+            <a:ext cx="256032" cy="246888"/>
+          </a:xfrm>
+          <a:prstGeom prst="rect">
+            <a:avLst/>
+          </a:prstGeom>
+        </p:spPr>
+      </p:pic>
+      <p:sp>
+        <p:nvSpPr>
+          <p:cNvPr id="20" name="Text 13"/>
+          <p:cNvSpPr txBox="1"/>
+          <p:nvPr/>
+        </p:nvSpPr>
+        <p:spPr>
+          <a:xfrm>
+            <a:off x="877824" y="6400800"/>
+            <a:ext cx="2743200" cy="274320"/>
+          </a:xfrm>
+          <a:prstGeom prst="rect">
+            <a:avLst/>
+          </a:prstGeom>
+          <a:noFill/>
+          <a:ln/>
+        </p:spPr>
+        <p:txBody>
+          <a:bodyPr wrap="square" lIns="0" tIns="0" rIns="0" bIns="0" rtlCol="0" anchor="ctr"/>
+          <a:lstStyle/>
+          <a:p>
+            <a:pPr algn="l" indent="0" marL="0">
+              <a:buNone/>
+            </a:pPr>
+            <a:r>
+              <a:rPr lang="en-US" sz="1000" dirty="0">
+                <a:solidFill>
+                  <a:srgbClr val="A1A1AA"/>
+                </a:solidFill>
+                <a:latin typeface="Calibri" pitchFamily="34" charset="0"/>
+                <a:ea typeface="Calibri" pitchFamily="34" charset="-122"/>
+                <a:cs typeface="Calibri" pitchFamily="34" charset="-120"/>
+              </a:rPr>
+              <a:t>Nexa · 2026</a:t>
+            </a:r>
+            <a:endParaRPr lang="en-US" sz="1000" dirty="0"/>
+          </a:p>
+        </p:txBody>
+      </p:sp>
+      <p:sp>
+        <p:nvSpPr>
+          <p:cNvPr id="21" name="Text 14"/>
+          <p:cNvSpPr txBox="1"/>
+          <p:nvPr/>
+        </p:nvSpPr>
+        <p:spPr>
+          <a:xfrm>
+            <a:off x="11094415" y="6400800"/>
+            <a:ext cx="548640" cy="274320"/>
+          </a:xfrm>
+          <a:prstGeom prst="rect">
+            <a:avLst/>
+          </a:prstGeom>
+          <a:noFill/>
+          <a:ln/>
+        </p:spPr>
+        <p:txBody>
+          <a:bodyPr wrap="square" lIns="0" tIns="0" rIns="0" bIns="0" rtlCol="0" anchor="ctr"/>
+          <a:lstStyle/>
+          <a:p>
+            <a:pPr algn="r" indent="0" marL="0">
+              <a:buNone/>
+            </a:pPr>
+            <a:r>
+              <a:rPr lang="en-US" sz="1000" dirty="0">
+                <a:solidFill>
+                  <a:srgbClr val="A1A1AA"/>
+                </a:solidFill>
+                <a:latin typeface="Calibri" pitchFamily="34" charset="0"/>
+                <a:ea typeface="Calibri" pitchFamily="34" charset="-122"/>
+                <a:cs typeface="Calibri" pitchFamily="34" charset="-120"/>
+              </a:rPr>
+              <a:t>14</a:t>
+            </a:r>
+            <a:endParaRPr lang="en-US" sz="1000" dirty="0"/>
+          </a:p>
+        </p:txBody>
+      </p:sp>
+    </p:spTree>
+  </p:cSld>
+  <p:clrMapOvr>
+    <a:masterClrMapping/>
+  </p:clrMapOvr>
+</p:sld>
+</file>
+
+<file path=ppt/slides/slide15.xml><?xml version="1.0" encoding="utf-8"?>
+<p:sld xmlns:a="http://schemas.openxmlformats.org/drawingml/2006/main" xmlns:r="http://schemas.openxmlformats.org/officeDocument/2006/relationships" xmlns:p="http://schemas.openxmlformats.org/presentationml/2006/main">
+  <p:cSld name="Slide 15">
+    <p:bg>
+      <p:bgPr>
+        <a:solidFill>
+          <a:srgbClr val="0A0A0F"/>
+        </a:solidFill>
+      </p:bgPr>
+    </p:bg>
+    <p:spTree>
+      <p:nvGrpSpPr>
+        <p:cNvPr id="1" name=""/>
+        <p:cNvGrpSpPr/>
+        <p:nvPr/>
+      </p:nvGrpSpPr>
+      <p:grpSpPr>
+        <a:xfrm>
+          <a:off x="0" y="0"/>
+          <a:ext cx="0" cy="0"/>
+          <a:chOff x="0" y="0"/>
+          <a:chExt cx="0" cy="0"/>
+        </a:xfrm>
+      </p:grpSpPr>
+      <p:sp>
+        <p:nvSpPr>
+          <p:cNvPr id="2" name="Text 0"/>
+          <p:cNvSpPr txBox="1"/>
+          <p:nvPr/>
+        </p:nvSpPr>
+        <p:spPr>
+          <a:xfrm>
+            <a:off x="548640" y="411480"/>
+            <a:ext cx="11094415" cy="1005840"/>
+          </a:xfrm>
+          <a:prstGeom prst="rect">
+            <a:avLst/>
+          </a:prstGeom>
+          <a:noFill/>
+          <a:ln/>
+        </p:spPr>
+        <p:txBody>
+          <a:bodyPr wrap="square" lIns="0" tIns="0" rIns="0" bIns="0" rtlCol="0" anchor="t"/>
+          <a:lstStyle/>
+          <a:p>
+            <a:pPr algn="l" indent="0" marL="0">
+              <a:buNone/>
+            </a:pPr>
+            <a:r>
+              <a:rPr lang="en-US" sz="3000" b="1" dirty="0">
+                <a:solidFill>
+                  <a:srgbClr val="FFFFFF"/>
+                </a:solidFill>
+                <a:latin typeface="Calibri" pitchFamily="34" charset="0"/>
+                <a:ea typeface="Calibri" pitchFamily="34" charset="-122"/>
+                <a:cs typeface="Calibri" pitchFamily="34" charset="-120"/>
+              </a:rPr>
               <a:t>Comparison overview</a:t>
             </a:r>
             <a:endParaRPr lang="en-US" sz="3000" dirty="0"/>
@@ -5138,7 +5871,7 @@
       </p:sp>
       <p:graphicFrame>
         <p:nvGraphicFramePr>
-          <p:cNvPr id="15" name="Table 0"/>
+          <p:cNvPr id="16" name="Table 0"/>
           <p:cNvGraphicFramePr>
             <a:graphicFrameLocks noGrp="1"/>
           </p:cNvGraphicFramePr>
@@ -5438,7 +6171,7 @@
                   </a:tcPr>
                 </a:tc>
               </a:tr>
-              <a:tr h="1188720">
+              <a:tr h="1005840">
                 <a:tc>
                   <a:txBody>
                     <a:bodyPr/>
@@ -5712,7 +6445,7 @@
                   </a:tcPr>
                 </a:tc>
               </a:tr>
-              <a:tr h="1188720">
+              <a:tr h="1005840">
                 <a:tc>
                   <a:txBody>
                     <a:bodyPr/>
@@ -5986,7 +6719,7 @@
                   </a:tcPr>
                 </a:tc>
               </a:tr>
-              <a:tr h="1188720">
+              <a:tr h="1005840">
                 <a:tc>
                   <a:txBody>
                     <a:bodyPr/>
@@ -6260,6 +6993,280 @@
                   </a:tcPr>
                 </a:tc>
               </a:tr>
+              <a:tr h="1005840">
+                <a:tc>
+                  <a:txBody>
+                    <a:bodyPr/>
+                    <a:lstStyle/>
+                    <a:p>
+                      <a:pPr indent="0" marL="0">
+                        <a:buNone/>
+                      </a:pPr>
+                      <a:r>
+                        <a:rPr lang="en-US" sz="1300" b="1" dirty="0">
+                          <a:solidFill>
+                            <a:srgbClr val="FFFFFF"/>
+                          </a:solidFill>
+                          <a:latin typeface="Calibri" pitchFamily="34" charset="0"/>
+                          <a:ea typeface="Calibri" pitchFamily="34" charset="-122"/>
+                          <a:cs typeface="Calibri" pitchFamily="34" charset="-120"/>
+                        </a:rPr>
+                        <a:t>Finding a counterparty</a:t>
+                      </a:r>
+                      <a:endParaRPr lang="en-US" sz="1300" dirty="0">
+                        <a:latin typeface="Calibri" charset="0"/>
+                        <a:ea typeface="Calibri" charset="0"/>
+                        <a:cs typeface="Calibri" charset="0"/>
+                      </a:endParaRPr>
+                    </a:p>
+                  </a:txBody>
+                  <a:tcPr marL="101600" marR="101600" marT="76200" marB="76200" anchor="ctr">
+                    <a:lnL w="25400" cap="flat" cmpd="sng" algn="ctr">
+                      <a:solidFill>
+                        <a:srgbClr val="0A0A0F"/>
+                      </a:solidFill>
+                      <a:prstDash val="solid"/>
+                      <a:round/>
+                      <a:headEnd type="none" w="med" len="med"/>
+                      <a:tailEnd type="none" w="med" len="med"/>
+                    </a:lnL>
+                    <a:lnR w="25400" cap="flat" cmpd="sng" algn="ctr">
+                      <a:solidFill>
+                        <a:srgbClr val="0A0A0F"/>
+                      </a:solidFill>
+                      <a:prstDash val="solid"/>
+                      <a:round/>
+                      <a:headEnd type="none" w="med" len="med"/>
+                      <a:tailEnd type="none" w="med" len="med"/>
+                    </a:lnR>
+                    <a:lnT w="25400" cap="flat" cmpd="sng" algn="ctr">
+                      <a:solidFill>
+                        <a:srgbClr val="0A0A0F"/>
+                      </a:solidFill>
+                      <a:prstDash val="solid"/>
+                      <a:round/>
+                      <a:headEnd type="none" w="med" len="med"/>
+                      <a:tailEnd type="none" w="med" len="med"/>
+                    </a:lnT>
+                    <a:lnB w="25400" cap="flat" cmpd="sng" algn="ctr">
+                      <a:solidFill>
+                        <a:srgbClr val="0A0A0F"/>
+                      </a:solidFill>
+                      <a:prstDash val="solid"/>
+                      <a:round/>
+                      <a:headEnd type="none" w="med" len="med"/>
+                      <a:tailEnd type="none" w="med" len="med"/>
+                    </a:lnB>
+                    <a:solidFill>
+                      <a:srgbClr val="18181B"/>
+                    </a:solidFill>
+                  </a:tcPr>
+                </a:tc>
+                <a:tc>
+                  <a:txBody>
+                    <a:bodyPr/>
+                    <a:lstStyle/>
+                    <a:p>
+                      <a:pPr indent="0" marL="0">
+                        <a:buNone/>
+                      </a:pPr>
+                      <a:r>
+                        <a:rPr lang="en-US" sz="1300" dirty="0">
+                          <a:solidFill>
+                            <a:srgbClr val="E4E4E7"/>
+                          </a:solidFill>
+                          <a:latin typeface="Calibri" pitchFamily="34" charset="0"/>
+                          <a:ea typeface="Calibri" pitchFamily="34" charset="-122"/>
+                          <a:cs typeface="Calibri" pitchFamily="34" charset="-120"/>
+                        </a:rPr>
+                        <a:t>No native layer. Trading means a centralised exchange.</a:t>
+                      </a:r>
+                      <a:endParaRPr lang="en-US" sz="1300" dirty="0">
+                        <a:latin typeface="Calibri" charset="0"/>
+                        <a:ea typeface="Calibri" charset="0"/>
+                        <a:cs typeface="Calibri" charset="0"/>
+                      </a:endParaRPr>
+                    </a:p>
+                  </a:txBody>
+                  <a:tcPr marL="101600" marR="101600" marT="76200" marB="76200" anchor="ctr">
+                    <a:lnL w="25400" cap="flat" cmpd="sng" algn="ctr">
+                      <a:solidFill>
+                        <a:srgbClr val="0A0A0F"/>
+                      </a:solidFill>
+                      <a:prstDash val="solid"/>
+                      <a:round/>
+                      <a:headEnd type="none" w="med" len="med"/>
+                      <a:tailEnd type="none" w="med" len="med"/>
+                    </a:lnL>
+                    <a:lnR w="25400" cap="flat" cmpd="sng" algn="ctr">
+                      <a:solidFill>
+                        <a:srgbClr val="0A0A0F"/>
+                      </a:solidFill>
+                      <a:prstDash val="solid"/>
+                      <a:round/>
+                      <a:headEnd type="none" w="med" len="med"/>
+                      <a:tailEnd type="none" w="med" len="med"/>
+                    </a:lnR>
+                    <a:lnT w="25400" cap="flat" cmpd="sng" algn="ctr">
+                      <a:solidFill>
+                        <a:srgbClr val="0A0A0F"/>
+                      </a:solidFill>
+                      <a:prstDash val="solid"/>
+                      <a:round/>
+                      <a:headEnd type="none" w="med" len="med"/>
+                      <a:tailEnd type="none" w="med" len="med"/>
+                    </a:lnT>
+                    <a:lnB w="25400" cap="flat" cmpd="sng" algn="ctr">
+                      <a:solidFill>
+                        <a:srgbClr val="0A0A0F"/>
+                      </a:solidFill>
+                      <a:prstDash val="solid"/>
+                      <a:round/>
+                      <a:headEnd type="none" w="med" len="med"/>
+                      <a:tailEnd type="none" w="med" len="med"/>
+                    </a:lnB>
+                    <a:solidFill>
+                      <a:srgbClr val="2A1A0C"/>
+                    </a:solidFill>
+                  </a:tcPr>
+                </a:tc>
+                <a:tc>
+                  <a:txBody>
+                    <a:bodyPr/>
+                    <a:lstStyle/>
+                    <a:p>
+                      <a:pPr indent="0" marL="0">
+                        <a:buNone/>
+                      </a:pPr>
+                      <a:r>
+                        <a:rPr lang="en-US" sz="1300" dirty="0">
+                          <a:solidFill>
+                            <a:srgbClr val="E4E4E7"/>
+                          </a:solidFill>
+                          <a:latin typeface="Calibri" pitchFamily="34" charset="0"/>
+                          <a:ea typeface="Calibri" pitchFamily="34" charset="-122"/>
+                          <a:cs typeface="Calibri" pitchFamily="34" charset="-120"/>
+                        </a:rPr>
+                        <a:t>On-chain DEX contracts, gas for every order and trade.</a:t>
+                      </a:r>
+                      <a:endParaRPr lang="en-US" sz="1300" dirty="0">
+                        <a:latin typeface="Calibri" charset="0"/>
+                        <a:ea typeface="Calibri" charset="0"/>
+                        <a:cs typeface="Calibri" charset="0"/>
+                      </a:endParaRPr>
+                    </a:p>
+                  </a:txBody>
+                  <a:tcPr marL="101600" marR="101600" marT="76200" marB="76200" anchor="ctr">
+                    <a:lnL w="25400" cap="flat" cmpd="sng" algn="ctr">
+                      <a:solidFill>
+                        <a:srgbClr val="0A0A0F"/>
+                      </a:solidFill>
+                      <a:prstDash val="solid"/>
+                      <a:round/>
+                      <a:headEnd type="none" w="med" len="med"/>
+                      <a:tailEnd type="none" w="med" len="med"/>
+                    </a:lnL>
+                    <a:lnR w="25400" cap="flat" cmpd="sng" algn="ctr">
+                      <a:solidFill>
+                        <a:srgbClr val="0A0A0F"/>
+                      </a:solidFill>
+                      <a:prstDash val="solid"/>
+                      <a:round/>
+                      <a:headEnd type="none" w="med" len="med"/>
+                      <a:tailEnd type="none" w="med" len="med"/>
+                    </a:lnR>
+                    <a:lnT w="25400" cap="flat" cmpd="sng" algn="ctr">
+                      <a:solidFill>
+                        <a:srgbClr val="0A0A0F"/>
+                      </a:solidFill>
+                      <a:prstDash val="solid"/>
+                      <a:round/>
+                      <a:headEnd type="none" w="med" len="med"/>
+                      <a:tailEnd type="none" w="med" len="med"/>
+                    </a:lnT>
+                    <a:lnB w="25400" cap="flat" cmpd="sng" algn="ctr">
+                      <a:solidFill>
+                        <a:srgbClr val="0A0A0F"/>
+                      </a:solidFill>
+                      <a:prstDash val="solid"/>
+                      <a:round/>
+                      <a:headEnd type="none" w="med" len="med"/>
+                      <a:tailEnd type="none" w="med" len="med"/>
+                    </a:lnB>
+                    <a:solidFill>
+                      <a:srgbClr val="1A1F3A"/>
+                    </a:solidFill>
+                  </a:tcPr>
+                </a:tc>
+                <a:tc>
+                  <a:txBody>
+                    <a:bodyPr/>
+                    <a:lstStyle/>
+                    <a:p>
+                      <a:pPr indent="0" marL="0">
+                        <a:buNone/>
+                      </a:pPr>
+                      <a:r>
+                        <a:rPr lang="en-US" sz="1300" dirty="0">
+                          <a:solidFill>
+                            <a:srgbClr val="E4E4E7"/>
+                          </a:solidFill>
+                          <a:latin typeface="Calibri" pitchFamily="34" charset="0"/>
+                          <a:ea typeface="Calibri" pitchFamily="34" charset="-122"/>
+                          <a:cs typeface="Calibri" pitchFamily="34" charset="-120"/>
+                        </a:rPr>
+                        <a:t>CAPD open outcry: broadcast the offer off-chain, settle on-chain, no exchange in between.</a:t>
+                      </a:r>
+                      <a:endParaRPr lang="en-US" sz="1300" dirty="0">
+                        <a:latin typeface="Calibri" charset="0"/>
+                        <a:ea typeface="Calibri" charset="0"/>
+                        <a:cs typeface="Calibri" charset="0"/>
+                      </a:endParaRPr>
+                    </a:p>
+                  </a:txBody>
+                  <a:tcPr marL="101600" marR="101600" marT="76200" marB="76200" anchor="ctr">
+                    <a:lnL w="25400" cap="flat" cmpd="sng" algn="ctr">
+                      <a:solidFill>
+                        <a:srgbClr val="0A0A0F"/>
+                      </a:solidFill>
+                      <a:prstDash val="solid"/>
+                      <a:round/>
+                      <a:headEnd type="none" w="med" len="med"/>
+                      <a:tailEnd type="none" w="med" len="med"/>
+                    </a:lnL>
+                    <a:lnR w="25400" cap="flat" cmpd="sng" algn="ctr">
+                      <a:solidFill>
+                        <a:srgbClr val="0A0A0F"/>
+                      </a:solidFill>
+                      <a:prstDash val="solid"/>
+                      <a:round/>
+                      <a:headEnd type="none" w="med" len="med"/>
+                      <a:tailEnd type="none" w="med" len="med"/>
+                    </a:lnR>
+                    <a:lnT w="25400" cap="flat" cmpd="sng" algn="ctr">
+                      <a:solidFill>
+                        <a:srgbClr val="0A0A0F"/>
+                      </a:solidFill>
+                      <a:prstDash val="solid"/>
+                      <a:round/>
+                      <a:headEnd type="none" w="med" len="med"/>
+                      <a:tailEnd type="none" w="med" len="med"/>
+                    </a:lnT>
+                    <a:lnB w="25400" cap="flat" cmpd="sng" algn="ctr">
+                      <a:solidFill>
+                        <a:srgbClr val="0A0A0F"/>
+                      </a:solidFill>
+                      <a:prstDash val="solid"/>
+                      <a:round/>
+                      <a:headEnd type="none" w="med" len="med"/>
+                      <a:tailEnd type="none" w="med" len="med"/>
+                    </a:lnB>
+                    <a:solidFill>
+                      <a:srgbClr val="26210F"/>
+                    </a:solidFill>
+                  </a:tcPr>
+                </a:tc>
+              </a:tr>
             </a:tbl>
           </a:graphicData>
         </a:graphic>
@@ -6360,7 +7367,7 @@
                 <a:ea typeface="Calibri" pitchFamily="34" charset="-122"/>
                 <a:cs typeface="Calibri" pitchFamily="34" charset="-120"/>
               </a:rPr>
-              <a:t>14</a:t>
+              <a:t>15</a:t>
             </a:r>
             <a:endParaRPr lang="en-US" sz="1000" dirty="0"/>
           </a:p>
@@ -6374,9 +7381,9 @@
 </p:sld>
 </file>
 
-<file path=ppt/slides/slide15.xml><?xml version="1.0" encoding="utf-8"?>
+<file path=ppt/slides/slide16.xml><?xml version="1.0" encoding="utf-8"?>
 <p:sld xmlns:a="http://schemas.openxmlformats.org/drawingml/2006/main" xmlns:r="http://schemas.openxmlformats.org/officeDocument/2006/relationships" xmlns:p="http://schemas.openxmlformats.org/presentationml/2006/main">
-  <p:cSld name="Slide 15">
+  <p:cSld name="Slide 16">
     <p:bg>
       <p:bgPr>
         <a:solidFill>
@@ -6893,7 +7900,7 @@
                 <a:ea typeface="Calibri" pitchFamily="34" charset="-122"/>
                 <a:cs typeface="Calibri" pitchFamily="34" charset="-120"/>
               </a:rPr>
-              <a:t>Two-second, sub-cent payments and protocol-native tokens for games, tickets and identity. Built for use, not for speculation.</a:t>
+              <a:t>Two-second, sub-cent payments, protocol-native tokens for games, tickets and identity, and open outcry trading over CAPD. Built for use, not for speculation.</a:t>
             </a:r>
             <a:endParaRPr lang="en-US" sz="1500" dirty="0"/>
           </a:p>
@@ -7034,7 +8041,7 @@
                 <a:ea typeface="Calibri" pitchFamily="34" charset="-122"/>
                 <a:cs typeface="Calibri" pitchFamily="34" charset="-120"/>
               </a:rPr>
-              <a:t>15</a:t>
+              <a:t>16</a:t>
             </a:r>
             <a:endParaRPr lang="en-US" sz="1000" dirty="0"/>
           </a:p>

--- a/docs/nexa-vs-bitcoin-ethereum/Nexa-vs-Bitcoin-Ethereum.pptx
+++ b/docs/nexa-vs-bitcoin-ethereum/Nexa-vs-Bitcoin-Ethereum.pptx
@@ -21,9 +21,12 @@
     <p:sldId id="269" r:id="rId15"/>
     <p:sldId id="270" r:id="rId16"/>
     <p:sldId id="271" r:id="rId17"/>
+    <p:sldId id="272" r:id="rId18"/>
+    <p:sldId id="273" r:id="rId19"/>
+    <p:sldId id="274" r:id="rId20"/>
   </p:sldIdLst>
   <p:notesMasterIdLst>
-    <p:notesMasterId r:id="rId18"/>
+    <p:notesMasterId r:id="rId21"/>
   </p:notesMasterIdLst>
   <p:sldSz cx="12192000" cy="6858000"/>
   <p:notesSz cx="6858000" cy="12192000"/>
@@ -605,7 +608,7 @@
           <a:p>
             <a:r>
               <a:rPr lang="en-US" dirty="0"/>
-              <a:t>Fee figures from explorer.nexa.org on 15 Sept 2026: the network fee rate is 1 satoshi per byte and a simple transaction is 250 to 320 bytes, so it pays 2.5 to 3.2 NEXA (100 satoshis = 1 NEXA). At the explorer's rate of $0.0000013 per NEXA that is about $0.000004, or roughly 0.004 øre. Update the price before presenting. nexa.org: 'confirms in under two seconds with near-zero fees', 'under $0.0001 per transaction'. Zero-conf with double-spend proofs is Bitcoin Unlimited technology carried into Nexa. Vipps reference: Norway is close to cashless; the point is that the user experience Norwegians expect is already the baseline here.</a:t>
+              <a:t>Tailstorm (spec.nexa.org/blocks/tailstorm): after Hard Fork 2 each two-minute summary block is backed by 120 sub-blocks, one about every second, giving a probabilistic, energy-backed inclusion signal within a second and lower income variance for miners; the ledger itself is still settled by the two-minute summary chain. Fee figures from explorer.nexa.org on 15 Sept 2026: the network fee rate is 1 satoshi per byte and a simple transaction is 250 to 320 bytes, so it pays 2.5 to 3.2 NEXA (100 satoshis = 1 NEXA). At the explorer's rate of $0.0000013 per NEXA that is about $0.000004, or roughly 0.004 øre. Update the price before presenting. nexa.org: 'confirms in under two seconds with near-zero fees', 'under $0.0001 per transaction'. Zero-conf with double-spend proofs is Bitcoin Unlimited technology carried into Nexa. Vipps reference: Norway is close to cashless; the point is that the user experience Norwegians expect is already the baseline here.</a:t>
             </a:r>
             <a:endParaRPr lang="en-US" dirty="0"/>
           </a:p>
@@ -781,7 +784,7 @@
           <a:p>
             <a:r>
               <a:rPr lang="en-US" dirty="0"/>
-              <a:t>CAPD is unique to Nexa: a decentralised, proof-of-work-rate-limited, ephemeral message bus on the P2P network (spec: spec.nexa.org/network/capd). Open outcry: the trading-floor model where offers are called out publicly and anyone can take them. Mechanics: the offer is a partially signed transaction; the advertised summary (which token for which) is only indicative, the half-signed transaction is authoritative, so a lying advertisement is harmless: the taker gets exactly what the transaction says or it is invalid. Messages carry a create time and an expiration, relay priority decays to zero after about 600 seconds, and a rescind hash lets the sender withdraw an offer early. Uses: token and NFT marketplaces without a marketplace operator, in-game item trading, atomic swaps, multisig wallet formation and signing rounds. Contrast: Bitcoin has no discovery layer, so trading means centralised exchanges; Ethereum needs an on-chain DEX contract and pays gas for every order and trade.</a:t>
+              <a:t>Source: spec.nexa.org/tokens/grouptokens and the libnexakotlin token library. Authority outputs carry a negative sign-magnitude value in the quantity slot with flag bits AUTHORITY, MINT, MELT, BATON, RESCRIPT and SUBGROUP. Minting is spending a MINT authority; melting needs MELT; SUBGROUP creates child groups (NFTs and SFTs under a parent). BATON is the master right to create child authorities, so routine mints should spend a plain MINT authority and preserve the baton; wallets keep a pool of spare MINT authorities so concurrent mints do not contend for one UTXO. Authorities are ordinary outputs: pay one to another address to delegate, or to a contract's locking script so the contract governs issuance (mint-on-demand as a half-signed transaction the buyer funds). Read-only inputs (spec.nexa.org/script/read-only-inputs) let a BATON authority grant powers to a transaction without being spent. Contrast: ERC-20 minting is a privileged function guarded by an owner key inside the contract; on Nexa the right is a coin you can split, send, lock or destroy.</a:t>
             </a:r>
             <a:endParaRPr lang="en-US" dirty="0"/>
           </a:p>
@@ -869,7 +872,7 @@
           <a:p>
             <a:r>
               <a:rPr lang="en-US" dirty="0"/>
-              <a:t>nexa.org: 'Native on-chain programmability without EVM complexity', 'No EVM overhead'. The developer stack: Wally wallet, TDPP payment protocol, nexid identity, CAPD messaging, NexaJS and libnexakotlin. Keep this slide short for a non-developer audience; expand only if asked.</a:t>
+              <a:t>CAPD is unique to Nexa: a decentralised, proof-of-work-rate-limited, ephemeral message bus on the P2P network (spec: spec.nexa.org/network/capd). Open outcry: the trading-floor model where offers are called out publicly and anyone can take them. Mechanics: the offer is a partially signed transaction; the advertised summary (which token for which) is only indicative, the half-signed transaction is authoritative, so a lying advertisement is harmless: the taker gets exactly what the transaction says or it is invalid. Messages carry a create time and an expiration, relay priority decays to zero after about 600 seconds, and a rescind hash lets the sender withdraw an offer early. Uses: token and NFT marketplaces without a marketplace operator, in-game item trading, atomic swaps, multisig wallet formation and signing rounds. Contrast: Bitcoin has no discovery layer, so trading means centralised exchanges; Ethereum needs an on-chain DEX contract and pays gas for every order and trade.</a:t>
             </a:r>
             <a:endParaRPr lang="en-US" dirty="0"/>
           </a:p>
@@ -957,7 +960,7 @@
           <a:p>
             <a:r>
               <a:rPr lang="en-US" dirty="0"/>
-              <a:t>SSB: 98% of Norway's electricity from hydro and wind (late 2025); normal annual production ~157 TWh, consumption ~140 TWh. June 2025: the government announced a temporary ban on new proof-of-work mining data centres, with a mandatory data-centre registry; officials have hinted it may become permanent. Be honest: the ban applies to PoW mining generally, so a Nexa farm would be covered too. The point is that Nexa's network does not depend on farms anywhere.</a:t>
+              <a:t>Source: spec.nexa.org/tokensecret (Token Secrets, also called Atomic Secret Exchange, ASE, and the basis for private NFTs). Requirements the protocol meets: the transfer reveals the secret to the recipient at the same time as the token; the transaction reveals nothing to third parties even though it sits on a public chain; the recipient or the chain verifies that the communicated secret matches the one the token committed to. Mechanics: the secret must be an EC private key whose public key is committed in the mint or the group id; Alice and Bob build a half-transaction where Bob's input needs two signatures, one from the secret's key and one from a key only Bob has; an ECDH shared secret encrypts the private key for Bob. Caveat from the spec: after the transfer Alice still knows the key, so it suits selling access to content where perfect DRM is unrealistic; the value is verification against substitution during the trade.</a:t>
             </a:r>
             <a:endParaRPr lang="en-US" dirty="0"/>
           </a:p>
@@ -1045,7 +1048,7 @@
           <a:p>
             <a:r>
               <a:rPr lang="en-US" dirty="0"/>
-              <a:t>One-slide answer to the organisers' three themes: energy and e-waste, who benefits, and NFT speculation. Every figure appears earlier in the deck with its source.</a:t>
+              <a:t>nexa.org: 'Native on-chain programmability without EVM complexity', 'No EVM overhead'. The developer stack: Wally wallet, TDPP payment protocol, nexid identity, CAPD messaging, NexaJS and libnexakotlin. Keep this slide short for a non-developer audience; expand only if asked.</a:t>
             </a:r>
             <a:endParaRPr lang="en-US" dirty="0"/>
           </a:p>
@@ -1133,7 +1136,7 @@
           <a:p>
             <a:r>
               <a:rPr lang="en-US" dirty="0"/>
-              <a:t>Close on the three answers to the three concerns. If challenged on the 13,000x figure: it is a capacity comparison at equal network power, 5,600x on today's benchmark and 13,000x with Blitz; the floor is 1,000x because Bitcoin cannot exceed ~14 TPS.</a:t>
+              <a:t>Sources: spec.nexa.org/nexid (Nexa Identity Protocol), spec.nexa.org/transactions/challengeTransaction, spec.nexa.org/dpp (Delegated Payment Protocol). nexid: the website presents a login offer with a random challenge via QR or browser plugin; the wallet derives a site-specific private key from the master key plus an optional site password, signs, and sends the signed message directly to the server, bypassing the untrusted computer; backup is the 12-word phrase. Challenge transactions: a transaction with the version high bit set is invalid forever; a single data output carries the challenger's identity and a random challenge; signing it proves control of the referenced UTXOs under any script, which ordinary message signing cannot do for multisig or contracts. DPP: the entity registers with proposed limits and sends signed payment requests; the wallet, not the merchant, decides automatic versus prompted execution. For a Norwegian audience: BankID for login, AvtaleGiro and card-on-file for payments are the familiar comparisons.</a:t>
             </a:r>
             <a:endParaRPr lang="en-US" dirty="0"/>
           </a:p>
@@ -1157,6 +1160,270 @@
             <a:fld id="{F7021451-1387-4CA6-816F-3879F97B5CBC}" type="slidenum">
               <a:rPr lang="en-US"/>
               <a:t>16</a:t>
+            </a:fld>
+            <a:endParaRPr lang="en-US"/>
+          </a:p>
+        </p:txBody>
+      </p:sp>
+    </p:spTree>
+    <p:extLst>
+      <p:ext uri="{BB962C8B-B14F-4D97-AF65-F5344CB8AC3E}">
+        <p14:creationId xmlns:p14="http://schemas.microsoft.com/office/powerpoint/2010/main" val="1024086991"/>
+      </p:ext>
+    </p:extLst>
+  </p:cSld>
+  <p:clrMapOvr>
+    <a:masterClrMapping/>
+  </p:clrMapOvr>
+</p:notes>
+</file>
+
+<file path=ppt/notesSlides/notesSlide17.xml><?xml version="1.0" encoding="utf-8"?>
+<p:notes xmlns:a="http://schemas.openxmlformats.org/drawingml/2006/main" xmlns:r="http://schemas.openxmlformats.org/officeDocument/2006/relationships" xmlns:p="http://schemas.openxmlformats.org/presentationml/2006/main">
+  <p:cSld>
+    <p:spTree>
+      <p:nvGrpSpPr>
+        <p:cNvPr id="1" name=""/>
+        <p:cNvGrpSpPr/>
+        <p:nvPr/>
+      </p:nvGrpSpPr>
+      <p:grpSpPr>
+        <a:xfrm>
+          <a:off x="0" y="0"/>
+          <a:ext cx="0" cy="0"/>
+          <a:chOff x="0" y="0"/>
+          <a:chExt cx="0" cy="0"/>
+        </a:xfrm>
+      </p:grpSpPr>
+      <p:sp>
+        <p:nvSpPr>
+          <p:cNvPr id="2" name="Slide Image Placeholder 1"/>
+          <p:cNvSpPr>
+            <a:spLocks noGrp="1" noRot="1" noChangeAspect="1"/>
+          </p:cNvSpPr>
+          <p:nvPr>
+            <p:ph type="sldImg"/>
+          </p:nvPr>
+        </p:nvSpPr>
+        <p:spPr/>
+      </p:sp>
+      <p:sp>
+        <p:nvSpPr>
+          <p:cNvPr id="3" name="Notes Placeholder 2"/>
+          <p:cNvSpPr>
+            <a:spLocks noGrp="1"/>
+          </p:cNvSpPr>
+          <p:nvPr>
+            <p:ph type="body" idx="1"/>
+          </p:nvPr>
+        </p:nvSpPr>
+        <p:spPr/>
+        <p:txBody>
+          <a:bodyPr/>
+          <a:lstStyle/>
+          <a:p>
+            <a:r>
+              <a:rPr lang="en-US" dirty="0"/>
+              <a:t>SSB: 98% of Norway's electricity from hydro and wind (late 2025); normal annual production ~157 TWh, consumption ~140 TWh. June 2025: the government announced a temporary ban on new proof-of-work mining data centres, with a mandatory data-centre registry; officials have hinted it may become permanent. Be honest: the ban applies to PoW mining generally, so a Nexa farm would be covered too. The point is that Nexa's network does not depend on farms anywhere.</a:t>
+            </a:r>
+            <a:endParaRPr lang="en-US" dirty="0"/>
+          </a:p>
+        </p:txBody>
+      </p:sp>
+      <p:sp>
+        <p:nvSpPr>
+          <p:cNvPr id="4" name="Slide Number Placeholder 3"/>
+          <p:cNvSpPr>
+            <a:spLocks noGrp="1"/>
+          </p:cNvSpPr>
+          <p:nvPr>
+            <p:ph type="sldNum" sz="quarter" idx="10"/>
+          </p:nvPr>
+        </p:nvSpPr>
+        <p:spPr/>
+        <p:txBody>
+          <a:bodyPr/>
+          <a:lstStyle/>
+          <a:p>
+            <a:fld id="{F7021451-1387-4CA6-816F-3879F97B5CBC}" type="slidenum">
+              <a:rPr lang="en-US"/>
+              <a:t>17</a:t>
+            </a:fld>
+            <a:endParaRPr lang="en-US"/>
+          </a:p>
+        </p:txBody>
+      </p:sp>
+    </p:spTree>
+    <p:extLst>
+      <p:ext uri="{BB962C8B-B14F-4D97-AF65-F5344CB8AC3E}">
+        <p14:creationId xmlns:p14="http://schemas.microsoft.com/office/powerpoint/2010/main" val="1024086991"/>
+      </p:ext>
+    </p:extLst>
+  </p:cSld>
+  <p:clrMapOvr>
+    <a:masterClrMapping/>
+  </p:clrMapOvr>
+</p:notes>
+</file>
+
+<file path=ppt/notesSlides/notesSlide18.xml><?xml version="1.0" encoding="utf-8"?>
+<p:notes xmlns:a="http://schemas.openxmlformats.org/drawingml/2006/main" xmlns:r="http://schemas.openxmlformats.org/officeDocument/2006/relationships" xmlns:p="http://schemas.openxmlformats.org/presentationml/2006/main">
+  <p:cSld>
+    <p:spTree>
+      <p:nvGrpSpPr>
+        <p:cNvPr id="1" name=""/>
+        <p:cNvGrpSpPr/>
+        <p:nvPr/>
+      </p:nvGrpSpPr>
+      <p:grpSpPr>
+        <a:xfrm>
+          <a:off x="0" y="0"/>
+          <a:ext cx="0" cy="0"/>
+          <a:chOff x="0" y="0"/>
+          <a:chExt cx="0" cy="0"/>
+        </a:xfrm>
+      </p:grpSpPr>
+      <p:sp>
+        <p:nvSpPr>
+          <p:cNvPr id="2" name="Slide Image Placeholder 1"/>
+          <p:cNvSpPr>
+            <a:spLocks noGrp="1" noRot="1" noChangeAspect="1"/>
+          </p:cNvSpPr>
+          <p:nvPr>
+            <p:ph type="sldImg"/>
+          </p:nvPr>
+        </p:nvSpPr>
+        <p:spPr/>
+      </p:sp>
+      <p:sp>
+        <p:nvSpPr>
+          <p:cNvPr id="3" name="Notes Placeholder 2"/>
+          <p:cNvSpPr>
+            <a:spLocks noGrp="1"/>
+          </p:cNvSpPr>
+          <p:nvPr>
+            <p:ph type="body" idx="1"/>
+          </p:nvPr>
+        </p:nvSpPr>
+        <p:spPr/>
+        <p:txBody>
+          <a:bodyPr/>
+          <a:lstStyle/>
+          <a:p>
+            <a:r>
+              <a:rPr lang="en-US" dirty="0"/>
+              <a:t>One-slide answer to the organisers' three themes: energy and e-waste, who benefits, and NFT speculation. Every figure appears earlier in the deck with its source.</a:t>
+            </a:r>
+            <a:endParaRPr lang="en-US" dirty="0"/>
+          </a:p>
+        </p:txBody>
+      </p:sp>
+      <p:sp>
+        <p:nvSpPr>
+          <p:cNvPr id="4" name="Slide Number Placeholder 3"/>
+          <p:cNvSpPr>
+            <a:spLocks noGrp="1"/>
+          </p:cNvSpPr>
+          <p:nvPr>
+            <p:ph type="sldNum" sz="quarter" idx="10"/>
+          </p:nvPr>
+        </p:nvSpPr>
+        <p:spPr/>
+        <p:txBody>
+          <a:bodyPr/>
+          <a:lstStyle/>
+          <a:p>
+            <a:fld id="{F7021451-1387-4CA6-816F-3879F97B5CBC}" type="slidenum">
+              <a:rPr lang="en-US"/>
+              <a:t>18</a:t>
+            </a:fld>
+            <a:endParaRPr lang="en-US"/>
+          </a:p>
+        </p:txBody>
+      </p:sp>
+    </p:spTree>
+    <p:extLst>
+      <p:ext uri="{BB962C8B-B14F-4D97-AF65-F5344CB8AC3E}">
+        <p14:creationId xmlns:p14="http://schemas.microsoft.com/office/powerpoint/2010/main" val="1024086991"/>
+      </p:ext>
+    </p:extLst>
+  </p:cSld>
+  <p:clrMapOvr>
+    <a:masterClrMapping/>
+  </p:clrMapOvr>
+</p:notes>
+</file>
+
+<file path=ppt/notesSlides/notesSlide19.xml><?xml version="1.0" encoding="utf-8"?>
+<p:notes xmlns:a="http://schemas.openxmlformats.org/drawingml/2006/main" xmlns:r="http://schemas.openxmlformats.org/officeDocument/2006/relationships" xmlns:p="http://schemas.openxmlformats.org/presentationml/2006/main">
+  <p:cSld>
+    <p:spTree>
+      <p:nvGrpSpPr>
+        <p:cNvPr id="1" name=""/>
+        <p:cNvGrpSpPr/>
+        <p:nvPr/>
+      </p:nvGrpSpPr>
+      <p:grpSpPr>
+        <a:xfrm>
+          <a:off x="0" y="0"/>
+          <a:ext cx="0" cy="0"/>
+          <a:chOff x="0" y="0"/>
+          <a:chExt cx="0" cy="0"/>
+        </a:xfrm>
+      </p:grpSpPr>
+      <p:sp>
+        <p:nvSpPr>
+          <p:cNvPr id="2" name="Slide Image Placeholder 1"/>
+          <p:cNvSpPr>
+            <a:spLocks noGrp="1" noRot="1" noChangeAspect="1"/>
+          </p:cNvSpPr>
+          <p:nvPr>
+            <p:ph type="sldImg"/>
+          </p:nvPr>
+        </p:nvSpPr>
+        <p:spPr/>
+      </p:sp>
+      <p:sp>
+        <p:nvSpPr>
+          <p:cNvPr id="3" name="Notes Placeholder 2"/>
+          <p:cNvSpPr>
+            <a:spLocks noGrp="1"/>
+          </p:cNvSpPr>
+          <p:nvPr>
+            <p:ph type="body" idx="1"/>
+          </p:nvPr>
+        </p:nvSpPr>
+        <p:spPr/>
+        <p:txBody>
+          <a:bodyPr/>
+          <a:lstStyle/>
+          <a:p>
+            <a:r>
+              <a:rPr lang="en-US" dirty="0"/>
+              <a:t>Close on the three answers to the three concerns. If challenged on the 13,000x figure: it is a capacity comparison at equal network power, 5,600x on today's benchmark and 13,000x with Blitz; the floor is 1,000x because Bitcoin cannot exceed ~14 TPS.</a:t>
+            </a:r>
+            <a:endParaRPr lang="en-US" dirty="0"/>
+          </a:p>
+        </p:txBody>
+      </p:sp>
+      <p:sp>
+        <p:nvSpPr>
+          <p:cNvPr id="4" name="Slide Number Placeholder 3"/>
+          <p:cNvSpPr>
+            <a:spLocks noGrp="1"/>
+          </p:cNvSpPr>
+          <p:nvPr>
+            <p:ph type="sldNum" sz="quarter" idx="10"/>
+          </p:nvPr>
+        </p:nvSpPr>
+        <p:spPr/>
+        <p:txBody>
+          <a:bodyPr/>
+          <a:lstStyle/>
+          <a:p>
+            <a:fld id="{F7021451-1387-4CA6-816F-3879F97B5CBC}" type="slidenum">
+              <a:rPr lang="en-US"/>
+              <a:t>19</a:t>
             </a:fld>
             <a:endParaRPr lang="en-US"/>
           </a:p>
@@ -2800,7 +3067,7 @@
                 <a:ea typeface="Calibri" pitchFamily="34" charset="-122"/>
                 <a:cs typeface="Calibri" pitchFamily="34" charset="-120"/>
               </a:rPr>
-              <a:t>Zero-confirmation payments secured by double-spend proofs confirm in under two seconds. Blocks follow every two minutes. No waiting an hour for six confirmations.</a:t>
+              <a:t>Zero-confirmation payments secured by double-spend proofs confirm in under two seconds. Blocks follow every two minutes, and after Hard Fork 2 Tailstorm adds a proof-of-work-backed sub-block every second.</a:t>
             </a:r>
             <a:endParaRPr lang="en-US" sz="1500" dirty="0"/>
           </a:p>
@@ -3931,7 +4198,7 @@
                 <a:ea typeface="Calibri" pitchFamily="34" charset="-122"/>
                 <a:cs typeface="Calibri" pitchFamily="34" charset="-120"/>
               </a:rPr>
-              <a:t>Open outcry trading over CAPD: shout an offer, anyone can take it</a:t>
+              <a:t>Minting rights are coins too: authority batons</a:t>
             </a:r>
             <a:endParaRPr lang="en-US" sz="3000" dirty="0"/>
           </a:p>
@@ -3946,7 +4213,7 @@
         <p:spPr>
           <a:xfrm>
             <a:off x="548640" y="1691640"/>
-            <a:ext cx="3515258" cy="3657600"/>
+            <a:ext cx="3515258" cy="4206240"/>
           </a:xfrm>
           <a:prstGeom prst="roundRect">
             <a:avLst>
@@ -4046,7 +4313,7 @@
                 <a:ea typeface="Calibri" pitchFamily="34" charset="-122"/>
                 <a:cs typeface="Calibri" pitchFamily="34" charset="-120"/>
               </a:rPr>
-              <a:t>Shout the offer to the network</a:t>
+              <a:t>Authority lives in a UTXO</a:t>
             </a:r>
             <a:endParaRPr lang="en-US" sz="1800" dirty="0"/>
           </a:p>
@@ -4061,7 +4328,7 @@
         <p:spPr>
           <a:xfrm>
             <a:off x="822960" y="3474720"/>
-            <a:ext cx="2966618" cy="1600200"/>
+            <a:ext cx="2966618" cy="2148840"/>
           </a:xfrm>
           <a:prstGeom prst="rect">
             <a:avLst/>
@@ -4088,7 +4355,7 @@
                 <a:ea typeface="Calibri" pitchFamily="34" charset="-122"/>
                 <a:cs typeface="Calibri" pitchFamily="34" charset="-120"/>
               </a:rPr>
-              <a:t>CAPD (Counterparty and Protocol Discovery) is a message bus carried by the same nodes that relay transactions. You broadcast a half-signed offer, say 100 tokens for 5,000 NEXA, and every node passes it on, like a trader calling out a price on the floor.</a:t>
+              <a:t>A token group's powers, MINT, MELT, SUBGROUP, RESCRIPT and BATON, are flags on a special output. Minting means spending a MINT authority in a transaction that creates the new tokens. There is no admin key inside a contract and no owner() function to hack.</a:t>
             </a:r>
             <a:endParaRPr lang="en-US" sz="1500" dirty="0"/>
           </a:p>
@@ -4103,7 +4370,7 @@
         <p:spPr>
           <a:xfrm>
             <a:off x="4338218" y="1691640"/>
-            <a:ext cx="3515258" cy="3657600"/>
+            <a:ext cx="3515258" cy="4206240"/>
           </a:xfrm>
           <a:prstGeom prst="roundRect">
             <a:avLst>
@@ -4203,7 +4470,7 @@
                 <a:ea typeface="Calibri" pitchFamily="34" charset="-122"/>
                 <a:cs typeface="Calibri" pitchFamily="34" charset="-120"/>
               </a:rPr>
-              <a:t>No exchange, no order-book server</a:t>
+              <a:t>Send a baton like any coin</a:t>
             </a:r>
             <a:endParaRPr lang="en-US" sz="1800" dirty="0"/>
           </a:p>
@@ -4218,7 +4485,7 @@
         <p:spPr>
           <a:xfrm>
             <a:off x="4612538" y="3474720"/>
-            <a:ext cx="2966618" cy="1600200"/>
+            <a:ext cx="2966618" cy="2148840"/>
           </a:xfrm>
           <a:prstGeom prst="rect">
             <a:avLst/>
@@ -4245,7 +4512,7 @@
                 <a:ea typeface="Calibri" pitchFamily="34" charset="-122"/>
                 <a:cs typeface="Calibri" pitchFamily="34" charset="-120"/>
               </a:rPr>
-              <a:t>Whoever wants the deal completes the half-signed transaction and broadcasts it. The swap settles on-chain in one atomic transaction, with no exchange, listing fee or matching server in between. Bitcoin has no such layer; on Ethereum it takes a DEX contract and gas per trade.</a:t>
+              <a:t>BATON is the right to create new authorities. Split the baton into a pool of MINT-only authorities, hand one to a partner who may issue but never destroy, and keep the baton itself cold. Used as a read-only input, a baton grants its powers without being consumed.</a:t>
             </a:r>
             <a:endParaRPr lang="en-US" sz="1500" dirty="0"/>
           </a:p>
@@ -4260,7 +4527,7 @@
         <p:spPr>
           <a:xfrm>
             <a:off x="8127797" y="1691640"/>
-            <a:ext cx="3515258" cy="3657600"/>
+            <a:ext cx="3515258" cy="4206240"/>
           </a:xfrm>
           <a:prstGeom prst="roundRect">
             <a:avLst>
@@ -4360,7 +4627,7 @@
                 <a:ea typeface="Calibri" pitchFamily="34" charset="-122"/>
                 <a:cs typeface="Calibri" pitchFamily="34" charset="-120"/>
               </a:rPr>
-              <a:t>Proof of work instead of fees, then it disappears</a:t>
+              <a:t>Or hand it to a smart contract</a:t>
             </a:r>
             <a:endParaRPr lang="en-US" sz="1800" dirty="0"/>
           </a:p>
@@ -4375,7 +4642,7 @@
         <p:spPr>
           <a:xfrm>
             <a:off x="8402117" y="3474720"/>
-            <a:ext cx="2966618" cy="1600200"/>
+            <a:ext cx="2966618" cy="2148840"/>
           </a:xfrm>
           <a:prstGeom prst="rect">
             <a:avLst/>
@@ -4402,7 +4669,7 @@
                 <a:ea typeface="Calibri" pitchFamily="34" charset="-122"/>
                 <a:cs typeface="Calibri" pitchFamily="34" charset="-120"/>
               </a:rPr>
-              <a:t>Senders solve a small proof of work instead of paying a fee, which keeps spam out. Offers are ephemeral: they fade from relay in about ten minutes unless re-broadcast, can be withdrawn early, and never touch the blockchain until someone takes them.</a:t>
+              <a:t>Pay an authority into a script-template contract and the contract's rules decide when tokens are minted: mint-on-demand where the NFT is created only when the buyer pays, or a covenant that only lets the authority continue inside the same contract. Lose the authority output and you lose the mint.</a:t>
             </a:r>
             <a:endParaRPr lang="en-US" sz="1500" dirty="0"/>
           </a:p>
@@ -4575,7 +4842,7 @@
                 <a:ea typeface="Calibri" pitchFamily="34" charset="-122"/>
                 <a:cs typeface="Calibri" pitchFamily="34" charset="-120"/>
               </a:rPr>
-              <a:t>Smart contracts without the EVM</a:t>
+              <a:t>Open outcry trading over CAPD: shout an offer, anyone can take it</a:t>
             </a:r>
             <a:endParaRPr lang="en-US" sz="3000" dirty="0"/>
           </a:p>
@@ -4690,7 +4957,7 @@
                 <a:ea typeface="Calibri" pitchFamily="34" charset="-122"/>
                 <a:cs typeface="Calibri" pitchFamily="34" charset="-120"/>
               </a:rPr>
-              <a:t>Script templates</a:t>
+              <a:t>Shout the offer to the network</a:t>
             </a:r>
             <a:endParaRPr lang="en-US" sz="1800" dirty="0"/>
           </a:p>
@@ -4732,7 +4999,7 @@
                 <a:ea typeface="Calibri" pitchFamily="34" charset="-122"/>
                 <a:cs typeface="Calibri" pitchFamily="34" charset="-120"/>
               </a:rPr>
-              <a:t>Contracts are small, deterministic scripts attached to coins and validated in parallel like any other transaction. There is no global state machine to congest.</a:t>
+              <a:t>CAPD (Counterparty and Protocol Discovery) is a message bus carried by the same nodes that relay transactions. You broadcast a half-signed offer, say 100 tokens for 5,000 NEXA, and every node passes it on, like a trader calling out a price on the floor.</a:t>
             </a:r>
             <a:endParaRPr lang="en-US" sz="1500" dirty="0"/>
           </a:p>
@@ -4847,7 +5114,7 @@
                 <a:ea typeface="Calibri" pitchFamily="34" charset="-122"/>
                 <a:cs typeface="Calibri" pitchFamily="34" charset="-120"/>
               </a:rPr>
-              <a:t>No EVM overhead</a:t>
+              <a:t>No exchange, no order-book server</a:t>
             </a:r>
             <a:endParaRPr lang="en-US" sz="1800" dirty="0"/>
           </a:p>
@@ -4889,7 +5156,7 @@
                 <a:ea typeface="Calibri" pitchFamily="34" charset="-122"/>
                 <a:cs typeface="Calibri" pitchFamily="34" charset="-120"/>
               </a:rPr>
-              <a:t>No gas market, no reentrancy class of bugs, no fee spike for everyone when one app gets popular. Contracts run at the same 42,000 TPS as plain payments.</a:t>
+              <a:t>Whoever wants the deal completes the half-signed transaction and broadcasts it. The swap settles on-chain in one atomic transaction, with no exchange, listing fee or matching server in between. Bitcoin has no such layer; on Ethereum it takes a DEX contract and gas per trade.</a:t>
             </a:r>
             <a:endParaRPr lang="en-US" sz="1500" dirty="0"/>
           </a:p>
@@ -5004,7 +5271,7 @@
                 <a:ea typeface="Calibri" pitchFamily="34" charset="-122"/>
                 <a:cs typeface="Calibri" pitchFamily="34" charset="-120"/>
               </a:rPr>
-              <a:t>A full platform</a:t>
+              <a:t>Proof of work instead of fees, then it disappears</a:t>
             </a:r>
             <a:endParaRPr lang="en-US" sz="1800" dirty="0"/>
           </a:p>
@@ -5046,7 +5313,7 @@
                 <a:ea typeface="Calibri" pitchFamily="34" charset="-122"/>
                 <a:cs typeface="Calibri" pitchFamily="34" charset="-120"/>
               </a:rPr>
-              <a:t>Wallet login with on-chain identity, payment requests to the user's wallet and peer-to-peer messaging are part of the stack, with Kotlin and JavaScript libraries.</a:t>
+              <a:t>Senders solve a small proof of work instead of paying a fee, which keeps spam out. Offers are ephemeral: they fade from relay in about ten minutes unless re-broadcast, can be withdrawn early, and never touch the blockchain until someone takes them.</a:t>
             </a:r>
             <a:endParaRPr lang="en-US" sz="1500" dirty="0"/>
           </a:p>
@@ -5219,7 +5486,7 @@
                 <a:ea typeface="Calibri" pitchFamily="34" charset="-122"/>
                 <a:cs typeface="Calibri" pitchFamily="34" charset="-120"/>
               </a:rPr>
-              <a:t>Why this matters in Norway</a:t>
+              <a:t>Token Secrets: sell the secret together with the token</a:t>
             </a:r>
             <a:endParaRPr lang="en-US" sz="3000" dirty="0"/>
           </a:p>
@@ -5234,7 +5501,7 @@
         <p:spPr>
           <a:xfrm>
             <a:off x="548640" y="1691640"/>
-            <a:ext cx="3515258" cy="3657600"/>
+            <a:ext cx="3515258" cy="4206240"/>
           </a:xfrm>
           <a:prstGeom prst="roundRect">
             <a:avLst>
@@ -5334,7 +5601,7 @@
                 <a:ea typeface="Calibri" pitchFamily="34" charset="-122"/>
                 <a:cs typeface="Calibri" pitchFamily="34" charset="-120"/>
               </a:rPr>
-              <a:t>A clean grid under pressure</a:t>
+              <a:t>A token that carries a secret</a:t>
             </a:r>
             <a:endParaRPr lang="en-US" sz="1800" dirty="0"/>
           </a:p>
@@ -5349,7 +5616,7 @@
         <p:spPr>
           <a:xfrm>
             <a:off x="822960" y="3474720"/>
-            <a:ext cx="2966618" cy="1600200"/>
+            <a:ext cx="2966618" cy="2148840"/>
           </a:xfrm>
           <a:prstGeom prst="rect">
             <a:avLst/>
@@ -5376,7 +5643,7 @@
                 <a:ea typeface="Calibri" pitchFamily="34" charset="-122"/>
                 <a:cs typeface="Calibri" pitchFamily="34" charset="-120"/>
               </a:rPr>
-              <a:t>98% of Norway's electricity is hydro and wind, yet in 2025 the government froze new proof-of-work data centres to protect grid capacity. Nexa mining runs on ordinary GPUs and does not depend on data centres.</a:t>
+              <a:t>The token commits to the public key of a secret, an elliptic-curve private key, at mint or inside the group id. Whoever holds the token holds the secret: a game key, a ticket, the key to encrypted content.</a:t>
             </a:r>
             <a:endParaRPr lang="en-US" sz="1500" dirty="0"/>
           </a:p>
@@ -5391,7 +5658,7 @@
         <p:spPr>
           <a:xfrm>
             <a:off x="4338218" y="1691640"/>
-            <a:ext cx="3515258" cy="3657600"/>
+            <a:ext cx="3515258" cy="4206240"/>
           </a:xfrm>
           <a:prstGeom prst="roundRect">
             <a:avLst>
@@ -5424,11 +5691,11 @@
             <a:avLst/>
           </a:prstGeom>
           <a:solidFill>
-            <a:srgbClr val="F7931A"/>
+            <a:srgbClr val="F2CD3A"/>
           </a:solidFill>
           <a:ln w="12700">
             <a:solidFill>
-              <a:srgbClr val="F7931A"/>
+              <a:srgbClr val="F2CD3A"/>
             </a:solidFill>
             <a:prstDash val="solid"/>
           </a:ln>
@@ -5491,7 +5758,7 @@
                 <a:ea typeface="Calibri" pitchFamily="34" charset="-122"/>
                 <a:cs typeface="Calibri" pitchFamily="34" charset="-120"/>
               </a:rPr>
-              <a:t>Bitcoin ≈ Norway</a:t>
+              <a:t>Revealed to the buyer, hidden from everyone else</a:t>
             </a:r>
             <a:endParaRPr lang="en-US" sz="1800" dirty="0"/>
           </a:p>
@@ -5506,7 +5773,7 @@
         <p:spPr>
           <a:xfrm>
             <a:off x="4612538" y="3474720"/>
-            <a:ext cx="2966618" cy="1600200"/>
+            <a:ext cx="2966618" cy="2148840"/>
           </a:xfrm>
           <a:prstGeom prst="rect">
             <a:avLst/>
@@ -5533,7 +5800,7 @@
                 <a:ea typeface="Calibri" pitchFamily="34" charset="-122"/>
                 <a:cs typeface="Calibri" pitchFamily="34" charset="-120"/>
               </a:rPr>
-              <a:t>Bitcoin's roughly 140 TWh a year equals Norway's entire electricity consumption, for 7 transactions per second. The same electricity on Nexa would carry thousands of times more payments.</a:t>
+              <a:t>The transfer transaction runs a Diffie-Hellman key exchange, so the secret is delivered to the buyer encrypted inside the transaction. The public chain leaks nothing, and the chain verifies that it is the real secret, so the seller cannot swap in a fake one.</a:t>
             </a:r>
             <a:endParaRPr lang="en-US" sz="1500" dirty="0"/>
           </a:p>
@@ -5548,7 +5815,7 @@
         <p:spPr>
           <a:xfrm>
             <a:off x="8127797" y="1691640"/>
-            <a:ext cx="3515258" cy="3657600"/>
+            <a:ext cx="3515258" cy="4206240"/>
           </a:xfrm>
           <a:prstGeom prst="roundRect">
             <a:avLst>
@@ -5648,7 +5915,7 @@
                 <a:ea typeface="Calibri" pitchFamily="34" charset="-122"/>
                 <a:cs typeface="Calibri" pitchFamily="34" charset="-120"/>
               </a:rPr>
-              <a:t>A cashless country</a:t>
+              <a:t>Atomic exchange, not DRM</a:t>
             </a:r>
             <a:endParaRPr lang="en-US" sz="1800" dirty="0"/>
           </a:p>
@@ -5663,7 +5930,7 @@
         <p:spPr>
           <a:xfrm>
             <a:off x="8402117" y="3474720"/>
-            <a:ext cx="2966618" cy="1600200"/>
+            <a:ext cx="2966618" cy="2148840"/>
           </a:xfrm>
           <a:prstGeom prst="rect">
             <a:avLst/>
@@ -5690,7 +5957,7 @@
                 <a:ea typeface="Calibri" pitchFamily="34" charset="-122"/>
                 <a:cs typeface="Calibri" pitchFamily="34" charset="-120"/>
               </a:rPr>
-              <a:t>Norwegians already pay by phone in seconds. A sound-money rail that settles in two seconds for a fraction of an øre fits how people here already live.</a:t>
+              <a:t>Token and secret change hands in the same transaction, with no trusted middleman. The seller still knows the secret afterwards, so this secures the exchange rather than copy protection. Bitcoin and Ethereum have no equivalent primitive.</a:t>
             </a:r>
             <a:endParaRPr lang="en-US" sz="1500" dirty="0"/>
           </a:p>
@@ -5863,6 +6130,1938 @@
                 <a:ea typeface="Calibri" pitchFamily="34" charset="-122"/>
                 <a:cs typeface="Calibri" pitchFamily="34" charset="-120"/>
               </a:rPr>
+              <a:t>Smart contracts without the EVM</a:t>
+            </a:r>
+            <a:endParaRPr lang="en-US" sz="3000" dirty="0"/>
+          </a:p>
+        </p:txBody>
+      </p:sp>
+      <p:sp>
+        <p:nvSpPr>
+          <p:cNvPr id="3" name="Shape 1"/>
+          <p:cNvSpPr/>
+          <p:nvPr/>
+        </p:nvSpPr>
+        <p:spPr>
+          <a:xfrm>
+            <a:off x="548640" y="1691640"/>
+            <a:ext cx="3515258" cy="3657600"/>
+          </a:xfrm>
+          <a:prstGeom prst="roundRect">
+            <a:avLst>
+              <a:gd name="adj" fmla="val 3121"/>
+            </a:avLst>
+          </a:prstGeom>
+          <a:solidFill>
+            <a:srgbClr val="18181B"/>
+          </a:solidFill>
+          <a:ln w="9525">
+            <a:solidFill>
+              <a:srgbClr val="2E2E35"/>
+            </a:solidFill>
+            <a:prstDash val="solid"/>
+          </a:ln>
+        </p:spPr>
+      </p:sp>
+      <p:sp>
+        <p:nvSpPr>
+          <p:cNvPr id="4" name="Shape 2"/>
+          <p:cNvSpPr/>
+          <p:nvPr/>
+        </p:nvSpPr>
+        <p:spPr>
+          <a:xfrm>
+            <a:off x="822960" y="1965960"/>
+            <a:ext cx="640080" cy="640080"/>
+          </a:xfrm>
+          <a:prstGeom prst="ellipse">
+            <a:avLst/>
+          </a:prstGeom>
+          <a:solidFill>
+            <a:srgbClr val="F2CD3A"/>
+          </a:solidFill>
+          <a:ln w="12700">
+            <a:solidFill>
+              <a:srgbClr val="F2CD3A"/>
+            </a:solidFill>
+            <a:prstDash val="solid"/>
+          </a:ln>
+        </p:spPr>
+      </p:sp>
+      <p:pic>
+        <p:nvPicPr>
+          <p:cNvPr id="5" name="Image 0" descr="preencoded.png">    </p:cNvPr>
+          <p:cNvPicPr>
+            <a:picLocks noChangeAspect="1"/>
+          </p:cNvPicPr>
+          <p:nvPr/>
+        </p:nvPicPr>
+        <p:blipFill>
+          <a:blip r:embed="rId1"/>
+          <a:stretch>
+            <a:fillRect/>
+          </a:stretch>
+        </p:blipFill>
+        <p:spPr>
+          <a:xfrm>
+            <a:off x="976579" y="2119579"/>
+            <a:ext cx="332842" cy="332842"/>
+          </a:xfrm>
+          <a:prstGeom prst="rect">
+            <a:avLst/>
+          </a:prstGeom>
+        </p:spPr>
+      </p:pic>
+      <p:sp>
+        <p:nvSpPr>
+          <p:cNvPr id="6" name="Text 3"/>
+          <p:cNvSpPr txBox="1"/>
+          <p:nvPr/>
+        </p:nvSpPr>
+        <p:spPr>
+          <a:xfrm>
+            <a:off x="822960" y="2788920"/>
+            <a:ext cx="2966618" cy="640080"/>
+          </a:xfrm>
+          <a:prstGeom prst="rect">
+            <a:avLst/>
+          </a:prstGeom>
+          <a:noFill/>
+          <a:ln/>
+        </p:spPr>
+        <p:txBody>
+          <a:bodyPr wrap="square" lIns="0" tIns="0" rIns="0" bIns="0" rtlCol="0" anchor="t"/>
+          <a:lstStyle/>
+          <a:p>
+            <a:pPr indent="0" marL="0">
+              <a:buNone/>
+            </a:pPr>
+            <a:r>
+              <a:rPr lang="en-US" sz="1800" b="1" dirty="0">
+                <a:solidFill>
+                  <a:srgbClr val="FFFFFF"/>
+                </a:solidFill>
+                <a:latin typeface="Calibri" pitchFamily="34" charset="0"/>
+                <a:ea typeface="Calibri" pitchFamily="34" charset="-122"/>
+                <a:cs typeface="Calibri" pitchFamily="34" charset="-120"/>
+              </a:rPr>
+              <a:t>Script templates</a:t>
+            </a:r>
+            <a:endParaRPr lang="en-US" sz="1800" dirty="0"/>
+          </a:p>
+        </p:txBody>
+      </p:sp>
+      <p:sp>
+        <p:nvSpPr>
+          <p:cNvPr id="7" name="Text 4"/>
+          <p:cNvSpPr txBox="1"/>
+          <p:nvPr/>
+        </p:nvSpPr>
+        <p:spPr>
+          <a:xfrm>
+            <a:off x="822960" y="3474720"/>
+            <a:ext cx="2966618" cy="1600200"/>
+          </a:xfrm>
+          <a:prstGeom prst="rect">
+            <a:avLst/>
+          </a:prstGeom>
+          <a:noFill/>
+          <a:ln/>
+        </p:spPr>
+        <p:txBody>
+          <a:bodyPr wrap="square" lIns="0" tIns="0" rIns="0" bIns="0" rtlCol="0" anchor="t"/>
+          <a:lstStyle/>
+          <a:p>
+            <a:pPr indent="0" marL="0">
+              <a:spcAft>
+                <a:spcPts val="600"/>
+              </a:spcAft>
+              <a:buNone/>
+            </a:pPr>
+            <a:r>
+              <a:rPr lang="en-US" sz="1500" dirty="0">
+                <a:solidFill>
+                  <a:srgbClr val="E4E4E7"/>
+                </a:solidFill>
+                <a:latin typeface="Calibri" pitchFamily="34" charset="0"/>
+                <a:ea typeface="Calibri" pitchFamily="34" charset="-122"/>
+                <a:cs typeface="Calibri" pitchFamily="34" charset="-120"/>
+              </a:rPr>
+              <a:t>Contracts are small, deterministic scripts attached to coins and validated in parallel like any other transaction. There is no global state machine to congest.</a:t>
+            </a:r>
+            <a:endParaRPr lang="en-US" sz="1500" dirty="0"/>
+          </a:p>
+        </p:txBody>
+      </p:sp>
+      <p:sp>
+        <p:nvSpPr>
+          <p:cNvPr id="8" name="Shape 5"/>
+          <p:cNvSpPr/>
+          <p:nvPr/>
+        </p:nvSpPr>
+        <p:spPr>
+          <a:xfrm>
+            <a:off x="4338218" y="1691640"/>
+            <a:ext cx="3515258" cy="3657600"/>
+          </a:xfrm>
+          <a:prstGeom prst="roundRect">
+            <a:avLst>
+              <a:gd name="adj" fmla="val 3121"/>
+            </a:avLst>
+          </a:prstGeom>
+          <a:solidFill>
+            <a:srgbClr val="18181B"/>
+          </a:solidFill>
+          <a:ln w="9525">
+            <a:solidFill>
+              <a:srgbClr val="2E2E35"/>
+            </a:solidFill>
+            <a:prstDash val="solid"/>
+          </a:ln>
+        </p:spPr>
+      </p:sp>
+      <p:sp>
+        <p:nvSpPr>
+          <p:cNvPr id="9" name="Shape 6"/>
+          <p:cNvSpPr/>
+          <p:nvPr/>
+        </p:nvSpPr>
+        <p:spPr>
+          <a:xfrm>
+            <a:off x="4612538" y="1965960"/>
+            <a:ext cx="640080" cy="640080"/>
+          </a:xfrm>
+          <a:prstGeom prst="ellipse">
+            <a:avLst/>
+          </a:prstGeom>
+          <a:solidFill>
+            <a:srgbClr val="F2CD3A"/>
+          </a:solidFill>
+          <a:ln w="12700">
+            <a:solidFill>
+              <a:srgbClr val="F2CD3A"/>
+            </a:solidFill>
+            <a:prstDash val="solid"/>
+          </a:ln>
+        </p:spPr>
+      </p:sp>
+      <p:pic>
+        <p:nvPicPr>
+          <p:cNvPr id="10" name="Image 1" descr="preencoded.png">    </p:cNvPr>
+          <p:cNvPicPr>
+            <a:picLocks noChangeAspect="1"/>
+          </p:cNvPicPr>
+          <p:nvPr/>
+        </p:nvPicPr>
+        <p:blipFill>
+          <a:blip r:embed="rId2"/>
+          <a:stretch>
+            <a:fillRect/>
+          </a:stretch>
+        </p:blipFill>
+        <p:spPr>
+          <a:xfrm>
+            <a:off x="4766158" y="2119579"/>
+            <a:ext cx="332842" cy="332842"/>
+          </a:xfrm>
+          <a:prstGeom prst="rect">
+            <a:avLst/>
+          </a:prstGeom>
+        </p:spPr>
+      </p:pic>
+      <p:sp>
+        <p:nvSpPr>
+          <p:cNvPr id="11" name="Text 7"/>
+          <p:cNvSpPr txBox="1"/>
+          <p:nvPr/>
+        </p:nvSpPr>
+        <p:spPr>
+          <a:xfrm>
+            <a:off x="4612538" y="2788920"/>
+            <a:ext cx="2966618" cy="640080"/>
+          </a:xfrm>
+          <a:prstGeom prst="rect">
+            <a:avLst/>
+          </a:prstGeom>
+          <a:noFill/>
+          <a:ln/>
+        </p:spPr>
+        <p:txBody>
+          <a:bodyPr wrap="square" lIns="0" tIns="0" rIns="0" bIns="0" rtlCol="0" anchor="t"/>
+          <a:lstStyle/>
+          <a:p>
+            <a:pPr indent="0" marL="0">
+              <a:buNone/>
+            </a:pPr>
+            <a:r>
+              <a:rPr lang="en-US" sz="1800" b="1" dirty="0">
+                <a:solidFill>
+                  <a:srgbClr val="FFFFFF"/>
+                </a:solidFill>
+                <a:latin typeface="Calibri" pitchFamily="34" charset="0"/>
+                <a:ea typeface="Calibri" pitchFamily="34" charset="-122"/>
+                <a:cs typeface="Calibri" pitchFamily="34" charset="-120"/>
+              </a:rPr>
+              <a:t>No EVM overhead</a:t>
+            </a:r>
+            <a:endParaRPr lang="en-US" sz="1800" dirty="0"/>
+          </a:p>
+        </p:txBody>
+      </p:sp>
+      <p:sp>
+        <p:nvSpPr>
+          <p:cNvPr id="12" name="Text 8"/>
+          <p:cNvSpPr txBox="1"/>
+          <p:nvPr/>
+        </p:nvSpPr>
+        <p:spPr>
+          <a:xfrm>
+            <a:off x="4612538" y="3474720"/>
+            <a:ext cx="2966618" cy="1600200"/>
+          </a:xfrm>
+          <a:prstGeom prst="rect">
+            <a:avLst/>
+          </a:prstGeom>
+          <a:noFill/>
+          <a:ln/>
+        </p:spPr>
+        <p:txBody>
+          <a:bodyPr wrap="square" lIns="0" tIns="0" rIns="0" bIns="0" rtlCol="0" anchor="t"/>
+          <a:lstStyle/>
+          <a:p>
+            <a:pPr indent="0" marL="0">
+              <a:spcAft>
+                <a:spcPts val="600"/>
+              </a:spcAft>
+              <a:buNone/>
+            </a:pPr>
+            <a:r>
+              <a:rPr lang="en-US" sz="1500" dirty="0">
+                <a:solidFill>
+                  <a:srgbClr val="E4E4E7"/>
+                </a:solidFill>
+                <a:latin typeface="Calibri" pitchFamily="34" charset="0"/>
+                <a:ea typeface="Calibri" pitchFamily="34" charset="-122"/>
+                <a:cs typeface="Calibri" pitchFamily="34" charset="-120"/>
+              </a:rPr>
+              <a:t>No gas market, no reentrancy class of bugs, no fee spike for everyone when one app gets popular. Contracts run at the same 42,000 TPS as plain payments.</a:t>
+            </a:r>
+            <a:endParaRPr lang="en-US" sz="1500" dirty="0"/>
+          </a:p>
+        </p:txBody>
+      </p:sp>
+      <p:sp>
+        <p:nvSpPr>
+          <p:cNvPr id="13" name="Shape 9"/>
+          <p:cNvSpPr/>
+          <p:nvPr/>
+        </p:nvSpPr>
+        <p:spPr>
+          <a:xfrm>
+            <a:off x="8127797" y="1691640"/>
+            <a:ext cx="3515258" cy="3657600"/>
+          </a:xfrm>
+          <a:prstGeom prst="roundRect">
+            <a:avLst>
+              <a:gd name="adj" fmla="val 3121"/>
+            </a:avLst>
+          </a:prstGeom>
+          <a:solidFill>
+            <a:srgbClr val="18181B"/>
+          </a:solidFill>
+          <a:ln w="9525">
+            <a:solidFill>
+              <a:srgbClr val="2E2E35"/>
+            </a:solidFill>
+            <a:prstDash val="solid"/>
+          </a:ln>
+        </p:spPr>
+      </p:sp>
+      <p:sp>
+        <p:nvSpPr>
+          <p:cNvPr id="14" name="Shape 10"/>
+          <p:cNvSpPr/>
+          <p:nvPr/>
+        </p:nvSpPr>
+        <p:spPr>
+          <a:xfrm>
+            <a:off x="8402117" y="1965960"/>
+            <a:ext cx="640080" cy="640080"/>
+          </a:xfrm>
+          <a:prstGeom prst="ellipse">
+            <a:avLst/>
+          </a:prstGeom>
+          <a:solidFill>
+            <a:srgbClr val="F2CD3A"/>
+          </a:solidFill>
+          <a:ln w="12700">
+            <a:solidFill>
+              <a:srgbClr val="F2CD3A"/>
+            </a:solidFill>
+            <a:prstDash val="solid"/>
+          </a:ln>
+        </p:spPr>
+      </p:sp>
+      <p:pic>
+        <p:nvPicPr>
+          <p:cNvPr id="15" name="Image 2" descr="preencoded.png">    </p:cNvPr>
+          <p:cNvPicPr>
+            <a:picLocks noChangeAspect="1"/>
+          </p:cNvPicPr>
+          <p:nvPr/>
+        </p:nvPicPr>
+        <p:blipFill>
+          <a:blip r:embed="rId3"/>
+          <a:stretch>
+            <a:fillRect/>
+          </a:stretch>
+        </p:blipFill>
+        <p:spPr>
+          <a:xfrm>
+            <a:off x="8555736" y="2119579"/>
+            <a:ext cx="332842" cy="332842"/>
+          </a:xfrm>
+          <a:prstGeom prst="rect">
+            <a:avLst/>
+          </a:prstGeom>
+        </p:spPr>
+      </p:pic>
+      <p:sp>
+        <p:nvSpPr>
+          <p:cNvPr id="16" name="Text 11"/>
+          <p:cNvSpPr txBox="1"/>
+          <p:nvPr/>
+        </p:nvSpPr>
+        <p:spPr>
+          <a:xfrm>
+            <a:off x="8402117" y="2788920"/>
+            <a:ext cx="2966618" cy="640080"/>
+          </a:xfrm>
+          <a:prstGeom prst="rect">
+            <a:avLst/>
+          </a:prstGeom>
+          <a:noFill/>
+          <a:ln/>
+        </p:spPr>
+        <p:txBody>
+          <a:bodyPr wrap="square" lIns="0" tIns="0" rIns="0" bIns="0" rtlCol="0" anchor="t"/>
+          <a:lstStyle/>
+          <a:p>
+            <a:pPr indent="0" marL="0">
+              <a:buNone/>
+            </a:pPr>
+            <a:r>
+              <a:rPr lang="en-US" sz="1800" b="1" dirty="0">
+                <a:solidFill>
+                  <a:srgbClr val="FFFFFF"/>
+                </a:solidFill>
+                <a:latin typeface="Calibri" pitchFamily="34" charset="0"/>
+                <a:ea typeface="Calibri" pitchFamily="34" charset="-122"/>
+                <a:cs typeface="Calibri" pitchFamily="34" charset="-120"/>
+              </a:rPr>
+              <a:t>A full platform</a:t>
+            </a:r>
+            <a:endParaRPr lang="en-US" sz="1800" dirty="0"/>
+          </a:p>
+        </p:txBody>
+      </p:sp>
+      <p:sp>
+        <p:nvSpPr>
+          <p:cNvPr id="17" name="Text 12"/>
+          <p:cNvSpPr txBox="1"/>
+          <p:nvPr/>
+        </p:nvSpPr>
+        <p:spPr>
+          <a:xfrm>
+            <a:off x="8402117" y="3474720"/>
+            <a:ext cx="2966618" cy="1600200"/>
+          </a:xfrm>
+          <a:prstGeom prst="rect">
+            <a:avLst/>
+          </a:prstGeom>
+          <a:noFill/>
+          <a:ln/>
+        </p:spPr>
+        <p:txBody>
+          <a:bodyPr wrap="square" lIns="0" tIns="0" rIns="0" bIns="0" rtlCol="0" anchor="t"/>
+          <a:lstStyle/>
+          <a:p>
+            <a:pPr indent="0" marL="0">
+              <a:spcAft>
+                <a:spcPts val="600"/>
+              </a:spcAft>
+              <a:buNone/>
+            </a:pPr>
+            <a:r>
+              <a:rPr lang="en-US" sz="1500" dirty="0">
+                <a:solidFill>
+                  <a:srgbClr val="E4E4E7"/>
+                </a:solidFill>
+                <a:latin typeface="Calibri" pitchFamily="34" charset="0"/>
+                <a:ea typeface="Calibri" pitchFamily="34" charset="-122"/>
+                <a:cs typeface="Calibri" pitchFamily="34" charset="-120"/>
+              </a:rPr>
+              <a:t>Wallet login with on-chain identity, payment requests to the user's wallet and peer-to-peer messaging are part of the stack, with Kotlin and JavaScript libraries.</a:t>
+            </a:r>
+            <a:endParaRPr lang="en-US" sz="1500" dirty="0"/>
+          </a:p>
+        </p:txBody>
+      </p:sp>
+      <p:pic>
+        <p:nvPicPr>
+          <p:cNvPr id="19" name="Image 3" descr="preencoded.png">    </p:cNvPr>
+          <p:cNvPicPr>
+            <a:picLocks noChangeAspect="1"/>
+          </p:cNvPicPr>
+          <p:nvPr/>
+        </p:nvPicPr>
+        <p:blipFill>
+          <a:blip r:embed="rId4"/>
+          <a:stretch>
+            <a:fillRect/>
+          </a:stretch>
+        </p:blipFill>
+        <p:spPr>
+          <a:xfrm>
+            <a:off x="548640" y="6355080"/>
+            <a:ext cx="256032" cy="246888"/>
+          </a:xfrm>
+          <a:prstGeom prst="rect">
+            <a:avLst/>
+          </a:prstGeom>
+        </p:spPr>
+      </p:pic>
+      <p:sp>
+        <p:nvSpPr>
+          <p:cNvPr id="20" name="Text 13"/>
+          <p:cNvSpPr txBox="1"/>
+          <p:nvPr/>
+        </p:nvSpPr>
+        <p:spPr>
+          <a:xfrm>
+            <a:off x="877824" y="6400800"/>
+            <a:ext cx="2743200" cy="274320"/>
+          </a:xfrm>
+          <a:prstGeom prst="rect">
+            <a:avLst/>
+          </a:prstGeom>
+          <a:noFill/>
+          <a:ln/>
+        </p:spPr>
+        <p:txBody>
+          <a:bodyPr wrap="square" lIns="0" tIns="0" rIns="0" bIns="0" rtlCol="0" anchor="ctr"/>
+          <a:lstStyle/>
+          <a:p>
+            <a:pPr algn="l" indent="0" marL="0">
+              <a:buNone/>
+            </a:pPr>
+            <a:r>
+              <a:rPr lang="en-US" sz="1000" dirty="0">
+                <a:solidFill>
+                  <a:srgbClr val="A1A1AA"/>
+                </a:solidFill>
+                <a:latin typeface="Calibri" pitchFamily="34" charset="0"/>
+                <a:ea typeface="Calibri" pitchFamily="34" charset="-122"/>
+                <a:cs typeface="Calibri" pitchFamily="34" charset="-120"/>
+              </a:rPr>
+              <a:t>Nexa · 2026</a:t>
+            </a:r>
+            <a:endParaRPr lang="en-US" sz="1000" dirty="0"/>
+          </a:p>
+        </p:txBody>
+      </p:sp>
+      <p:sp>
+        <p:nvSpPr>
+          <p:cNvPr id="21" name="Text 14"/>
+          <p:cNvSpPr txBox="1"/>
+          <p:nvPr/>
+        </p:nvSpPr>
+        <p:spPr>
+          <a:xfrm>
+            <a:off x="11094415" y="6400800"/>
+            <a:ext cx="548640" cy="274320"/>
+          </a:xfrm>
+          <a:prstGeom prst="rect">
+            <a:avLst/>
+          </a:prstGeom>
+          <a:noFill/>
+          <a:ln/>
+        </p:spPr>
+        <p:txBody>
+          <a:bodyPr wrap="square" lIns="0" tIns="0" rIns="0" bIns="0" rtlCol="0" anchor="ctr"/>
+          <a:lstStyle/>
+          <a:p>
+            <a:pPr algn="r" indent="0" marL="0">
+              <a:buNone/>
+            </a:pPr>
+            <a:r>
+              <a:rPr lang="en-US" sz="1000" dirty="0">
+                <a:solidFill>
+                  <a:srgbClr val="A1A1AA"/>
+                </a:solidFill>
+                <a:latin typeface="Calibri" pitchFamily="34" charset="0"/>
+                <a:ea typeface="Calibri" pitchFamily="34" charset="-122"/>
+                <a:cs typeface="Calibri" pitchFamily="34" charset="-120"/>
+              </a:rPr>
+              <a:t>15</a:t>
+            </a:r>
+            <a:endParaRPr lang="en-US" sz="1000" dirty="0"/>
+          </a:p>
+        </p:txBody>
+      </p:sp>
+    </p:spTree>
+  </p:cSld>
+  <p:clrMapOvr>
+    <a:masterClrMapping/>
+  </p:clrMapOvr>
+</p:sld>
+</file>
+
+<file path=ppt/slides/slide16.xml><?xml version="1.0" encoding="utf-8"?>
+<p:sld xmlns:a="http://schemas.openxmlformats.org/drawingml/2006/main" xmlns:r="http://schemas.openxmlformats.org/officeDocument/2006/relationships" xmlns:p="http://schemas.openxmlformats.org/presentationml/2006/main">
+  <p:cSld name="Slide 16">
+    <p:bg>
+      <p:bgPr>
+        <a:solidFill>
+          <a:srgbClr val="0A0A0F"/>
+        </a:solidFill>
+      </p:bgPr>
+    </p:bg>
+    <p:spTree>
+      <p:nvGrpSpPr>
+        <p:cNvPr id="1" name=""/>
+        <p:cNvGrpSpPr/>
+        <p:nvPr/>
+      </p:nvGrpSpPr>
+      <p:grpSpPr>
+        <a:xfrm>
+          <a:off x="0" y="0"/>
+          <a:ext cx="0" cy="0"/>
+          <a:chOff x="0" y="0"/>
+          <a:chExt cx="0" cy="0"/>
+        </a:xfrm>
+      </p:grpSpPr>
+      <p:sp>
+        <p:nvSpPr>
+          <p:cNvPr id="2" name="Text 0"/>
+          <p:cNvSpPr txBox="1"/>
+          <p:nvPr/>
+        </p:nvSpPr>
+        <p:spPr>
+          <a:xfrm>
+            <a:off x="548640" y="411480"/>
+            <a:ext cx="11094415" cy="1005840"/>
+          </a:xfrm>
+          <a:prstGeom prst="rect">
+            <a:avLst/>
+          </a:prstGeom>
+          <a:noFill/>
+          <a:ln/>
+        </p:spPr>
+        <p:txBody>
+          <a:bodyPr wrap="square" lIns="0" tIns="0" rIns="0" bIns="0" rtlCol="0" anchor="t"/>
+          <a:lstStyle/>
+          <a:p>
+            <a:pPr algn="l" indent="0" marL="0">
+              <a:buNone/>
+            </a:pPr>
+            <a:r>
+              <a:rPr lang="en-US" sz="3000" b="1" dirty="0">
+                <a:solidFill>
+                  <a:srgbClr val="FFFFFF"/>
+                </a:solidFill>
+                <a:latin typeface="Calibri" pitchFamily="34" charset="0"/>
+                <a:ea typeface="Calibri" pitchFamily="34" charset="-122"/>
+                <a:cs typeface="Calibri" pitchFamily="34" charset="-120"/>
+              </a:rPr>
+              <a:t>Identity and payments live in the wallet, not on the merchant's server</a:t>
+            </a:r>
+            <a:endParaRPr lang="en-US" sz="3000" dirty="0"/>
+          </a:p>
+        </p:txBody>
+      </p:sp>
+      <p:sp>
+        <p:nvSpPr>
+          <p:cNvPr id="3" name="Shape 1"/>
+          <p:cNvSpPr/>
+          <p:nvPr/>
+        </p:nvSpPr>
+        <p:spPr>
+          <a:xfrm>
+            <a:off x="548640" y="1691640"/>
+            <a:ext cx="3515258" cy="4206240"/>
+          </a:xfrm>
+          <a:prstGeom prst="roundRect">
+            <a:avLst>
+              <a:gd name="adj" fmla="val 3121"/>
+            </a:avLst>
+          </a:prstGeom>
+          <a:solidFill>
+            <a:srgbClr val="18181B"/>
+          </a:solidFill>
+          <a:ln w="9525">
+            <a:solidFill>
+              <a:srgbClr val="2E2E35"/>
+            </a:solidFill>
+            <a:prstDash val="solid"/>
+          </a:ln>
+        </p:spPr>
+      </p:sp>
+      <p:sp>
+        <p:nvSpPr>
+          <p:cNvPr id="4" name="Shape 2"/>
+          <p:cNvSpPr/>
+          <p:nvPr/>
+        </p:nvSpPr>
+        <p:spPr>
+          <a:xfrm>
+            <a:off x="822960" y="1965960"/>
+            <a:ext cx="640080" cy="640080"/>
+          </a:xfrm>
+          <a:prstGeom prst="ellipse">
+            <a:avLst/>
+          </a:prstGeom>
+          <a:solidFill>
+            <a:srgbClr val="F2CD3A"/>
+          </a:solidFill>
+          <a:ln w="12700">
+            <a:solidFill>
+              <a:srgbClr val="F2CD3A"/>
+            </a:solidFill>
+            <a:prstDash val="solid"/>
+          </a:ln>
+        </p:spPr>
+      </p:sp>
+      <p:pic>
+        <p:nvPicPr>
+          <p:cNvPr id="5" name="Image 0" descr="preencoded.png">    </p:cNvPr>
+          <p:cNvPicPr>
+            <a:picLocks noChangeAspect="1"/>
+          </p:cNvPicPr>
+          <p:nvPr/>
+        </p:nvPicPr>
+        <p:blipFill>
+          <a:blip r:embed="rId1"/>
+          <a:stretch>
+            <a:fillRect/>
+          </a:stretch>
+        </p:blipFill>
+        <p:spPr>
+          <a:xfrm>
+            <a:off x="976579" y="2119579"/>
+            <a:ext cx="332842" cy="332842"/>
+          </a:xfrm>
+          <a:prstGeom prst="rect">
+            <a:avLst/>
+          </a:prstGeom>
+        </p:spPr>
+      </p:pic>
+      <p:sp>
+        <p:nvSpPr>
+          <p:cNvPr id="6" name="Text 3"/>
+          <p:cNvSpPr txBox="1"/>
+          <p:nvPr/>
+        </p:nvSpPr>
+        <p:spPr>
+          <a:xfrm>
+            <a:off x="822960" y="2788920"/>
+            <a:ext cx="2966618" cy="640080"/>
+          </a:xfrm>
+          <a:prstGeom prst="rect">
+            <a:avLst/>
+          </a:prstGeom>
+          <a:noFill/>
+          <a:ln/>
+        </p:spPr>
+        <p:txBody>
+          <a:bodyPr wrap="square" lIns="0" tIns="0" rIns="0" bIns="0" rtlCol="0" anchor="t"/>
+          <a:lstStyle/>
+          <a:p>
+            <a:pPr indent="0" marL="0">
+              <a:buNone/>
+            </a:pPr>
+            <a:r>
+              <a:rPr lang="en-US" sz="1800" b="1" dirty="0">
+                <a:solidFill>
+                  <a:srgbClr val="FFFFFF"/>
+                </a:solidFill>
+                <a:latin typeface="Calibri" pitchFamily="34" charset="0"/>
+                <a:ea typeface="Calibri" pitchFamily="34" charset="-122"/>
+                <a:cs typeface="Calibri" pitchFamily="34" charset="-120"/>
+              </a:rPr>
+              <a:t>Log in with the phone, no password (nexid)</a:t>
+            </a:r>
+            <a:endParaRPr lang="en-US" sz="1800" dirty="0"/>
+          </a:p>
+        </p:txBody>
+      </p:sp>
+      <p:sp>
+        <p:nvSpPr>
+          <p:cNvPr id="7" name="Text 4"/>
+          <p:cNvSpPr txBox="1"/>
+          <p:nvPr/>
+        </p:nvSpPr>
+        <p:spPr>
+          <a:xfrm>
+            <a:off x="822960" y="3474720"/>
+            <a:ext cx="2966618" cy="2148840"/>
+          </a:xfrm>
+          <a:prstGeom prst="rect">
+            <a:avLst/>
+          </a:prstGeom>
+          <a:noFill/>
+          <a:ln/>
+        </p:spPr>
+        <p:txBody>
+          <a:bodyPr wrap="square" lIns="0" tIns="0" rIns="0" bIns="0" rtlCol="0" anchor="t"/>
+          <a:lstStyle/>
+          <a:p>
+            <a:pPr indent="0" marL="0">
+              <a:spcAft>
+                <a:spcPts val="600"/>
+              </a:spcAft>
+              <a:buNone/>
+            </a:pPr>
+            <a:r>
+              <a:rPr lang="en-US" sz="1500" dirty="0">
+                <a:solidFill>
+                  <a:srgbClr val="E4E4E7"/>
+                </a:solidFill>
+                <a:latin typeface="Calibri" pitchFamily="34" charset="0"/>
+                <a:ea typeface="Calibri" pitchFamily="34" charset="-122"/>
+                <a:cs typeface="Calibri" pitchFamily="34" charset="-120"/>
+              </a:rPr>
+              <a:t>The site shows a challenge in a QR code, the phone signs it with a key derived per site, and the answer goes straight from the phone to the server. The key never leaves the phone, every site gets its own identity, and lookalike domains fail. The BankID experience without a bank.</a:t>
+            </a:r>
+            <a:endParaRPr lang="en-US" sz="1500" dirty="0"/>
+          </a:p>
+        </p:txBody>
+      </p:sp>
+      <p:sp>
+        <p:nvSpPr>
+          <p:cNvPr id="8" name="Shape 5"/>
+          <p:cNvSpPr/>
+          <p:nvPr/>
+        </p:nvSpPr>
+        <p:spPr>
+          <a:xfrm>
+            <a:off x="4338218" y="1691640"/>
+            <a:ext cx="3515258" cy="4206240"/>
+          </a:xfrm>
+          <a:prstGeom prst="roundRect">
+            <a:avLst>
+              <a:gd name="adj" fmla="val 3121"/>
+            </a:avLst>
+          </a:prstGeom>
+          <a:solidFill>
+            <a:srgbClr val="18181B"/>
+          </a:solidFill>
+          <a:ln w="9525">
+            <a:solidFill>
+              <a:srgbClr val="2E2E35"/>
+            </a:solidFill>
+            <a:prstDash val="solid"/>
+          </a:ln>
+        </p:spPr>
+      </p:sp>
+      <p:sp>
+        <p:nvSpPr>
+          <p:cNvPr id="9" name="Shape 6"/>
+          <p:cNvSpPr/>
+          <p:nvPr/>
+        </p:nvSpPr>
+        <p:spPr>
+          <a:xfrm>
+            <a:off x="4612538" y="1965960"/>
+            <a:ext cx="640080" cy="640080"/>
+          </a:xfrm>
+          <a:prstGeom prst="ellipse">
+            <a:avLst/>
+          </a:prstGeom>
+          <a:solidFill>
+            <a:srgbClr val="F2CD3A"/>
+          </a:solidFill>
+          <a:ln w="12700">
+            <a:solidFill>
+              <a:srgbClr val="F2CD3A"/>
+            </a:solidFill>
+            <a:prstDash val="solid"/>
+          </a:ln>
+        </p:spPr>
+      </p:sp>
+      <p:pic>
+        <p:nvPicPr>
+          <p:cNvPr id="10" name="Image 1" descr="preencoded.png">    </p:cNvPr>
+          <p:cNvPicPr>
+            <a:picLocks noChangeAspect="1"/>
+          </p:cNvPicPr>
+          <p:nvPr/>
+        </p:nvPicPr>
+        <p:blipFill>
+          <a:blip r:embed="rId2"/>
+          <a:stretch>
+            <a:fillRect/>
+          </a:stretch>
+        </p:blipFill>
+        <p:spPr>
+          <a:xfrm>
+            <a:off x="4766158" y="2119579"/>
+            <a:ext cx="332842" cy="332842"/>
+          </a:xfrm>
+          <a:prstGeom prst="rect">
+            <a:avLst/>
+          </a:prstGeom>
+        </p:spPr>
+      </p:pic>
+      <p:sp>
+        <p:nvSpPr>
+          <p:cNvPr id="11" name="Text 7"/>
+          <p:cNvSpPr txBox="1"/>
+          <p:nvPr/>
+        </p:nvSpPr>
+        <p:spPr>
+          <a:xfrm>
+            <a:off x="4612538" y="2788920"/>
+            <a:ext cx="2966618" cy="640080"/>
+          </a:xfrm>
+          <a:prstGeom prst="rect">
+            <a:avLst/>
+          </a:prstGeom>
+          <a:noFill/>
+          <a:ln/>
+        </p:spPr>
+        <p:txBody>
+          <a:bodyPr wrap="square" lIns="0" tIns="0" rIns="0" bIns="0" rtlCol="0" anchor="t"/>
+          <a:lstStyle/>
+          <a:p>
+            <a:pPr indent="0" marL="0">
+              <a:buNone/>
+            </a:pPr>
+            <a:r>
+              <a:rPr lang="en-US" sz="1800" b="1" dirty="0">
+                <a:solidFill>
+                  <a:srgbClr val="FFFFFF"/>
+                </a:solidFill>
+                <a:latin typeface="Calibri" pitchFamily="34" charset="0"/>
+                <a:ea typeface="Calibri" pitchFamily="34" charset="-122"/>
+                <a:cs typeface="Calibri" pitchFamily="34" charset="-120"/>
+              </a:rPr>
+              <a:t>Prove ownership without spending</a:t>
+            </a:r>
+            <a:endParaRPr lang="en-US" sz="1800" dirty="0"/>
+          </a:p>
+        </p:txBody>
+      </p:sp>
+      <p:sp>
+        <p:nvSpPr>
+          <p:cNvPr id="12" name="Text 8"/>
+          <p:cNvSpPr txBox="1"/>
+          <p:nvPr/>
+        </p:nvSpPr>
+        <p:spPr>
+          <a:xfrm>
+            <a:off x="4612538" y="3474720"/>
+            <a:ext cx="2966618" cy="2148840"/>
+          </a:xfrm>
+          <a:prstGeom prst="rect">
+            <a:avLst/>
+          </a:prstGeom>
+          <a:noFill/>
+          <a:ln/>
+        </p:spPr>
+        <p:txBody>
+          <a:bodyPr wrap="square" lIns="0" tIns="0" rIns="0" bIns="0" rtlCol="0" anchor="t"/>
+          <a:lstStyle/>
+          <a:p>
+            <a:pPr indent="0" marL="0">
+              <a:spcAft>
+                <a:spcPts val="600"/>
+              </a:spcAft>
+              <a:buNone/>
+            </a:pPr>
+            <a:r>
+              <a:rPr lang="en-US" sz="1500" dirty="0">
+                <a:solidFill>
+                  <a:srgbClr val="E4E4E7"/>
+                </a:solidFill>
+                <a:latin typeface="Calibri" pitchFamily="34" charset="0"/>
+                <a:ea typeface="Calibri" pitchFamily="34" charset="-122"/>
+                <a:cs typeface="Calibri" pitchFamily="34" charset="-120"/>
+              </a:rPr>
+              <a:t>Challenge transactions: you sign a deliberately invalid transaction that is never broadcast. That proves control of coins, NFTs or a multisig under any script, and it is what makes token-gated access possible.</a:t>
+            </a:r>
+            <a:endParaRPr lang="en-US" sz="1500" dirty="0"/>
+          </a:p>
+        </p:txBody>
+      </p:sp>
+      <p:sp>
+        <p:nvSpPr>
+          <p:cNvPr id="13" name="Shape 9"/>
+          <p:cNvSpPr/>
+          <p:nvPr/>
+        </p:nvSpPr>
+        <p:spPr>
+          <a:xfrm>
+            <a:off x="8127797" y="1691640"/>
+            <a:ext cx="3515258" cy="4206240"/>
+          </a:xfrm>
+          <a:prstGeom prst="roundRect">
+            <a:avLst>
+              <a:gd name="adj" fmla="val 3121"/>
+            </a:avLst>
+          </a:prstGeom>
+          <a:solidFill>
+            <a:srgbClr val="18181B"/>
+          </a:solidFill>
+          <a:ln w="9525">
+            <a:solidFill>
+              <a:srgbClr val="2E2E35"/>
+            </a:solidFill>
+            <a:prstDash val="solid"/>
+          </a:ln>
+        </p:spPr>
+      </p:sp>
+      <p:sp>
+        <p:nvSpPr>
+          <p:cNvPr id="14" name="Shape 10"/>
+          <p:cNvSpPr/>
+          <p:nvPr/>
+        </p:nvSpPr>
+        <p:spPr>
+          <a:xfrm>
+            <a:off x="8402117" y="1965960"/>
+            <a:ext cx="640080" cy="640080"/>
+          </a:xfrm>
+          <a:prstGeom prst="ellipse">
+            <a:avLst/>
+          </a:prstGeom>
+          <a:solidFill>
+            <a:srgbClr val="F2CD3A"/>
+          </a:solidFill>
+          <a:ln w="12700">
+            <a:solidFill>
+              <a:srgbClr val="F2CD3A"/>
+            </a:solidFill>
+            <a:prstDash val="solid"/>
+          </a:ln>
+        </p:spPr>
+      </p:sp>
+      <p:pic>
+        <p:nvPicPr>
+          <p:cNvPr id="15" name="Image 2" descr="preencoded.png">    </p:cNvPr>
+          <p:cNvPicPr>
+            <a:picLocks noChangeAspect="1"/>
+          </p:cNvPicPr>
+          <p:nvPr/>
+        </p:nvPicPr>
+        <p:blipFill>
+          <a:blip r:embed="rId3"/>
+          <a:stretch>
+            <a:fillRect/>
+          </a:stretch>
+        </p:blipFill>
+        <p:spPr>
+          <a:xfrm>
+            <a:off x="8555736" y="2119579"/>
+            <a:ext cx="332842" cy="332842"/>
+          </a:xfrm>
+          <a:prstGeom prst="rect">
+            <a:avLst/>
+          </a:prstGeom>
+        </p:spPr>
+      </p:pic>
+      <p:sp>
+        <p:nvSpPr>
+          <p:cNvPr id="16" name="Text 11"/>
+          <p:cNvSpPr txBox="1"/>
+          <p:nvPr/>
+        </p:nvSpPr>
+        <p:spPr>
+          <a:xfrm>
+            <a:off x="8402117" y="2788920"/>
+            <a:ext cx="2966618" cy="640080"/>
+          </a:xfrm>
+          <a:prstGeom prst="rect">
+            <a:avLst/>
+          </a:prstGeom>
+          <a:noFill/>
+          <a:ln/>
+        </p:spPr>
+        <p:txBody>
+          <a:bodyPr wrap="square" lIns="0" tIns="0" rIns="0" bIns="0" rtlCol="0" anchor="t"/>
+          <a:lstStyle/>
+          <a:p>
+            <a:pPr indent="0" marL="0">
+              <a:buNone/>
+            </a:pPr>
+            <a:r>
+              <a:rPr lang="en-US" sz="1800" b="1" dirty="0">
+                <a:solidFill>
+                  <a:srgbClr val="FFFFFF"/>
+                </a:solidFill>
+                <a:latin typeface="Calibri" pitchFamily="34" charset="0"/>
+                <a:ea typeface="Calibri" pitchFamily="34" charset="-122"/>
+                <a:cs typeface="Calibri" pitchFamily="34" charset="-120"/>
+              </a:rPr>
+              <a:t>Subscriptions the wallet controls (DPP)</a:t>
+            </a:r>
+            <a:endParaRPr lang="en-US" sz="1800" dirty="0"/>
+          </a:p>
+        </p:txBody>
+      </p:sp>
+      <p:sp>
+        <p:nvSpPr>
+          <p:cNvPr id="17" name="Text 12"/>
+          <p:cNvSpPr txBox="1"/>
+          <p:nvPr/>
+        </p:nvSpPr>
+        <p:spPr>
+          <a:xfrm>
+            <a:off x="8402117" y="3474720"/>
+            <a:ext cx="2966618" cy="2148840"/>
+          </a:xfrm>
+          <a:prstGeom prst="rect">
+            <a:avLst/>
+          </a:prstGeom>
+          <a:noFill/>
+          <a:ln/>
+        </p:spPr>
+        <p:txBody>
+          <a:bodyPr wrap="square" lIns="0" tIns="0" rIns="0" bIns="0" rtlCol="0" anchor="t"/>
+          <a:lstStyle/>
+          <a:p>
+            <a:pPr indent="0" marL="0">
+              <a:spcAft>
+                <a:spcPts val="600"/>
+              </a:spcAft>
+              <a:buNone/>
+            </a:pPr>
+            <a:r>
+              <a:rPr lang="en-US" sz="1500" dirty="0">
+                <a:solidFill>
+                  <a:srgbClr val="E4E4E7"/>
+                </a:solidFill>
+                <a:latin typeface="Calibri" pitchFamily="34" charset="0"/>
+                <a:ea typeface="Calibri" pitchFamily="34" charset="-122"/>
+                <a:cs typeface="Calibri" pitchFamily="34" charset="-120"/>
+              </a:rPr>
+              <a:t>A merchant registers with your wallet and proposes limits per payment, day, week and month. The wallet decides whether a payment runs automatically or asks you; the merchant cannot force it, and you cancel everything in one place. The opposite of a card on file.</a:t>
+            </a:r>
+            <a:endParaRPr lang="en-US" sz="1500" dirty="0"/>
+          </a:p>
+        </p:txBody>
+      </p:sp>
+      <p:pic>
+        <p:nvPicPr>
+          <p:cNvPr id="19" name="Image 3" descr="preencoded.png">    </p:cNvPr>
+          <p:cNvPicPr>
+            <a:picLocks noChangeAspect="1"/>
+          </p:cNvPicPr>
+          <p:nvPr/>
+        </p:nvPicPr>
+        <p:blipFill>
+          <a:blip r:embed="rId4"/>
+          <a:stretch>
+            <a:fillRect/>
+          </a:stretch>
+        </p:blipFill>
+        <p:spPr>
+          <a:xfrm>
+            <a:off x="548640" y="6355080"/>
+            <a:ext cx="256032" cy="246888"/>
+          </a:xfrm>
+          <a:prstGeom prst="rect">
+            <a:avLst/>
+          </a:prstGeom>
+        </p:spPr>
+      </p:pic>
+      <p:sp>
+        <p:nvSpPr>
+          <p:cNvPr id="20" name="Text 13"/>
+          <p:cNvSpPr txBox="1"/>
+          <p:nvPr/>
+        </p:nvSpPr>
+        <p:spPr>
+          <a:xfrm>
+            <a:off x="877824" y="6400800"/>
+            <a:ext cx="2743200" cy="274320"/>
+          </a:xfrm>
+          <a:prstGeom prst="rect">
+            <a:avLst/>
+          </a:prstGeom>
+          <a:noFill/>
+          <a:ln/>
+        </p:spPr>
+        <p:txBody>
+          <a:bodyPr wrap="square" lIns="0" tIns="0" rIns="0" bIns="0" rtlCol="0" anchor="ctr"/>
+          <a:lstStyle/>
+          <a:p>
+            <a:pPr algn="l" indent="0" marL="0">
+              <a:buNone/>
+            </a:pPr>
+            <a:r>
+              <a:rPr lang="en-US" sz="1000" dirty="0">
+                <a:solidFill>
+                  <a:srgbClr val="A1A1AA"/>
+                </a:solidFill>
+                <a:latin typeface="Calibri" pitchFamily="34" charset="0"/>
+                <a:ea typeface="Calibri" pitchFamily="34" charset="-122"/>
+                <a:cs typeface="Calibri" pitchFamily="34" charset="-120"/>
+              </a:rPr>
+              <a:t>Nexa · 2026</a:t>
+            </a:r>
+            <a:endParaRPr lang="en-US" sz="1000" dirty="0"/>
+          </a:p>
+        </p:txBody>
+      </p:sp>
+      <p:sp>
+        <p:nvSpPr>
+          <p:cNvPr id="21" name="Text 14"/>
+          <p:cNvSpPr txBox="1"/>
+          <p:nvPr/>
+        </p:nvSpPr>
+        <p:spPr>
+          <a:xfrm>
+            <a:off x="11094415" y="6400800"/>
+            <a:ext cx="548640" cy="274320"/>
+          </a:xfrm>
+          <a:prstGeom prst="rect">
+            <a:avLst/>
+          </a:prstGeom>
+          <a:noFill/>
+          <a:ln/>
+        </p:spPr>
+        <p:txBody>
+          <a:bodyPr wrap="square" lIns="0" tIns="0" rIns="0" bIns="0" rtlCol="0" anchor="ctr"/>
+          <a:lstStyle/>
+          <a:p>
+            <a:pPr algn="r" indent="0" marL="0">
+              <a:buNone/>
+            </a:pPr>
+            <a:r>
+              <a:rPr lang="en-US" sz="1000" dirty="0">
+                <a:solidFill>
+                  <a:srgbClr val="A1A1AA"/>
+                </a:solidFill>
+                <a:latin typeface="Calibri" pitchFamily="34" charset="0"/>
+                <a:ea typeface="Calibri" pitchFamily="34" charset="-122"/>
+                <a:cs typeface="Calibri" pitchFamily="34" charset="-120"/>
+              </a:rPr>
+              <a:t>16</a:t>
+            </a:r>
+            <a:endParaRPr lang="en-US" sz="1000" dirty="0"/>
+          </a:p>
+        </p:txBody>
+      </p:sp>
+    </p:spTree>
+  </p:cSld>
+  <p:clrMapOvr>
+    <a:masterClrMapping/>
+  </p:clrMapOvr>
+</p:sld>
+</file>
+
+<file path=ppt/slides/slide17.xml><?xml version="1.0" encoding="utf-8"?>
+<p:sld xmlns:a="http://schemas.openxmlformats.org/drawingml/2006/main" xmlns:r="http://schemas.openxmlformats.org/officeDocument/2006/relationships" xmlns:p="http://schemas.openxmlformats.org/presentationml/2006/main">
+  <p:cSld name="Slide 17">
+    <p:bg>
+      <p:bgPr>
+        <a:solidFill>
+          <a:srgbClr val="0A0A0F"/>
+        </a:solidFill>
+      </p:bgPr>
+    </p:bg>
+    <p:spTree>
+      <p:nvGrpSpPr>
+        <p:cNvPr id="1" name=""/>
+        <p:cNvGrpSpPr/>
+        <p:nvPr/>
+      </p:nvGrpSpPr>
+      <p:grpSpPr>
+        <a:xfrm>
+          <a:off x="0" y="0"/>
+          <a:ext cx="0" cy="0"/>
+          <a:chOff x="0" y="0"/>
+          <a:chExt cx="0" cy="0"/>
+        </a:xfrm>
+      </p:grpSpPr>
+      <p:sp>
+        <p:nvSpPr>
+          <p:cNvPr id="2" name="Text 0"/>
+          <p:cNvSpPr txBox="1"/>
+          <p:nvPr/>
+        </p:nvSpPr>
+        <p:spPr>
+          <a:xfrm>
+            <a:off x="548640" y="411480"/>
+            <a:ext cx="11094415" cy="1005840"/>
+          </a:xfrm>
+          <a:prstGeom prst="rect">
+            <a:avLst/>
+          </a:prstGeom>
+          <a:noFill/>
+          <a:ln/>
+        </p:spPr>
+        <p:txBody>
+          <a:bodyPr wrap="square" lIns="0" tIns="0" rIns="0" bIns="0" rtlCol="0" anchor="t"/>
+          <a:lstStyle/>
+          <a:p>
+            <a:pPr algn="l" indent="0" marL="0">
+              <a:buNone/>
+            </a:pPr>
+            <a:r>
+              <a:rPr lang="en-US" sz="3000" b="1" dirty="0">
+                <a:solidFill>
+                  <a:srgbClr val="FFFFFF"/>
+                </a:solidFill>
+                <a:latin typeface="Calibri" pitchFamily="34" charset="0"/>
+                <a:ea typeface="Calibri" pitchFamily="34" charset="-122"/>
+                <a:cs typeface="Calibri" pitchFamily="34" charset="-120"/>
+              </a:rPr>
+              <a:t>Why this matters in Norway</a:t>
+            </a:r>
+            <a:endParaRPr lang="en-US" sz="3000" dirty="0"/>
+          </a:p>
+        </p:txBody>
+      </p:sp>
+      <p:sp>
+        <p:nvSpPr>
+          <p:cNvPr id="3" name="Shape 1"/>
+          <p:cNvSpPr/>
+          <p:nvPr/>
+        </p:nvSpPr>
+        <p:spPr>
+          <a:xfrm>
+            <a:off x="548640" y="1691640"/>
+            <a:ext cx="3515258" cy="3657600"/>
+          </a:xfrm>
+          <a:prstGeom prst="roundRect">
+            <a:avLst>
+              <a:gd name="adj" fmla="val 3121"/>
+            </a:avLst>
+          </a:prstGeom>
+          <a:solidFill>
+            <a:srgbClr val="18181B"/>
+          </a:solidFill>
+          <a:ln w="9525">
+            <a:solidFill>
+              <a:srgbClr val="2E2E35"/>
+            </a:solidFill>
+            <a:prstDash val="solid"/>
+          </a:ln>
+        </p:spPr>
+      </p:sp>
+      <p:sp>
+        <p:nvSpPr>
+          <p:cNvPr id="4" name="Shape 2"/>
+          <p:cNvSpPr/>
+          <p:nvPr/>
+        </p:nvSpPr>
+        <p:spPr>
+          <a:xfrm>
+            <a:off x="822960" y="1965960"/>
+            <a:ext cx="640080" cy="640080"/>
+          </a:xfrm>
+          <a:prstGeom prst="ellipse">
+            <a:avLst/>
+          </a:prstGeom>
+          <a:solidFill>
+            <a:srgbClr val="F2CD3A"/>
+          </a:solidFill>
+          <a:ln w="12700">
+            <a:solidFill>
+              <a:srgbClr val="F2CD3A"/>
+            </a:solidFill>
+            <a:prstDash val="solid"/>
+          </a:ln>
+        </p:spPr>
+      </p:sp>
+      <p:pic>
+        <p:nvPicPr>
+          <p:cNvPr id="5" name="Image 0" descr="preencoded.png">    </p:cNvPr>
+          <p:cNvPicPr>
+            <a:picLocks noChangeAspect="1"/>
+          </p:cNvPicPr>
+          <p:nvPr/>
+        </p:nvPicPr>
+        <p:blipFill>
+          <a:blip r:embed="rId1"/>
+          <a:stretch>
+            <a:fillRect/>
+          </a:stretch>
+        </p:blipFill>
+        <p:spPr>
+          <a:xfrm>
+            <a:off x="976579" y="2119579"/>
+            <a:ext cx="332842" cy="332842"/>
+          </a:xfrm>
+          <a:prstGeom prst="rect">
+            <a:avLst/>
+          </a:prstGeom>
+        </p:spPr>
+      </p:pic>
+      <p:sp>
+        <p:nvSpPr>
+          <p:cNvPr id="6" name="Text 3"/>
+          <p:cNvSpPr txBox="1"/>
+          <p:nvPr/>
+        </p:nvSpPr>
+        <p:spPr>
+          <a:xfrm>
+            <a:off x="822960" y="2788920"/>
+            <a:ext cx="2966618" cy="640080"/>
+          </a:xfrm>
+          <a:prstGeom prst="rect">
+            <a:avLst/>
+          </a:prstGeom>
+          <a:noFill/>
+          <a:ln/>
+        </p:spPr>
+        <p:txBody>
+          <a:bodyPr wrap="square" lIns="0" tIns="0" rIns="0" bIns="0" rtlCol="0" anchor="t"/>
+          <a:lstStyle/>
+          <a:p>
+            <a:pPr indent="0" marL="0">
+              <a:buNone/>
+            </a:pPr>
+            <a:r>
+              <a:rPr lang="en-US" sz="1800" b="1" dirty="0">
+                <a:solidFill>
+                  <a:srgbClr val="FFFFFF"/>
+                </a:solidFill>
+                <a:latin typeface="Calibri" pitchFamily="34" charset="0"/>
+                <a:ea typeface="Calibri" pitchFamily="34" charset="-122"/>
+                <a:cs typeface="Calibri" pitchFamily="34" charset="-120"/>
+              </a:rPr>
+              <a:t>A clean grid under pressure</a:t>
+            </a:r>
+            <a:endParaRPr lang="en-US" sz="1800" dirty="0"/>
+          </a:p>
+        </p:txBody>
+      </p:sp>
+      <p:sp>
+        <p:nvSpPr>
+          <p:cNvPr id="7" name="Text 4"/>
+          <p:cNvSpPr txBox="1"/>
+          <p:nvPr/>
+        </p:nvSpPr>
+        <p:spPr>
+          <a:xfrm>
+            <a:off x="822960" y="3474720"/>
+            <a:ext cx="2966618" cy="1600200"/>
+          </a:xfrm>
+          <a:prstGeom prst="rect">
+            <a:avLst/>
+          </a:prstGeom>
+          <a:noFill/>
+          <a:ln/>
+        </p:spPr>
+        <p:txBody>
+          <a:bodyPr wrap="square" lIns="0" tIns="0" rIns="0" bIns="0" rtlCol="0" anchor="t"/>
+          <a:lstStyle/>
+          <a:p>
+            <a:pPr indent="0" marL="0">
+              <a:spcAft>
+                <a:spcPts val="600"/>
+              </a:spcAft>
+              <a:buNone/>
+            </a:pPr>
+            <a:r>
+              <a:rPr lang="en-US" sz="1500" dirty="0">
+                <a:solidFill>
+                  <a:srgbClr val="E4E4E7"/>
+                </a:solidFill>
+                <a:latin typeface="Calibri" pitchFamily="34" charset="0"/>
+                <a:ea typeface="Calibri" pitchFamily="34" charset="-122"/>
+                <a:cs typeface="Calibri" pitchFamily="34" charset="-120"/>
+              </a:rPr>
+              <a:t>98% of Norway's electricity is hydro and wind, yet in 2025 the government froze new proof-of-work data centres to protect grid capacity. Nexa mining runs on ordinary GPUs and does not depend on data centres.</a:t>
+            </a:r>
+            <a:endParaRPr lang="en-US" sz="1500" dirty="0"/>
+          </a:p>
+        </p:txBody>
+      </p:sp>
+      <p:sp>
+        <p:nvSpPr>
+          <p:cNvPr id="8" name="Shape 5"/>
+          <p:cNvSpPr/>
+          <p:nvPr/>
+        </p:nvSpPr>
+        <p:spPr>
+          <a:xfrm>
+            <a:off x="4338218" y="1691640"/>
+            <a:ext cx="3515258" cy="3657600"/>
+          </a:xfrm>
+          <a:prstGeom prst="roundRect">
+            <a:avLst>
+              <a:gd name="adj" fmla="val 3121"/>
+            </a:avLst>
+          </a:prstGeom>
+          <a:solidFill>
+            <a:srgbClr val="18181B"/>
+          </a:solidFill>
+          <a:ln w="9525">
+            <a:solidFill>
+              <a:srgbClr val="2E2E35"/>
+            </a:solidFill>
+            <a:prstDash val="solid"/>
+          </a:ln>
+        </p:spPr>
+      </p:sp>
+      <p:sp>
+        <p:nvSpPr>
+          <p:cNvPr id="9" name="Shape 6"/>
+          <p:cNvSpPr/>
+          <p:nvPr/>
+        </p:nvSpPr>
+        <p:spPr>
+          <a:xfrm>
+            <a:off x="4612538" y="1965960"/>
+            <a:ext cx="640080" cy="640080"/>
+          </a:xfrm>
+          <a:prstGeom prst="ellipse">
+            <a:avLst/>
+          </a:prstGeom>
+          <a:solidFill>
+            <a:srgbClr val="F7931A"/>
+          </a:solidFill>
+          <a:ln w="12700">
+            <a:solidFill>
+              <a:srgbClr val="F7931A"/>
+            </a:solidFill>
+            <a:prstDash val="solid"/>
+          </a:ln>
+        </p:spPr>
+      </p:sp>
+      <p:pic>
+        <p:nvPicPr>
+          <p:cNvPr id="10" name="Image 1" descr="preencoded.png">    </p:cNvPr>
+          <p:cNvPicPr>
+            <a:picLocks noChangeAspect="1"/>
+          </p:cNvPicPr>
+          <p:nvPr/>
+        </p:nvPicPr>
+        <p:blipFill>
+          <a:blip r:embed="rId2"/>
+          <a:stretch>
+            <a:fillRect/>
+          </a:stretch>
+        </p:blipFill>
+        <p:spPr>
+          <a:xfrm>
+            <a:off x="4766158" y="2119579"/>
+            <a:ext cx="332842" cy="332842"/>
+          </a:xfrm>
+          <a:prstGeom prst="rect">
+            <a:avLst/>
+          </a:prstGeom>
+        </p:spPr>
+      </p:pic>
+      <p:sp>
+        <p:nvSpPr>
+          <p:cNvPr id="11" name="Text 7"/>
+          <p:cNvSpPr txBox="1"/>
+          <p:nvPr/>
+        </p:nvSpPr>
+        <p:spPr>
+          <a:xfrm>
+            <a:off x="4612538" y="2788920"/>
+            <a:ext cx="2966618" cy="640080"/>
+          </a:xfrm>
+          <a:prstGeom prst="rect">
+            <a:avLst/>
+          </a:prstGeom>
+          <a:noFill/>
+          <a:ln/>
+        </p:spPr>
+        <p:txBody>
+          <a:bodyPr wrap="square" lIns="0" tIns="0" rIns="0" bIns="0" rtlCol="0" anchor="t"/>
+          <a:lstStyle/>
+          <a:p>
+            <a:pPr indent="0" marL="0">
+              <a:buNone/>
+            </a:pPr>
+            <a:r>
+              <a:rPr lang="en-US" sz="1800" b="1" dirty="0">
+                <a:solidFill>
+                  <a:srgbClr val="FFFFFF"/>
+                </a:solidFill>
+                <a:latin typeface="Calibri" pitchFamily="34" charset="0"/>
+                <a:ea typeface="Calibri" pitchFamily="34" charset="-122"/>
+                <a:cs typeface="Calibri" pitchFamily="34" charset="-120"/>
+              </a:rPr>
+              <a:t>Bitcoin ≈ Norway</a:t>
+            </a:r>
+            <a:endParaRPr lang="en-US" sz="1800" dirty="0"/>
+          </a:p>
+        </p:txBody>
+      </p:sp>
+      <p:sp>
+        <p:nvSpPr>
+          <p:cNvPr id="12" name="Text 8"/>
+          <p:cNvSpPr txBox="1"/>
+          <p:nvPr/>
+        </p:nvSpPr>
+        <p:spPr>
+          <a:xfrm>
+            <a:off x="4612538" y="3474720"/>
+            <a:ext cx="2966618" cy="1600200"/>
+          </a:xfrm>
+          <a:prstGeom prst="rect">
+            <a:avLst/>
+          </a:prstGeom>
+          <a:noFill/>
+          <a:ln/>
+        </p:spPr>
+        <p:txBody>
+          <a:bodyPr wrap="square" lIns="0" tIns="0" rIns="0" bIns="0" rtlCol="0" anchor="t"/>
+          <a:lstStyle/>
+          <a:p>
+            <a:pPr indent="0" marL="0">
+              <a:spcAft>
+                <a:spcPts val="600"/>
+              </a:spcAft>
+              <a:buNone/>
+            </a:pPr>
+            <a:r>
+              <a:rPr lang="en-US" sz="1500" dirty="0">
+                <a:solidFill>
+                  <a:srgbClr val="E4E4E7"/>
+                </a:solidFill>
+                <a:latin typeface="Calibri" pitchFamily="34" charset="0"/>
+                <a:ea typeface="Calibri" pitchFamily="34" charset="-122"/>
+                <a:cs typeface="Calibri" pitchFamily="34" charset="-120"/>
+              </a:rPr>
+              <a:t>Bitcoin's roughly 140 TWh a year equals Norway's entire electricity consumption, for 7 transactions per second. The same electricity on Nexa would carry thousands of times more payments.</a:t>
+            </a:r>
+            <a:endParaRPr lang="en-US" sz="1500" dirty="0"/>
+          </a:p>
+        </p:txBody>
+      </p:sp>
+      <p:sp>
+        <p:nvSpPr>
+          <p:cNvPr id="13" name="Shape 9"/>
+          <p:cNvSpPr/>
+          <p:nvPr/>
+        </p:nvSpPr>
+        <p:spPr>
+          <a:xfrm>
+            <a:off x="8127797" y="1691640"/>
+            <a:ext cx="3515258" cy="3657600"/>
+          </a:xfrm>
+          <a:prstGeom prst="roundRect">
+            <a:avLst>
+              <a:gd name="adj" fmla="val 3121"/>
+            </a:avLst>
+          </a:prstGeom>
+          <a:solidFill>
+            <a:srgbClr val="18181B"/>
+          </a:solidFill>
+          <a:ln w="9525">
+            <a:solidFill>
+              <a:srgbClr val="2E2E35"/>
+            </a:solidFill>
+            <a:prstDash val="solid"/>
+          </a:ln>
+        </p:spPr>
+      </p:sp>
+      <p:sp>
+        <p:nvSpPr>
+          <p:cNvPr id="14" name="Shape 10"/>
+          <p:cNvSpPr/>
+          <p:nvPr/>
+        </p:nvSpPr>
+        <p:spPr>
+          <a:xfrm>
+            <a:off x="8402117" y="1965960"/>
+            <a:ext cx="640080" cy="640080"/>
+          </a:xfrm>
+          <a:prstGeom prst="ellipse">
+            <a:avLst/>
+          </a:prstGeom>
+          <a:solidFill>
+            <a:srgbClr val="F2CD3A"/>
+          </a:solidFill>
+          <a:ln w="12700">
+            <a:solidFill>
+              <a:srgbClr val="F2CD3A"/>
+            </a:solidFill>
+            <a:prstDash val="solid"/>
+          </a:ln>
+        </p:spPr>
+      </p:sp>
+      <p:pic>
+        <p:nvPicPr>
+          <p:cNvPr id="15" name="Image 2" descr="preencoded.png">    </p:cNvPr>
+          <p:cNvPicPr>
+            <a:picLocks noChangeAspect="1"/>
+          </p:cNvPicPr>
+          <p:nvPr/>
+        </p:nvPicPr>
+        <p:blipFill>
+          <a:blip r:embed="rId3"/>
+          <a:stretch>
+            <a:fillRect/>
+          </a:stretch>
+        </p:blipFill>
+        <p:spPr>
+          <a:xfrm>
+            <a:off x="8555736" y="2119579"/>
+            <a:ext cx="332842" cy="332842"/>
+          </a:xfrm>
+          <a:prstGeom prst="rect">
+            <a:avLst/>
+          </a:prstGeom>
+        </p:spPr>
+      </p:pic>
+      <p:sp>
+        <p:nvSpPr>
+          <p:cNvPr id="16" name="Text 11"/>
+          <p:cNvSpPr txBox="1"/>
+          <p:nvPr/>
+        </p:nvSpPr>
+        <p:spPr>
+          <a:xfrm>
+            <a:off x="8402117" y="2788920"/>
+            <a:ext cx="2966618" cy="640080"/>
+          </a:xfrm>
+          <a:prstGeom prst="rect">
+            <a:avLst/>
+          </a:prstGeom>
+          <a:noFill/>
+          <a:ln/>
+        </p:spPr>
+        <p:txBody>
+          <a:bodyPr wrap="square" lIns="0" tIns="0" rIns="0" bIns="0" rtlCol="0" anchor="t"/>
+          <a:lstStyle/>
+          <a:p>
+            <a:pPr indent="0" marL="0">
+              <a:buNone/>
+            </a:pPr>
+            <a:r>
+              <a:rPr lang="en-US" sz="1800" b="1" dirty="0">
+                <a:solidFill>
+                  <a:srgbClr val="FFFFFF"/>
+                </a:solidFill>
+                <a:latin typeface="Calibri" pitchFamily="34" charset="0"/>
+                <a:ea typeface="Calibri" pitchFamily="34" charset="-122"/>
+                <a:cs typeface="Calibri" pitchFamily="34" charset="-120"/>
+              </a:rPr>
+              <a:t>A cashless country</a:t>
+            </a:r>
+            <a:endParaRPr lang="en-US" sz="1800" dirty="0"/>
+          </a:p>
+        </p:txBody>
+      </p:sp>
+      <p:sp>
+        <p:nvSpPr>
+          <p:cNvPr id="17" name="Text 12"/>
+          <p:cNvSpPr txBox="1"/>
+          <p:nvPr/>
+        </p:nvSpPr>
+        <p:spPr>
+          <a:xfrm>
+            <a:off x="8402117" y="3474720"/>
+            <a:ext cx="2966618" cy="1600200"/>
+          </a:xfrm>
+          <a:prstGeom prst="rect">
+            <a:avLst/>
+          </a:prstGeom>
+          <a:noFill/>
+          <a:ln/>
+        </p:spPr>
+        <p:txBody>
+          <a:bodyPr wrap="square" lIns="0" tIns="0" rIns="0" bIns="0" rtlCol="0" anchor="t"/>
+          <a:lstStyle/>
+          <a:p>
+            <a:pPr indent="0" marL="0">
+              <a:spcAft>
+                <a:spcPts val="600"/>
+              </a:spcAft>
+              <a:buNone/>
+            </a:pPr>
+            <a:r>
+              <a:rPr lang="en-US" sz="1500" dirty="0">
+                <a:solidFill>
+                  <a:srgbClr val="E4E4E7"/>
+                </a:solidFill>
+                <a:latin typeface="Calibri" pitchFamily="34" charset="0"/>
+                <a:ea typeface="Calibri" pitchFamily="34" charset="-122"/>
+                <a:cs typeface="Calibri" pitchFamily="34" charset="-120"/>
+              </a:rPr>
+              <a:t>Norwegians already pay by phone in seconds. A sound-money rail that settles in two seconds for a fraction of an øre fits how people here already live.</a:t>
+            </a:r>
+            <a:endParaRPr lang="en-US" sz="1500" dirty="0"/>
+          </a:p>
+        </p:txBody>
+      </p:sp>
+      <p:pic>
+        <p:nvPicPr>
+          <p:cNvPr id="19" name="Image 3" descr="preencoded.png">    </p:cNvPr>
+          <p:cNvPicPr>
+            <a:picLocks noChangeAspect="1"/>
+          </p:cNvPicPr>
+          <p:nvPr/>
+        </p:nvPicPr>
+        <p:blipFill>
+          <a:blip r:embed="rId4"/>
+          <a:stretch>
+            <a:fillRect/>
+          </a:stretch>
+        </p:blipFill>
+        <p:spPr>
+          <a:xfrm>
+            <a:off x="548640" y="6355080"/>
+            <a:ext cx="256032" cy="246888"/>
+          </a:xfrm>
+          <a:prstGeom prst="rect">
+            <a:avLst/>
+          </a:prstGeom>
+        </p:spPr>
+      </p:pic>
+      <p:sp>
+        <p:nvSpPr>
+          <p:cNvPr id="20" name="Text 13"/>
+          <p:cNvSpPr txBox="1"/>
+          <p:nvPr/>
+        </p:nvSpPr>
+        <p:spPr>
+          <a:xfrm>
+            <a:off x="877824" y="6400800"/>
+            <a:ext cx="2743200" cy="274320"/>
+          </a:xfrm>
+          <a:prstGeom prst="rect">
+            <a:avLst/>
+          </a:prstGeom>
+          <a:noFill/>
+          <a:ln/>
+        </p:spPr>
+        <p:txBody>
+          <a:bodyPr wrap="square" lIns="0" tIns="0" rIns="0" bIns="0" rtlCol="0" anchor="ctr"/>
+          <a:lstStyle/>
+          <a:p>
+            <a:pPr algn="l" indent="0" marL="0">
+              <a:buNone/>
+            </a:pPr>
+            <a:r>
+              <a:rPr lang="en-US" sz="1000" dirty="0">
+                <a:solidFill>
+                  <a:srgbClr val="A1A1AA"/>
+                </a:solidFill>
+                <a:latin typeface="Calibri" pitchFamily="34" charset="0"/>
+                <a:ea typeface="Calibri" pitchFamily="34" charset="-122"/>
+                <a:cs typeface="Calibri" pitchFamily="34" charset="-120"/>
+              </a:rPr>
+              <a:t>Nexa · 2026</a:t>
+            </a:r>
+            <a:endParaRPr lang="en-US" sz="1000" dirty="0"/>
+          </a:p>
+        </p:txBody>
+      </p:sp>
+      <p:sp>
+        <p:nvSpPr>
+          <p:cNvPr id="21" name="Text 14"/>
+          <p:cNvSpPr txBox="1"/>
+          <p:nvPr/>
+        </p:nvSpPr>
+        <p:spPr>
+          <a:xfrm>
+            <a:off x="11094415" y="6400800"/>
+            <a:ext cx="548640" cy="274320"/>
+          </a:xfrm>
+          <a:prstGeom prst="rect">
+            <a:avLst/>
+          </a:prstGeom>
+          <a:noFill/>
+          <a:ln/>
+        </p:spPr>
+        <p:txBody>
+          <a:bodyPr wrap="square" lIns="0" tIns="0" rIns="0" bIns="0" rtlCol="0" anchor="ctr"/>
+          <a:lstStyle/>
+          <a:p>
+            <a:pPr algn="r" indent="0" marL="0">
+              <a:buNone/>
+            </a:pPr>
+            <a:r>
+              <a:rPr lang="en-US" sz="1000" dirty="0">
+                <a:solidFill>
+                  <a:srgbClr val="A1A1AA"/>
+                </a:solidFill>
+                <a:latin typeface="Calibri" pitchFamily="34" charset="0"/>
+                <a:ea typeface="Calibri" pitchFamily="34" charset="-122"/>
+                <a:cs typeface="Calibri" pitchFamily="34" charset="-120"/>
+              </a:rPr>
+              <a:t>17</a:t>
+            </a:r>
+            <a:endParaRPr lang="en-US" sz="1000" dirty="0"/>
+          </a:p>
+        </p:txBody>
+      </p:sp>
+    </p:spTree>
+  </p:cSld>
+  <p:clrMapOvr>
+    <a:masterClrMapping/>
+  </p:clrMapOvr>
+</p:sld>
+</file>
+
+<file path=ppt/slides/slide18.xml><?xml version="1.0" encoding="utf-8"?>
+<p:sld xmlns:a="http://schemas.openxmlformats.org/drawingml/2006/main" xmlns:r="http://schemas.openxmlformats.org/officeDocument/2006/relationships" xmlns:p="http://schemas.openxmlformats.org/presentationml/2006/main">
+  <p:cSld name="Slide 18">
+    <p:bg>
+      <p:bgPr>
+        <a:solidFill>
+          <a:srgbClr val="0A0A0F"/>
+        </a:solidFill>
+      </p:bgPr>
+    </p:bg>
+    <p:spTree>
+      <p:nvGrpSpPr>
+        <p:cNvPr id="1" name=""/>
+        <p:cNvGrpSpPr/>
+        <p:nvPr/>
+      </p:nvGrpSpPr>
+      <p:grpSpPr>
+        <a:xfrm>
+          <a:off x="0" y="0"/>
+          <a:ext cx="0" cy="0"/>
+          <a:chOff x="0" y="0"/>
+          <a:chExt cx="0" cy="0"/>
+        </a:xfrm>
+      </p:grpSpPr>
+      <p:sp>
+        <p:nvSpPr>
+          <p:cNvPr id="2" name="Text 0"/>
+          <p:cNvSpPr txBox="1"/>
+          <p:nvPr/>
+        </p:nvSpPr>
+        <p:spPr>
+          <a:xfrm>
+            <a:off x="548640" y="411480"/>
+            <a:ext cx="11094415" cy="1005840"/>
+          </a:xfrm>
+          <a:prstGeom prst="rect">
+            <a:avLst/>
+          </a:prstGeom>
+          <a:noFill/>
+          <a:ln/>
+        </p:spPr>
+        <p:txBody>
+          <a:bodyPr wrap="square" lIns="0" tIns="0" rIns="0" bIns="0" rtlCol="0" anchor="t"/>
+          <a:lstStyle/>
+          <a:p>
+            <a:pPr algn="l" indent="0" marL="0">
+              <a:buNone/>
+            </a:pPr>
+            <a:r>
+              <a:rPr lang="en-US" sz="3000" b="1" dirty="0">
+                <a:solidFill>
+                  <a:srgbClr val="FFFFFF"/>
+                </a:solidFill>
+                <a:latin typeface="Calibri" pitchFamily="34" charset="0"/>
+                <a:ea typeface="Calibri" pitchFamily="34" charset="-122"/>
+                <a:cs typeface="Calibri" pitchFamily="34" charset="-120"/>
+              </a:rPr>
               <a:t>Comparison overview</a:t>
             </a:r>
             <a:endParaRPr lang="en-US" sz="3000" dirty="0"/>
@@ -5871,7 +8070,7 @@
       </p:sp>
       <p:graphicFrame>
         <p:nvGraphicFramePr>
-          <p:cNvPr id="16" name="Table 0"/>
+          <p:cNvPr id="19" name="Table 0"/>
           <p:cNvGraphicFramePr>
             <a:graphicFrameLocks noGrp="1"/>
           </p:cNvGraphicFramePr>
@@ -7367,7 +9566,7 @@
                 <a:ea typeface="Calibri" pitchFamily="34" charset="-122"/>
                 <a:cs typeface="Calibri" pitchFamily="34" charset="-120"/>
               </a:rPr>
-              <a:t>15</a:t>
+              <a:t>18</a:t>
             </a:r>
             <a:endParaRPr lang="en-US" sz="1000" dirty="0"/>
           </a:p>
@@ -7381,9 +9580,9 @@
 </p:sld>
 </file>
 
-<file path=ppt/slides/slide16.xml><?xml version="1.0" encoding="utf-8"?>
+<file path=ppt/slides/slide19.xml><?xml version="1.0" encoding="utf-8"?>
 <p:sld xmlns:a="http://schemas.openxmlformats.org/drawingml/2006/main" xmlns:r="http://schemas.openxmlformats.org/officeDocument/2006/relationships" xmlns:p="http://schemas.openxmlformats.org/presentationml/2006/main">
-  <p:cSld name="Slide 16">
+  <p:cSld name="Slide 19">
     <p:bg>
       <p:bgPr>
         <a:solidFill>
@@ -8041,7 +10240,7 @@
                 <a:ea typeface="Calibri" pitchFamily="34" charset="-122"/>
                 <a:cs typeface="Calibri" pitchFamily="34" charset="-120"/>
               </a:rPr>
-              <a:t>16</a:t>
+              <a:t>19</a:t>
             </a:r>
             <a:endParaRPr lang="en-US" sz="1000" dirty="0"/>
           </a:p>

--- a/docs/nexa-vs-bitcoin-ethereum/Nexa-vs-Bitcoin-Ethereum.pptx
+++ b/docs/nexa-vs-bitcoin-ethereum/Nexa-vs-Bitcoin-Ethereum.pptx
@@ -24,9 +24,10 @@
     <p:sldId id="272" r:id="rId18"/>
     <p:sldId id="273" r:id="rId19"/>
     <p:sldId id="274" r:id="rId20"/>
+    <p:sldId id="275" r:id="rId21"/>
   </p:sldIdLst>
   <p:notesMasterIdLst>
-    <p:notesMasterId r:id="rId21"/>
+    <p:notesMasterId r:id="rId22"/>
   </p:notesMasterIdLst>
   <p:sldSz cx="12192000" cy="6858000"/>
   <p:notesSz cx="6858000" cy="12192000"/>
@@ -1048,7 +1049,7 @@
           <a:p>
             <a:r>
               <a:rPr lang="en-US" dirty="0"/>
-              <a:t>nexa.org: 'Native on-chain programmability without EVM complexity', 'No EVM overhead'. The developer stack: Wally wallet, TDPP payment protocol, nexid identity, CAPD messaging, NexaJS and libnexakotlin. Keep this slide short for a non-developer audience; expand only if asked.</a:t>
+              <a:t>These are design patterns, not products; each maps to a primitive from the previous slides. Tokens and batons: native group tokens (spec.nexa.org/tokens/grouptokens), MINT-only authorities split from the baton, mint-on-demand as a half-signed transaction the buyer funds, subgroups for seasons or editions, MELT to retire them. CAPD: half-signed offers broadcast on the message bus and completed by the taker (spec.nexa.org/network/capd); resale caps are a covenant in the token's script template. Token Secrets: the token commits to a secret's public key and the transfer reveals it to the buyer via ECDH (spec.nexa.org/tokensecret). This is the answer to the organisers' 'financialisation' worry: every example is a thing people use, priced in fractions of an øre, with no exchange, marketplace operator or gas market in between.</a:t>
             </a:r>
             <a:endParaRPr lang="en-US" dirty="0"/>
           </a:p>
@@ -1136,7 +1137,7 @@
           <a:p>
             <a:r>
               <a:rPr lang="en-US" dirty="0"/>
-              <a:t>Sources: spec.nexa.org/nexid (Nexa Identity Protocol), spec.nexa.org/transactions/challengeTransaction, spec.nexa.org/dpp (Delegated Payment Protocol). nexid: the website presents a login offer with a random challenge via QR or browser plugin; the wallet derives a site-specific private key from the master key plus an optional site password, signs, and sends the signed message directly to the server, bypassing the untrusted computer; backup is the 12-word phrase. Challenge transactions: a transaction with the version high bit set is invalid forever; a single data output carries the challenger's identity and a random challenge; signing it proves control of the referenced UTXOs under any script, which ordinary message signing cannot do for multisig or contracts. DPP: the entity registers with proposed limits and sends signed payment requests; the wallet, not the merchant, decides automatic versus prompted execution. For a Norwegian audience: BankID for login, AvtaleGiro and card-on-file for payments are the familiar comparisons.</a:t>
+              <a:t>nexa.org: 'Native on-chain programmability without EVM complexity', 'No EVM overhead'. The developer stack: Wally wallet, TDPP payment protocol, nexid identity, CAPD messaging, NexaJS and libnexakotlin. Keep this slide short for a non-developer audience; expand only if asked.</a:t>
             </a:r>
             <a:endParaRPr lang="en-US" dirty="0"/>
           </a:p>
@@ -1224,7 +1225,7 @@
           <a:p>
             <a:r>
               <a:rPr lang="en-US" dirty="0"/>
-              <a:t>SSB: 98% of Norway's electricity from hydro and wind (late 2025); normal annual production ~157 TWh, consumption ~140 TWh. June 2025: the government announced a temporary ban on new proof-of-work mining data centres, with a mandatory data-centre registry; officials have hinted it may become permanent. Be honest: the ban applies to PoW mining generally, so a Nexa farm would be covered too. The point is that Nexa's network does not depend on farms anywhere.</a:t>
+              <a:t>Sources: spec.nexa.org/nexid (Nexa Identity Protocol), spec.nexa.org/transactions/challengeTransaction, spec.nexa.org/dpp (Delegated Payment Protocol). nexid: the website presents a login offer with a random challenge via QR or browser plugin; the wallet derives a site-specific private key from the master key plus an optional site password, signs, and sends the signed message directly to the server, bypassing the untrusted computer; backup is the 12-word phrase. Challenge transactions: a transaction with the version high bit set is invalid forever; a single data output carries the challenger's identity and a random challenge; signing it proves control of the referenced UTXOs under any script, which ordinary message signing cannot do for multisig or contracts. DPP: the entity registers with proposed limits and sends signed payment requests; the wallet, not the merchant, decides automatic versus prompted execution. For a Norwegian audience: BankID for login, AvtaleGiro and card-on-file for payments are the familiar comparisons.</a:t>
             </a:r>
             <a:endParaRPr lang="en-US" dirty="0"/>
           </a:p>
@@ -1312,7 +1313,7 @@
           <a:p>
             <a:r>
               <a:rPr lang="en-US" dirty="0"/>
-              <a:t>One-slide answer to the organisers' three themes: energy and e-waste, who benefits, and NFT speculation. Every figure appears earlier in the deck with its source.</a:t>
+              <a:t>SSB: 98% of Norway's electricity from hydro and wind (late 2025); normal annual production ~157 TWh, consumption ~140 TWh. June 2025: the government announced a temporary ban on new proof-of-work mining data centres, with a mandatory data-centre registry; officials have hinted it may become permanent. Be honest: the ban applies to PoW mining generally, so a Nexa farm would be covered too. The point is that Nexa's network does not depend on farms anywhere.</a:t>
             </a:r>
             <a:endParaRPr lang="en-US" dirty="0"/>
           </a:p>
@@ -1400,7 +1401,7 @@
           <a:p>
             <a:r>
               <a:rPr lang="en-US" dirty="0"/>
-              <a:t>Close on the three answers to the three concerns. If challenged on the 13,000x figure: it is a capacity comparison at equal network power, 5,600x on today's benchmark and 13,000x with Blitz; the floor is 1,000x because Bitcoin cannot exceed ~14 TPS.</a:t>
+              <a:t>One-slide answer to the organisers' three themes: energy and e-waste, who benefits, and NFT speculation. Every figure appears earlier in the deck with its source.</a:t>
             </a:r>
             <a:endParaRPr lang="en-US" dirty="0"/>
           </a:p>
@@ -1512,6 +1513,94 @@
             <a:fld id="{F7021451-1387-4CA6-816F-3879F97B5CBC}" type="slidenum">
               <a:rPr lang="en-US"/>
               <a:t>2</a:t>
+            </a:fld>
+            <a:endParaRPr lang="en-US"/>
+          </a:p>
+        </p:txBody>
+      </p:sp>
+    </p:spTree>
+    <p:extLst>
+      <p:ext uri="{BB962C8B-B14F-4D97-AF65-F5344CB8AC3E}">
+        <p14:creationId xmlns:p14="http://schemas.microsoft.com/office/powerpoint/2010/main" val="1024086991"/>
+      </p:ext>
+    </p:extLst>
+  </p:cSld>
+  <p:clrMapOvr>
+    <a:masterClrMapping/>
+  </p:clrMapOvr>
+</p:notes>
+</file>
+
+<file path=ppt/notesSlides/notesSlide20.xml><?xml version="1.0" encoding="utf-8"?>
+<p:notes xmlns:a="http://schemas.openxmlformats.org/drawingml/2006/main" xmlns:r="http://schemas.openxmlformats.org/officeDocument/2006/relationships" xmlns:p="http://schemas.openxmlformats.org/presentationml/2006/main">
+  <p:cSld>
+    <p:spTree>
+      <p:nvGrpSpPr>
+        <p:cNvPr id="1" name=""/>
+        <p:cNvGrpSpPr/>
+        <p:nvPr/>
+      </p:nvGrpSpPr>
+      <p:grpSpPr>
+        <a:xfrm>
+          <a:off x="0" y="0"/>
+          <a:ext cx="0" cy="0"/>
+          <a:chOff x="0" y="0"/>
+          <a:chExt cx="0" cy="0"/>
+        </a:xfrm>
+      </p:grpSpPr>
+      <p:sp>
+        <p:nvSpPr>
+          <p:cNvPr id="2" name="Slide Image Placeholder 1"/>
+          <p:cNvSpPr>
+            <a:spLocks noGrp="1" noRot="1" noChangeAspect="1"/>
+          </p:cNvSpPr>
+          <p:nvPr>
+            <p:ph type="sldImg"/>
+          </p:nvPr>
+        </p:nvSpPr>
+        <p:spPr/>
+      </p:sp>
+      <p:sp>
+        <p:nvSpPr>
+          <p:cNvPr id="3" name="Notes Placeholder 2"/>
+          <p:cNvSpPr>
+            <a:spLocks noGrp="1"/>
+          </p:cNvSpPr>
+          <p:nvPr>
+            <p:ph type="body" idx="1"/>
+          </p:nvPr>
+        </p:nvSpPr>
+        <p:spPr/>
+        <p:txBody>
+          <a:bodyPr/>
+          <a:lstStyle/>
+          <a:p>
+            <a:r>
+              <a:rPr lang="en-US" dirty="0"/>
+              <a:t>Close on the three answers to the three concerns. If challenged on the 13,000x figure: it is a capacity comparison at equal network power, 5,600x on today's benchmark and 13,000x with Blitz; the floor is 1,000x because Bitcoin cannot exceed ~14 TPS.</a:t>
+            </a:r>
+            <a:endParaRPr lang="en-US" dirty="0"/>
+          </a:p>
+        </p:txBody>
+      </p:sp>
+      <p:sp>
+        <p:nvSpPr>
+          <p:cNvPr id="4" name="Slide Number Placeholder 3"/>
+          <p:cNvSpPr>
+            <a:spLocks noGrp="1"/>
+          </p:cNvSpPr>
+          <p:nvPr>
+            <p:ph type="sldNum" sz="quarter" idx="10"/>
+          </p:nvPr>
+        </p:nvSpPr>
+        <p:spPr/>
+        <p:txBody>
+          <a:bodyPr/>
+          <a:lstStyle/>
+          <a:p>
+            <a:fld id="{F7021451-1387-4CA6-816F-3879F97B5CBC}" type="slidenum">
+              <a:rPr lang="en-US"/>
+              <a:t>20</a:t>
             </a:fld>
             <a:endParaRPr lang="en-US"/>
           </a:p>
@@ -6130,7 +6219,7 @@
                 <a:ea typeface="Calibri" pitchFamily="34" charset="-122"/>
                 <a:cs typeface="Calibri" pitchFamily="34" charset="-120"/>
               </a:rPr>
-              <a:t>Smart contracts without the EVM</a:t>
+              <a:t>What you can build with it: practical use cases</a:t>
             </a:r>
             <a:endParaRPr lang="en-US" sz="3000" dirty="0"/>
           </a:p>
@@ -6145,7 +6234,7 @@
         <p:spPr>
           <a:xfrm>
             <a:off x="548640" y="1691640"/>
-            <a:ext cx="3515258" cy="3657600"/>
+            <a:ext cx="3515258" cy="4480560"/>
           </a:xfrm>
           <a:prstGeom prst="roundRect">
             <a:avLst>
@@ -6245,7 +6334,7 @@
                 <a:ea typeface="Calibri" pitchFamily="34" charset="-122"/>
                 <a:cs typeface="Calibri" pitchFamily="34" charset="-120"/>
               </a:rPr>
-              <a:t>Script templates</a:t>
+              <a:t>Tokens and batons</a:t>
             </a:r>
             <a:endParaRPr lang="en-US" sz="1800" dirty="0"/>
           </a:p>
@@ -6260,7 +6349,7 @@
         <p:spPr>
           <a:xfrm>
             <a:off x="822960" y="3474720"/>
-            <a:ext cx="2966618" cy="1600200"/>
+            <a:ext cx="2966618" cy="2423160"/>
           </a:xfrm>
           <a:prstGeom prst="rect">
             <a:avLst/>
@@ -6287,7 +6376,7 @@
                 <a:ea typeface="Calibri" pitchFamily="34" charset="-122"/>
                 <a:cs typeface="Calibri" pitchFamily="34" charset="-120"/>
               </a:rPr>
-              <a:t>Contracts are small, deterministic scripts attached to coins and validated in parallel like any other transaction. There is no global state machine to congest.</a:t>
+              <a:t>A game studio mints its items as native tokens and keeps the baton cold. The in-game shop holds a MINT-only authority inside a mint-on-demand contract, so a sword exists only once a player has paid. A season pass is a subgroup melted when the season ends; a festival hands a partner venue a MINT authority for its own ticket allotment.</a:t>
             </a:r>
             <a:endParaRPr lang="en-US" sz="1500" dirty="0"/>
           </a:p>
@@ -6302,7 +6391,7 @@
         <p:spPr>
           <a:xfrm>
             <a:off x="4338218" y="1691640"/>
-            <a:ext cx="3515258" cy="3657600"/>
+            <a:ext cx="3515258" cy="4480560"/>
           </a:xfrm>
           <a:prstGeom prst="roundRect">
             <a:avLst>
@@ -6402,7 +6491,7 @@
                 <a:ea typeface="Calibri" pitchFamily="34" charset="-122"/>
                 <a:cs typeface="Calibri" pitchFamily="34" charset="-120"/>
               </a:rPr>
-              <a:t>No EVM overhead</a:t>
+              <a:t>CAPD open outcry</a:t>
             </a:r>
             <a:endParaRPr lang="en-US" sz="1800" dirty="0"/>
           </a:p>
@@ -6417,7 +6506,7 @@
         <p:spPr>
           <a:xfrm>
             <a:off x="4612538" y="3474720"/>
-            <a:ext cx="2966618" cy="1600200"/>
+            <a:ext cx="2966618" cy="2423160"/>
           </a:xfrm>
           <a:prstGeom prst="rect">
             <a:avLst/>
@@ -6444,7 +6533,7 @@
                 <a:ea typeface="Calibri" pitchFamily="34" charset="-122"/>
                 <a:cs typeface="Calibri" pitchFamily="34" charset="-120"/>
               </a:rPr>
-              <a:t>No gas market, no reentrancy class of bugs, no fee spike for everyone when one app gets popular. Contracts run at the same 42,000 TPS as plain payments.</a:t>
+              <a:t>A player-to-player item market with no marketplace operator: sellers broadcast half-signed offers, buyers take them, and the swap settles atomically. A ticket exchange where a covenant caps resale at face value. A local NEXA-for-tokens board at a meetup or a LAN party, running on nothing but the nodes.</a:t>
             </a:r>
             <a:endParaRPr lang="en-US" sz="1500" dirty="0"/>
           </a:p>
@@ -6459,7 +6548,7 @@
         <p:spPr>
           <a:xfrm>
             <a:off x="8127797" y="1691640"/>
-            <a:ext cx="3515258" cy="3657600"/>
+            <a:ext cx="3515258" cy="4480560"/>
           </a:xfrm>
           <a:prstGeom prst="roundRect">
             <a:avLst>
@@ -6559,7 +6648,7 @@
                 <a:ea typeface="Calibri" pitchFamily="34" charset="-122"/>
                 <a:cs typeface="Calibri" pitchFamily="34" charset="-120"/>
               </a:rPr>
-              <a:t>A full platform</a:t>
+              <a:t>Token Secrets</a:t>
             </a:r>
             <a:endParaRPr lang="en-US" sz="1800" dirty="0"/>
           </a:p>
@@ -6574,7 +6663,7 @@
         <p:spPr>
           <a:xfrm>
             <a:off x="8402117" y="3474720"/>
-            <a:ext cx="2966618" cy="1600200"/>
+            <a:ext cx="2966618" cy="2423160"/>
           </a:xfrm>
           <a:prstGeom prst="rect">
             <a:avLst/>
@@ -6601,7 +6690,7 @@
                 <a:ea typeface="Calibri" pitchFamily="34" charset="-122"/>
                 <a:cs typeface="Calibri" pitchFamily="34" charset="-120"/>
               </a:rPr>
-              <a:t>Wallet login with on-chain identity, payment requests to the user's wallet and peer-to-peer messaging are part of the stack, with Kotlin and JavaScript libraries.</a:t>
+              <a:t>A game key delivered inside the purchase transaction: the buyer gets the token and the licence key in one step, and nobody else can read it. Encrypted DLC or a paywalled article where the token carries the decryption key. A concert ticket that carries the door code, revealed only to the holder.</a:t>
             </a:r>
             <a:endParaRPr lang="en-US" sz="1500" dirty="0"/>
           </a:p>
@@ -6774,7 +6863,7 @@
                 <a:ea typeface="Calibri" pitchFamily="34" charset="-122"/>
                 <a:cs typeface="Calibri" pitchFamily="34" charset="-120"/>
               </a:rPr>
-              <a:t>Identity and payments live in the wallet, not on the merchant's server</a:t>
+              <a:t>Smart contracts without the EVM</a:t>
             </a:r>
             <a:endParaRPr lang="en-US" sz="3000" dirty="0"/>
           </a:p>
@@ -6789,7 +6878,7 @@
         <p:spPr>
           <a:xfrm>
             <a:off x="548640" y="1691640"/>
-            <a:ext cx="3515258" cy="4206240"/>
+            <a:ext cx="3515258" cy="3657600"/>
           </a:xfrm>
           <a:prstGeom prst="roundRect">
             <a:avLst>
@@ -6889,7 +6978,7 @@
                 <a:ea typeface="Calibri" pitchFamily="34" charset="-122"/>
                 <a:cs typeface="Calibri" pitchFamily="34" charset="-120"/>
               </a:rPr>
-              <a:t>Log in with the phone, no password (nexid)</a:t>
+              <a:t>Script templates</a:t>
             </a:r>
             <a:endParaRPr lang="en-US" sz="1800" dirty="0"/>
           </a:p>
@@ -6904,7 +6993,7 @@
         <p:spPr>
           <a:xfrm>
             <a:off x="822960" y="3474720"/>
-            <a:ext cx="2966618" cy="2148840"/>
+            <a:ext cx="2966618" cy="1600200"/>
           </a:xfrm>
           <a:prstGeom prst="rect">
             <a:avLst/>
@@ -6931,7 +7020,7 @@
                 <a:ea typeface="Calibri" pitchFamily="34" charset="-122"/>
                 <a:cs typeface="Calibri" pitchFamily="34" charset="-120"/>
               </a:rPr>
-              <a:t>The site shows a challenge in a QR code, the phone signs it with a key derived per site, and the answer goes straight from the phone to the server. The key never leaves the phone, every site gets its own identity, and lookalike domains fail. The BankID experience without a bank.</a:t>
+              <a:t>Contracts are small, deterministic scripts attached to coins and validated in parallel like any other transaction. There is no global state machine to congest.</a:t>
             </a:r>
             <a:endParaRPr lang="en-US" sz="1500" dirty="0"/>
           </a:p>
@@ -6946,7 +7035,7 @@
         <p:spPr>
           <a:xfrm>
             <a:off x="4338218" y="1691640"/>
-            <a:ext cx="3515258" cy="4206240"/>
+            <a:ext cx="3515258" cy="3657600"/>
           </a:xfrm>
           <a:prstGeom prst="roundRect">
             <a:avLst>
@@ -7046,7 +7135,7 @@
                 <a:ea typeface="Calibri" pitchFamily="34" charset="-122"/>
                 <a:cs typeface="Calibri" pitchFamily="34" charset="-120"/>
               </a:rPr>
-              <a:t>Prove ownership without spending</a:t>
+              <a:t>No EVM overhead</a:t>
             </a:r>
             <a:endParaRPr lang="en-US" sz="1800" dirty="0"/>
           </a:p>
@@ -7061,7 +7150,7 @@
         <p:spPr>
           <a:xfrm>
             <a:off x="4612538" y="3474720"/>
-            <a:ext cx="2966618" cy="2148840"/>
+            <a:ext cx="2966618" cy="1600200"/>
           </a:xfrm>
           <a:prstGeom prst="rect">
             <a:avLst/>
@@ -7088,7 +7177,7 @@
                 <a:ea typeface="Calibri" pitchFamily="34" charset="-122"/>
                 <a:cs typeface="Calibri" pitchFamily="34" charset="-120"/>
               </a:rPr>
-              <a:t>Challenge transactions: you sign a deliberately invalid transaction that is never broadcast. That proves control of coins, NFTs or a multisig under any script, and it is what makes token-gated access possible.</a:t>
+              <a:t>No gas market, no reentrancy class of bugs, no fee spike for everyone when one app gets popular. Contracts run at the same 42,000 TPS as plain payments.</a:t>
             </a:r>
             <a:endParaRPr lang="en-US" sz="1500" dirty="0"/>
           </a:p>
@@ -7103,7 +7192,7 @@
         <p:spPr>
           <a:xfrm>
             <a:off x="8127797" y="1691640"/>
-            <a:ext cx="3515258" cy="4206240"/>
+            <a:ext cx="3515258" cy="3657600"/>
           </a:xfrm>
           <a:prstGeom prst="roundRect">
             <a:avLst>
@@ -7203,7 +7292,7 @@
                 <a:ea typeface="Calibri" pitchFamily="34" charset="-122"/>
                 <a:cs typeface="Calibri" pitchFamily="34" charset="-120"/>
               </a:rPr>
-              <a:t>Subscriptions the wallet controls (DPP)</a:t>
+              <a:t>A full platform</a:t>
             </a:r>
             <a:endParaRPr lang="en-US" sz="1800" dirty="0"/>
           </a:p>
@@ -7218,7 +7307,7 @@
         <p:spPr>
           <a:xfrm>
             <a:off x="8402117" y="3474720"/>
-            <a:ext cx="2966618" cy="2148840"/>
+            <a:ext cx="2966618" cy="1600200"/>
           </a:xfrm>
           <a:prstGeom prst="rect">
             <a:avLst/>
@@ -7245,7 +7334,7 @@
                 <a:ea typeface="Calibri" pitchFamily="34" charset="-122"/>
                 <a:cs typeface="Calibri" pitchFamily="34" charset="-120"/>
               </a:rPr>
-              <a:t>A merchant registers with your wallet and proposes limits per payment, day, week and month. The wallet decides whether a payment runs automatically or asks you; the merchant cannot force it, and you cancel everything in one place. The opposite of a card on file.</a:t>
+              <a:t>Wallet login with on-chain identity, payment requests to the user's wallet and peer-to-peer messaging are part of the stack, with Kotlin and JavaScript libraries.</a:t>
             </a:r>
             <a:endParaRPr lang="en-US" sz="1500" dirty="0"/>
           </a:p>
@@ -7418,7 +7507,7 @@
                 <a:ea typeface="Calibri" pitchFamily="34" charset="-122"/>
                 <a:cs typeface="Calibri" pitchFamily="34" charset="-120"/>
               </a:rPr>
-              <a:t>Why this matters in Norway</a:t>
+              <a:t>Identity and payments live in the wallet, not on the merchant's server</a:t>
             </a:r>
             <a:endParaRPr lang="en-US" sz="3000" dirty="0"/>
           </a:p>
@@ -7433,7 +7522,7 @@
         <p:spPr>
           <a:xfrm>
             <a:off x="548640" y="1691640"/>
-            <a:ext cx="3515258" cy="3657600"/>
+            <a:ext cx="3515258" cy="4206240"/>
           </a:xfrm>
           <a:prstGeom prst="roundRect">
             <a:avLst>
@@ -7533,7 +7622,7 @@
                 <a:ea typeface="Calibri" pitchFamily="34" charset="-122"/>
                 <a:cs typeface="Calibri" pitchFamily="34" charset="-120"/>
               </a:rPr>
-              <a:t>A clean grid under pressure</a:t>
+              <a:t>Log in with the phone, no password (nexid)</a:t>
             </a:r>
             <a:endParaRPr lang="en-US" sz="1800" dirty="0"/>
           </a:p>
@@ -7548,7 +7637,7 @@
         <p:spPr>
           <a:xfrm>
             <a:off x="822960" y="3474720"/>
-            <a:ext cx="2966618" cy="1600200"/>
+            <a:ext cx="2966618" cy="2148840"/>
           </a:xfrm>
           <a:prstGeom prst="rect">
             <a:avLst/>
@@ -7575,7 +7664,7 @@
                 <a:ea typeface="Calibri" pitchFamily="34" charset="-122"/>
                 <a:cs typeface="Calibri" pitchFamily="34" charset="-120"/>
               </a:rPr>
-              <a:t>98% of Norway's electricity is hydro and wind, yet in 2025 the government froze new proof-of-work data centres to protect grid capacity. Nexa mining runs on ordinary GPUs and does not depend on data centres.</a:t>
+              <a:t>The site shows a challenge in a QR code, the phone signs it with a key derived per site, and the answer goes straight from the phone to the server. The key never leaves the phone, every site gets its own identity, and lookalike domains fail. The BankID experience without a bank.</a:t>
             </a:r>
             <a:endParaRPr lang="en-US" sz="1500" dirty="0"/>
           </a:p>
@@ -7590,7 +7679,7 @@
         <p:spPr>
           <a:xfrm>
             <a:off x="4338218" y="1691640"/>
-            <a:ext cx="3515258" cy="3657600"/>
+            <a:ext cx="3515258" cy="4206240"/>
           </a:xfrm>
           <a:prstGeom prst="roundRect">
             <a:avLst>
@@ -7623,11 +7712,11 @@
             <a:avLst/>
           </a:prstGeom>
           <a:solidFill>
-            <a:srgbClr val="F7931A"/>
+            <a:srgbClr val="F2CD3A"/>
           </a:solidFill>
           <a:ln w="12700">
             <a:solidFill>
-              <a:srgbClr val="F7931A"/>
+              <a:srgbClr val="F2CD3A"/>
             </a:solidFill>
             <a:prstDash val="solid"/>
           </a:ln>
@@ -7690,7 +7779,7 @@
                 <a:ea typeface="Calibri" pitchFamily="34" charset="-122"/>
                 <a:cs typeface="Calibri" pitchFamily="34" charset="-120"/>
               </a:rPr>
-              <a:t>Bitcoin ≈ Norway</a:t>
+              <a:t>Prove ownership without spending</a:t>
             </a:r>
             <a:endParaRPr lang="en-US" sz="1800" dirty="0"/>
           </a:p>
@@ -7705,7 +7794,7 @@
         <p:spPr>
           <a:xfrm>
             <a:off x="4612538" y="3474720"/>
-            <a:ext cx="2966618" cy="1600200"/>
+            <a:ext cx="2966618" cy="2148840"/>
           </a:xfrm>
           <a:prstGeom prst="rect">
             <a:avLst/>
@@ -7732,7 +7821,7 @@
                 <a:ea typeface="Calibri" pitchFamily="34" charset="-122"/>
                 <a:cs typeface="Calibri" pitchFamily="34" charset="-120"/>
               </a:rPr>
-              <a:t>Bitcoin's roughly 140 TWh a year equals Norway's entire electricity consumption, for 7 transactions per second. The same electricity on Nexa would carry thousands of times more payments.</a:t>
+              <a:t>Challenge transactions: you sign a deliberately invalid transaction that is never broadcast. That proves control of coins, NFTs or a multisig under any script, and it is what makes token-gated access possible.</a:t>
             </a:r>
             <a:endParaRPr lang="en-US" sz="1500" dirty="0"/>
           </a:p>
@@ -7747,7 +7836,7 @@
         <p:spPr>
           <a:xfrm>
             <a:off x="8127797" y="1691640"/>
-            <a:ext cx="3515258" cy="3657600"/>
+            <a:ext cx="3515258" cy="4206240"/>
           </a:xfrm>
           <a:prstGeom prst="roundRect">
             <a:avLst>
@@ -7847,7 +7936,7 @@
                 <a:ea typeface="Calibri" pitchFamily="34" charset="-122"/>
                 <a:cs typeface="Calibri" pitchFamily="34" charset="-120"/>
               </a:rPr>
-              <a:t>A cashless country</a:t>
+              <a:t>Subscriptions the wallet controls (DPP)</a:t>
             </a:r>
             <a:endParaRPr lang="en-US" sz="1800" dirty="0"/>
           </a:p>
@@ -7862,7 +7951,7 @@
         <p:spPr>
           <a:xfrm>
             <a:off x="8402117" y="3474720"/>
-            <a:ext cx="2966618" cy="1600200"/>
+            <a:ext cx="2966618" cy="2148840"/>
           </a:xfrm>
           <a:prstGeom prst="rect">
             <a:avLst/>
@@ -7889,7 +7978,7 @@
                 <a:ea typeface="Calibri" pitchFamily="34" charset="-122"/>
                 <a:cs typeface="Calibri" pitchFamily="34" charset="-120"/>
               </a:rPr>
-              <a:t>Norwegians already pay by phone in seconds. A sound-money rail that settles in two seconds for a fraction of an øre fits how people here already live.</a:t>
+              <a:t>A merchant registers with your wallet and proposes limits per payment, day, week and month. The wallet decides whether a payment runs automatically or asks you; the merchant cannot force it, and you cancel everything in one place. The opposite of a card on file.</a:t>
             </a:r>
             <a:endParaRPr lang="en-US" sz="1500" dirty="0"/>
           </a:p>
@@ -8062,6 +8151,650 @@
                 <a:ea typeface="Calibri" pitchFamily="34" charset="-122"/>
                 <a:cs typeface="Calibri" pitchFamily="34" charset="-120"/>
               </a:rPr>
+              <a:t>Why this matters in Norway</a:t>
+            </a:r>
+            <a:endParaRPr lang="en-US" sz="3000" dirty="0"/>
+          </a:p>
+        </p:txBody>
+      </p:sp>
+      <p:sp>
+        <p:nvSpPr>
+          <p:cNvPr id="3" name="Shape 1"/>
+          <p:cNvSpPr/>
+          <p:nvPr/>
+        </p:nvSpPr>
+        <p:spPr>
+          <a:xfrm>
+            <a:off x="548640" y="1691640"/>
+            <a:ext cx="3515258" cy="3657600"/>
+          </a:xfrm>
+          <a:prstGeom prst="roundRect">
+            <a:avLst>
+              <a:gd name="adj" fmla="val 3121"/>
+            </a:avLst>
+          </a:prstGeom>
+          <a:solidFill>
+            <a:srgbClr val="18181B"/>
+          </a:solidFill>
+          <a:ln w="9525">
+            <a:solidFill>
+              <a:srgbClr val="2E2E35"/>
+            </a:solidFill>
+            <a:prstDash val="solid"/>
+          </a:ln>
+        </p:spPr>
+      </p:sp>
+      <p:sp>
+        <p:nvSpPr>
+          <p:cNvPr id="4" name="Shape 2"/>
+          <p:cNvSpPr/>
+          <p:nvPr/>
+        </p:nvSpPr>
+        <p:spPr>
+          <a:xfrm>
+            <a:off x="822960" y="1965960"/>
+            <a:ext cx="640080" cy="640080"/>
+          </a:xfrm>
+          <a:prstGeom prst="ellipse">
+            <a:avLst/>
+          </a:prstGeom>
+          <a:solidFill>
+            <a:srgbClr val="F2CD3A"/>
+          </a:solidFill>
+          <a:ln w="12700">
+            <a:solidFill>
+              <a:srgbClr val="F2CD3A"/>
+            </a:solidFill>
+            <a:prstDash val="solid"/>
+          </a:ln>
+        </p:spPr>
+      </p:sp>
+      <p:pic>
+        <p:nvPicPr>
+          <p:cNvPr id="5" name="Image 0" descr="preencoded.png">    </p:cNvPr>
+          <p:cNvPicPr>
+            <a:picLocks noChangeAspect="1"/>
+          </p:cNvPicPr>
+          <p:nvPr/>
+        </p:nvPicPr>
+        <p:blipFill>
+          <a:blip r:embed="rId1"/>
+          <a:stretch>
+            <a:fillRect/>
+          </a:stretch>
+        </p:blipFill>
+        <p:spPr>
+          <a:xfrm>
+            <a:off x="976579" y="2119579"/>
+            <a:ext cx="332842" cy="332842"/>
+          </a:xfrm>
+          <a:prstGeom prst="rect">
+            <a:avLst/>
+          </a:prstGeom>
+        </p:spPr>
+      </p:pic>
+      <p:sp>
+        <p:nvSpPr>
+          <p:cNvPr id="6" name="Text 3"/>
+          <p:cNvSpPr txBox="1"/>
+          <p:nvPr/>
+        </p:nvSpPr>
+        <p:spPr>
+          <a:xfrm>
+            <a:off x="822960" y="2788920"/>
+            <a:ext cx="2966618" cy="640080"/>
+          </a:xfrm>
+          <a:prstGeom prst="rect">
+            <a:avLst/>
+          </a:prstGeom>
+          <a:noFill/>
+          <a:ln/>
+        </p:spPr>
+        <p:txBody>
+          <a:bodyPr wrap="square" lIns="0" tIns="0" rIns="0" bIns="0" rtlCol="0" anchor="t"/>
+          <a:lstStyle/>
+          <a:p>
+            <a:pPr indent="0" marL="0">
+              <a:buNone/>
+            </a:pPr>
+            <a:r>
+              <a:rPr lang="en-US" sz="1800" b="1" dirty="0">
+                <a:solidFill>
+                  <a:srgbClr val="FFFFFF"/>
+                </a:solidFill>
+                <a:latin typeface="Calibri" pitchFamily="34" charset="0"/>
+                <a:ea typeface="Calibri" pitchFamily="34" charset="-122"/>
+                <a:cs typeface="Calibri" pitchFamily="34" charset="-120"/>
+              </a:rPr>
+              <a:t>A clean grid under pressure</a:t>
+            </a:r>
+            <a:endParaRPr lang="en-US" sz="1800" dirty="0"/>
+          </a:p>
+        </p:txBody>
+      </p:sp>
+      <p:sp>
+        <p:nvSpPr>
+          <p:cNvPr id="7" name="Text 4"/>
+          <p:cNvSpPr txBox="1"/>
+          <p:nvPr/>
+        </p:nvSpPr>
+        <p:spPr>
+          <a:xfrm>
+            <a:off x="822960" y="3474720"/>
+            <a:ext cx="2966618" cy="1600200"/>
+          </a:xfrm>
+          <a:prstGeom prst="rect">
+            <a:avLst/>
+          </a:prstGeom>
+          <a:noFill/>
+          <a:ln/>
+        </p:spPr>
+        <p:txBody>
+          <a:bodyPr wrap="square" lIns="0" tIns="0" rIns="0" bIns="0" rtlCol="0" anchor="t"/>
+          <a:lstStyle/>
+          <a:p>
+            <a:pPr indent="0" marL="0">
+              <a:spcAft>
+                <a:spcPts val="600"/>
+              </a:spcAft>
+              <a:buNone/>
+            </a:pPr>
+            <a:r>
+              <a:rPr lang="en-US" sz="1500" dirty="0">
+                <a:solidFill>
+                  <a:srgbClr val="E4E4E7"/>
+                </a:solidFill>
+                <a:latin typeface="Calibri" pitchFamily="34" charset="0"/>
+                <a:ea typeface="Calibri" pitchFamily="34" charset="-122"/>
+                <a:cs typeface="Calibri" pitchFamily="34" charset="-120"/>
+              </a:rPr>
+              <a:t>98% of Norway's electricity is hydro and wind, yet in 2025 the government froze new proof-of-work data centres to protect grid capacity. Nexa mining runs on ordinary GPUs and does not depend on data centres.</a:t>
+            </a:r>
+            <a:endParaRPr lang="en-US" sz="1500" dirty="0"/>
+          </a:p>
+        </p:txBody>
+      </p:sp>
+      <p:sp>
+        <p:nvSpPr>
+          <p:cNvPr id="8" name="Shape 5"/>
+          <p:cNvSpPr/>
+          <p:nvPr/>
+        </p:nvSpPr>
+        <p:spPr>
+          <a:xfrm>
+            <a:off x="4338218" y="1691640"/>
+            <a:ext cx="3515258" cy="3657600"/>
+          </a:xfrm>
+          <a:prstGeom prst="roundRect">
+            <a:avLst>
+              <a:gd name="adj" fmla="val 3121"/>
+            </a:avLst>
+          </a:prstGeom>
+          <a:solidFill>
+            <a:srgbClr val="18181B"/>
+          </a:solidFill>
+          <a:ln w="9525">
+            <a:solidFill>
+              <a:srgbClr val="2E2E35"/>
+            </a:solidFill>
+            <a:prstDash val="solid"/>
+          </a:ln>
+        </p:spPr>
+      </p:sp>
+      <p:sp>
+        <p:nvSpPr>
+          <p:cNvPr id="9" name="Shape 6"/>
+          <p:cNvSpPr/>
+          <p:nvPr/>
+        </p:nvSpPr>
+        <p:spPr>
+          <a:xfrm>
+            <a:off x="4612538" y="1965960"/>
+            <a:ext cx="640080" cy="640080"/>
+          </a:xfrm>
+          <a:prstGeom prst="ellipse">
+            <a:avLst/>
+          </a:prstGeom>
+          <a:solidFill>
+            <a:srgbClr val="F7931A"/>
+          </a:solidFill>
+          <a:ln w="12700">
+            <a:solidFill>
+              <a:srgbClr val="F7931A"/>
+            </a:solidFill>
+            <a:prstDash val="solid"/>
+          </a:ln>
+        </p:spPr>
+      </p:sp>
+      <p:pic>
+        <p:nvPicPr>
+          <p:cNvPr id="10" name="Image 1" descr="preencoded.png">    </p:cNvPr>
+          <p:cNvPicPr>
+            <a:picLocks noChangeAspect="1"/>
+          </p:cNvPicPr>
+          <p:nvPr/>
+        </p:nvPicPr>
+        <p:blipFill>
+          <a:blip r:embed="rId2"/>
+          <a:stretch>
+            <a:fillRect/>
+          </a:stretch>
+        </p:blipFill>
+        <p:spPr>
+          <a:xfrm>
+            <a:off x="4766158" y="2119579"/>
+            <a:ext cx="332842" cy="332842"/>
+          </a:xfrm>
+          <a:prstGeom prst="rect">
+            <a:avLst/>
+          </a:prstGeom>
+        </p:spPr>
+      </p:pic>
+      <p:sp>
+        <p:nvSpPr>
+          <p:cNvPr id="11" name="Text 7"/>
+          <p:cNvSpPr txBox="1"/>
+          <p:nvPr/>
+        </p:nvSpPr>
+        <p:spPr>
+          <a:xfrm>
+            <a:off x="4612538" y="2788920"/>
+            <a:ext cx="2966618" cy="640080"/>
+          </a:xfrm>
+          <a:prstGeom prst="rect">
+            <a:avLst/>
+          </a:prstGeom>
+          <a:noFill/>
+          <a:ln/>
+        </p:spPr>
+        <p:txBody>
+          <a:bodyPr wrap="square" lIns="0" tIns="0" rIns="0" bIns="0" rtlCol="0" anchor="t"/>
+          <a:lstStyle/>
+          <a:p>
+            <a:pPr indent="0" marL="0">
+              <a:buNone/>
+            </a:pPr>
+            <a:r>
+              <a:rPr lang="en-US" sz="1800" b="1" dirty="0">
+                <a:solidFill>
+                  <a:srgbClr val="FFFFFF"/>
+                </a:solidFill>
+                <a:latin typeface="Calibri" pitchFamily="34" charset="0"/>
+                <a:ea typeface="Calibri" pitchFamily="34" charset="-122"/>
+                <a:cs typeface="Calibri" pitchFamily="34" charset="-120"/>
+              </a:rPr>
+              <a:t>Bitcoin ≈ Norway</a:t>
+            </a:r>
+            <a:endParaRPr lang="en-US" sz="1800" dirty="0"/>
+          </a:p>
+        </p:txBody>
+      </p:sp>
+      <p:sp>
+        <p:nvSpPr>
+          <p:cNvPr id="12" name="Text 8"/>
+          <p:cNvSpPr txBox="1"/>
+          <p:nvPr/>
+        </p:nvSpPr>
+        <p:spPr>
+          <a:xfrm>
+            <a:off x="4612538" y="3474720"/>
+            <a:ext cx="2966618" cy="1600200"/>
+          </a:xfrm>
+          <a:prstGeom prst="rect">
+            <a:avLst/>
+          </a:prstGeom>
+          <a:noFill/>
+          <a:ln/>
+        </p:spPr>
+        <p:txBody>
+          <a:bodyPr wrap="square" lIns="0" tIns="0" rIns="0" bIns="0" rtlCol="0" anchor="t"/>
+          <a:lstStyle/>
+          <a:p>
+            <a:pPr indent="0" marL="0">
+              <a:spcAft>
+                <a:spcPts val="600"/>
+              </a:spcAft>
+              <a:buNone/>
+            </a:pPr>
+            <a:r>
+              <a:rPr lang="en-US" sz="1500" dirty="0">
+                <a:solidFill>
+                  <a:srgbClr val="E4E4E7"/>
+                </a:solidFill>
+                <a:latin typeface="Calibri" pitchFamily="34" charset="0"/>
+                <a:ea typeface="Calibri" pitchFamily="34" charset="-122"/>
+                <a:cs typeface="Calibri" pitchFamily="34" charset="-120"/>
+              </a:rPr>
+              <a:t>Bitcoin's roughly 140 TWh a year equals Norway's entire electricity consumption, for 7 transactions per second. The same electricity on Nexa would carry thousands of times more payments.</a:t>
+            </a:r>
+            <a:endParaRPr lang="en-US" sz="1500" dirty="0"/>
+          </a:p>
+        </p:txBody>
+      </p:sp>
+      <p:sp>
+        <p:nvSpPr>
+          <p:cNvPr id="13" name="Shape 9"/>
+          <p:cNvSpPr/>
+          <p:nvPr/>
+        </p:nvSpPr>
+        <p:spPr>
+          <a:xfrm>
+            <a:off x="8127797" y="1691640"/>
+            <a:ext cx="3515258" cy="3657600"/>
+          </a:xfrm>
+          <a:prstGeom prst="roundRect">
+            <a:avLst>
+              <a:gd name="adj" fmla="val 3121"/>
+            </a:avLst>
+          </a:prstGeom>
+          <a:solidFill>
+            <a:srgbClr val="18181B"/>
+          </a:solidFill>
+          <a:ln w="9525">
+            <a:solidFill>
+              <a:srgbClr val="2E2E35"/>
+            </a:solidFill>
+            <a:prstDash val="solid"/>
+          </a:ln>
+        </p:spPr>
+      </p:sp>
+      <p:sp>
+        <p:nvSpPr>
+          <p:cNvPr id="14" name="Shape 10"/>
+          <p:cNvSpPr/>
+          <p:nvPr/>
+        </p:nvSpPr>
+        <p:spPr>
+          <a:xfrm>
+            <a:off x="8402117" y="1965960"/>
+            <a:ext cx="640080" cy="640080"/>
+          </a:xfrm>
+          <a:prstGeom prst="ellipse">
+            <a:avLst/>
+          </a:prstGeom>
+          <a:solidFill>
+            <a:srgbClr val="F2CD3A"/>
+          </a:solidFill>
+          <a:ln w="12700">
+            <a:solidFill>
+              <a:srgbClr val="F2CD3A"/>
+            </a:solidFill>
+            <a:prstDash val="solid"/>
+          </a:ln>
+        </p:spPr>
+      </p:sp>
+      <p:pic>
+        <p:nvPicPr>
+          <p:cNvPr id="15" name="Image 2" descr="preencoded.png">    </p:cNvPr>
+          <p:cNvPicPr>
+            <a:picLocks noChangeAspect="1"/>
+          </p:cNvPicPr>
+          <p:nvPr/>
+        </p:nvPicPr>
+        <p:blipFill>
+          <a:blip r:embed="rId3"/>
+          <a:stretch>
+            <a:fillRect/>
+          </a:stretch>
+        </p:blipFill>
+        <p:spPr>
+          <a:xfrm>
+            <a:off x="8555736" y="2119579"/>
+            <a:ext cx="332842" cy="332842"/>
+          </a:xfrm>
+          <a:prstGeom prst="rect">
+            <a:avLst/>
+          </a:prstGeom>
+        </p:spPr>
+      </p:pic>
+      <p:sp>
+        <p:nvSpPr>
+          <p:cNvPr id="16" name="Text 11"/>
+          <p:cNvSpPr txBox="1"/>
+          <p:nvPr/>
+        </p:nvSpPr>
+        <p:spPr>
+          <a:xfrm>
+            <a:off x="8402117" y="2788920"/>
+            <a:ext cx="2966618" cy="640080"/>
+          </a:xfrm>
+          <a:prstGeom prst="rect">
+            <a:avLst/>
+          </a:prstGeom>
+          <a:noFill/>
+          <a:ln/>
+        </p:spPr>
+        <p:txBody>
+          <a:bodyPr wrap="square" lIns="0" tIns="0" rIns="0" bIns="0" rtlCol="0" anchor="t"/>
+          <a:lstStyle/>
+          <a:p>
+            <a:pPr indent="0" marL="0">
+              <a:buNone/>
+            </a:pPr>
+            <a:r>
+              <a:rPr lang="en-US" sz="1800" b="1" dirty="0">
+                <a:solidFill>
+                  <a:srgbClr val="FFFFFF"/>
+                </a:solidFill>
+                <a:latin typeface="Calibri" pitchFamily="34" charset="0"/>
+                <a:ea typeface="Calibri" pitchFamily="34" charset="-122"/>
+                <a:cs typeface="Calibri" pitchFamily="34" charset="-120"/>
+              </a:rPr>
+              <a:t>A cashless country</a:t>
+            </a:r>
+            <a:endParaRPr lang="en-US" sz="1800" dirty="0"/>
+          </a:p>
+        </p:txBody>
+      </p:sp>
+      <p:sp>
+        <p:nvSpPr>
+          <p:cNvPr id="17" name="Text 12"/>
+          <p:cNvSpPr txBox="1"/>
+          <p:nvPr/>
+        </p:nvSpPr>
+        <p:spPr>
+          <a:xfrm>
+            <a:off x="8402117" y="3474720"/>
+            <a:ext cx="2966618" cy="1600200"/>
+          </a:xfrm>
+          <a:prstGeom prst="rect">
+            <a:avLst/>
+          </a:prstGeom>
+          <a:noFill/>
+          <a:ln/>
+        </p:spPr>
+        <p:txBody>
+          <a:bodyPr wrap="square" lIns="0" tIns="0" rIns="0" bIns="0" rtlCol="0" anchor="t"/>
+          <a:lstStyle/>
+          <a:p>
+            <a:pPr indent="0" marL="0">
+              <a:spcAft>
+                <a:spcPts val="600"/>
+              </a:spcAft>
+              <a:buNone/>
+            </a:pPr>
+            <a:r>
+              <a:rPr lang="en-US" sz="1500" dirty="0">
+                <a:solidFill>
+                  <a:srgbClr val="E4E4E7"/>
+                </a:solidFill>
+                <a:latin typeface="Calibri" pitchFamily="34" charset="0"/>
+                <a:ea typeface="Calibri" pitchFamily="34" charset="-122"/>
+                <a:cs typeface="Calibri" pitchFamily="34" charset="-120"/>
+              </a:rPr>
+              <a:t>Norwegians already pay by phone in seconds. A sound-money rail that settles in two seconds for a fraction of an øre fits how people here already live.</a:t>
+            </a:r>
+            <a:endParaRPr lang="en-US" sz="1500" dirty="0"/>
+          </a:p>
+        </p:txBody>
+      </p:sp>
+      <p:pic>
+        <p:nvPicPr>
+          <p:cNvPr id="19" name="Image 3" descr="preencoded.png">    </p:cNvPr>
+          <p:cNvPicPr>
+            <a:picLocks noChangeAspect="1"/>
+          </p:cNvPicPr>
+          <p:nvPr/>
+        </p:nvPicPr>
+        <p:blipFill>
+          <a:blip r:embed="rId4"/>
+          <a:stretch>
+            <a:fillRect/>
+          </a:stretch>
+        </p:blipFill>
+        <p:spPr>
+          <a:xfrm>
+            <a:off x="548640" y="6355080"/>
+            <a:ext cx="256032" cy="246888"/>
+          </a:xfrm>
+          <a:prstGeom prst="rect">
+            <a:avLst/>
+          </a:prstGeom>
+        </p:spPr>
+      </p:pic>
+      <p:sp>
+        <p:nvSpPr>
+          <p:cNvPr id="20" name="Text 13"/>
+          <p:cNvSpPr txBox="1"/>
+          <p:nvPr/>
+        </p:nvSpPr>
+        <p:spPr>
+          <a:xfrm>
+            <a:off x="877824" y="6400800"/>
+            <a:ext cx="2743200" cy="274320"/>
+          </a:xfrm>
+          <a:prstGeom prst="rect">
+            <a:avLst/>
+          </a:prstGeom>
+          <a:noFill/>
+          <a:ln/>
+        </p:spPr>
+        <p:txBody>
+          <a:bodyPr wrap="square" lIns="0" tIns="0" rIns="0" bIns="0" rtlCol="0" anchor="ctr"/>
+          <a:lstStyle/>
+          <a:p>
+            <a:pPr algn="l" indent="0" marL="0">
+              <a:buNone/>
+            </a:pPr>
+            <a:r>
+              <a:rPr lang="en-US" sz="1000" dirty="0">
+                <a:solidFill>
+                  <a:srgbClr val="A1A1AA"/>
+                </a:solidFill>
+                <a:latin typeface="Calibri" pitchFamily="34" charset="0"/>
+                <a:ea typeface="Calibri" pitchFamily="34" charset="-122"/>
+                <a:cs typeface="Calibri" pitchFamily="34" charset="-120"/>
+              </a:rPr>
+              <a:t>Nexa · 2026</a:t>
+            </a:r>
+            <a:endParaRPr lang="en-US" sz="1000" dirty="0"/>
+          </a:p>
+        </p:txBody>
+      </p:sp>
+      <p:sp>
+        <p:nvSpPr>
+          <p:cNvPr id="21" name="Text 14"/>
+          <p:cNvSpPr txBox="1"/>
+          <p:nvPr/>
+        </p:nvSpPr>
+        <p:spPr>
+          <a:xfrm>
+            <a:off x="11094415" y="6400800"/>
+            <a:ext cx="548640" cy="274320"/>
+          </a:xfrm>
+          <a:prstGeom prst="rect">
+            <a:avLst/>
+          </a:prstGeom>
+          <a:noFill/>
+          <a:ln/>
+        </p:spPr>
+        <p:txBody>
+          <a:bodyPr wrap="square" lIns="0" tIns="0" rIns="0" bIns="0" rtlCol="0" anchor="ctr"/>
+          <a:lstStyle/>
+          <a:p>
+            <a:pPr algn="r" indent="0" marL="0">
+              <a:buNone/>
+            </a:pPr>
+            <a:r>
+              <a:rPr lang="en-US" sz="1000" dirty="0">
+                <a:solidFill>
+                  <a:srgbClr val="A1A1AA"/>
+                </a:solidFill>
+                <a:latin typeface="Calibri" pitchFamily="34" charset="0"/>
+                <a:ea typeface="Calibri" pitchFamily="34" charset="-122"/>
+                <a:cs typeface="Calibri" pitchFamily="34" charset="-120"/>
+              </a:rPr>
+              <a:t>18</a:t>
+            </a:r>
+            <a:endParaRPr lang="en-US" sz="1000" dirty="0"/>
+          </a:p>
+        </p:txBody>
+      </p:sp>
+    </p:spTree>
+  </p:cSld>
+  <p:clrMapOvr>
+    <a:masterClrMapping/>
+  </p:clrMapOvr>
+</p:sld>
+</file>
+
+<file path=ppt/slides/slide19.xml><?xml version="1.0" encoding="utf-8"?>
+<p:sld xmlns:a="http://schemas.openxmlformats.org/drawingml/2006/main" xmlns:r="http://schemas.openxmlformats.org/officeDocument/2006/relationships" xmlns:p="http://schemas.openxmlformats.org/presentationml/2006/main">
+  <p:cSld name="Slide 19">
+    <p:bg>
+      <p:bgPr>
+        <a:solidFill>
+          <a:srgbClr val="0A0A0F"/>
+        </a:solidFill>
+      </p:bgPr>
+    </p:bg>
+    <p:spTree>
+      <p:nvGrpSpPr>
+        <p:cNvPr id="1" name=""/>
+        <p:cNvGrpSpPr/>
+        <p:nvPr/>
+      </p:nvGrpSpPr>
+      <p:grpSpPr>
+        <a:xfrm>
+          <a:off x="0" y="0"/>
+          <a:ext cx="0" cy="0"/>
+          <a:chOff x="0" y="0"/>
+          <a:chExt cx="0" cy="0"/>
+        </a:xfrm>
+      </p:grpSpPr>
+      <p:sp>
+        <p:nvSpPr>
+          <p:cNvPr id="2" name="Text 0"/>
+          <p:cNvSpPr txBox="1"/>
+          <p:nvPr/>
+        </p:nvSpPr>
+        <p:spPr>
+          <a:xfrm>
+            <a:off x="548640" y="411480"/>
+            <a:ext cx="11094415" cy="1005840"/>
+          </a:xfrm>
+          <a:prstGeom prst="rect">
+            <a:avLst/>
+          </a:prstGeom>
+          <a:noFill/>
+          <a:ln/>
+        </p:spPr>
+        <p:txBody>
+          <a:bodyPr wrap="square" lIns="0" tIns="0" rIns="0" bIns="0" rtlCol="0" anchor="t"/>
+          <a:lstStyle/>
+          <a:p>
+            <a:pPr algn="l" indent="0" marL="0">
+              <a:buNone/>
+            </a:pPr>
+            <a:r>
+              <a:rPr lang="en-US" sz="3000" b="1" dirty="0">
+                <a:solidFill>
+                  <a:srgbClr val="FFFFFF"/>
+                </a:solidFill>
+                <a:latin typeface="Calibri" pitchFamily="34" charset="0"/>
+                <a:ea typeface="Calibri" pitchFamily="34" charset="-122"/>
+                <a:cs typeface="Calibri" pitchFamily="34" charset="-120"/>
+              </a:rPr>
               <a:t>Comparison overview</a:t>
             </a:r>
             <a:endParaRPr lang="en-US" sz="3000" dirty="0"/>
@@ -8070,7 +8803,7 @@
       </p:sp>
       <p:graphicFrame>
         <p:nvGraphicFramePr>
-          <p:cNvPr id="19" name="Table 0"/>
+          <p:cNvPr id="20" name="Table 0"/>
           <p:cNvGraphicFramePr>
             <a:graphicFrameLocks noGrp="1"/>
           </p:cNvGraphicFramePr>
@@ -9566,680 +10299,6 @@
                 <a:ea typeface="Calibri" pitchFamily="34" charset="-122"/>
                 <a:cs typeface="Calibri" pitchFamily="34" charset="-120"/>
               </a:rPr>
-              <a:t>18</a:t>
-            </a:r>
-            <a:endParaRPr lang="en-US" sz="1000" dirty="0"/>
-          </a:p>
-        </p:txBody>
-      </p:sp>
-    </p:spTree>
-  </p:cSld>
-  <p:clrMapOvr>
-    <a:masterClrMapping/>
-  </p:clrMapOvr>
-</p:sld>
-</file>
-
-<file path=ppt/slides/slide19.xml><?xml version="1.0" encoding="utf-8"?>
-<p:sld xmlns:a="http://schemas.openxmlformats.org/drawingml/2006/main" xmlns:r="http://schemas.openxmlformats.org/officeDocument/2006/relationships" xmlns:p="http://schemas.openxmlformats.org/presentationml/2006/main">
-  <p:cSld name="Slide 19">
-    <p:bg>
-      <p:bgPr>
-        <a:solidFill>
-          <a:srgbClr val="0A0A0F"/>
-        </a:solidFill>
-      </p:bgPr>
-    </p:bg>
-    <p:spTree>
-      <p:nvGrpSpPr>
-        <p:cNvPr id="1" name=""/>
-        <p:cNvGrpSpPr/>
-        <p:nvPr/>
-      </p:nvGrpSpPr>
-      <p:grpSpPr>
-        <a:xfrm>
-          <a:off x="0" y="0"/>
-          <a:ext cx="0" cy="0"/>
-          <a:chOff x="0" y="0"/>
-          <a:chExt cx="0" cy="0"/>
-        </a:xfrm>
-      </p:grpSpPr>
-      <p:sp>
-        <p:nvSpPr>
-          <p:cNvPr id="2" name="Text 0"/>
-          <p:cNvSpPr txBox="1"/>
-          <p:nvPr/>
-        </p:nvSpPr>
-        <p:spPr>
-          <a:xfrm>
-            <a:off x="548640" y="411480"/>
-            <a:ext cx="11094415" cy="1005840"/>
-          </a:xfrm>
-          <a:prstGeom prst="rect">
-            <a:avLst/>
-          </a:prstGeom>
-          <a:noFill/>
-          <a:ln/>
-        </p:spPr>
-        <p:txBody>
-          <a:bodyPr wrap="square" lIns="0" tIns="0" rIns="0" bIns="0" rtlCol="0" anchor="t"/>
-          <a:lstStyle/>
-          <a:p>
-            <a:pPr algn="l" indent="0" marL="0">
-              <a:buNone/>
-            </a:pPr>
-            <a:r>
-              <a:rPr lang="en-US" sz="3000" b="1" dirty="0">
-                <a:solidFill>
-                  <a:srgbClr val="FFFFFF"/>
-                </a:solidFill>
-                <a:latin typeface="Calibri" pitchFamily="34" charset="0"/>
-                <a:ea typeface="Calibri" pitchFamily="34" charset="-122"/>
-                <a:cs typeface="Calibri" pitchFamily="34" charset="-120"/>
-              </a:rPr>
-              <a:t>Three things to remember</a:t>
-            </a:r>
-            <a:endParaRPr lang="en-US" sz="3000" dirty="0"/>
-          </a:p>
-        </p:txBody>
-      </p:sp>
-      <p:sp>
-        <p:nvSpPr>
-          <p:cNvPr id="3" name="Shape 1"/>
-          <p:cNvSpPr/>
-          <p:nvPr/>
-        </p:nvSpPr>
-        <p:spPr>
-          <a:xfrm>
-            <a:off x="548640" y="1691640"/>
-            <a:ext cx="3515258" cy="3566160"/>
-          </a:xfrm>
-          <a:prstGeom prst="roundRect">
-            <a:avLst>
-              <a:gd name="adj" fmla="val 3121"/>
-            </a:avLst>
-          </a:prstGeom>
-          <a:solidFill>
-            <a:srgbClr val="18181B"/>
-          </a:solidFill>
-          <a:ln w="9525">
-            <a:solidFill>
-              <a:srgbClr val="2E2E35"/>
-            </a:solidFill>
-            <a:prstDash val="solid"/>
-          </a:ln>
-        </p:spPr>
-      </p:sp>
-      <p:sp>
-        <p:nvSpPr>
-          <p:cNvPr id="4" name="Shape 2"/>
-          <p:cNvSpPr/>
-          <p:nvPr/>
-        </p:nvSpPr>
-        <p:spPr>
-          <a:xfrm>
-            <a:off x="822960" y="1965960"/>
-            <a:ext cx="640080" cy="640080"/>
-          </a:xfrm>
-          <a:prstGeom prst="ellipse">
-            <a:avLst/>
-          </a:prstGeom>
-          <a:solidFill>
-            <a:srgbClr val="F2CD3A"/>
-          </a:solidFill>
-          <a:ln w="12700">
-            <a:solidFill>
-              <a:srgbClr val="F2CD3A"/>
-            </a:solidFill>
-            <a:prstDash val="solid"/>
-          </a:ln>
-        </p:spPr>
-      </p:sp>
-      <p:pic>
-        <p:nvPicPr>
-          <p:cNvPr id="5" name="Image 0" descr="preencoded.png">    </p:cNvPr>
-          <p:cNvPicPr>
-            <a:picLocks noChangeAspect="1"/>
-          </p:cNvPicPr>
-          <p:nvPr/>
-        </p:nvPicPr>
-        <p:blipFill>
-          <a:blip r:embed="rId1"/>
-          <a:stretch>
-            <a:fillRect/>
-          </a:stretch>
-        </p:blipFill>
-        <p:spPr>
-          <a:xfrm>
-            <a:off x="976579" y="2119579"/>
-            <a:ext cx="332842" cy="332842"/>
-          </a:xfrm>
-          <a:prstGeom prst="rect">
-            <a:avLst/>
-          </a:prstGeom>
-        </p:spPr>
-      </p:pic>
-      <p:sp>
-        <p:nvSpPr>
-          <p:cNvPr id="6" name="Text 3"/>
-          <p:cNvSpPr txBox="1"/>
-          <p:nvPr/>
-        </p:nvSpPr>
-        <p:spPr>
-          <a:xfrm>
-            <a:off x="822960" y="2788920"/>
-            <a:ext cx="2966618" cy="457200"/>
-          </a:xfrm>
-          <a:prstGeom prst="rect">
-            <a:avLst/>
-          </a:prstGeom>
-          <a:noFill/>
-          <a:ln/>
-        </p:spPr>
-        <p:txBody>
-          <a:bodyPr wrap="square" lIns="0" tIns="0" rIns="0" bIns="0" rtlCol="0" anchor="t"/>
-          <a:lstStyle/>
-          <a:p>
-            <a:pPr indent="0" marL="0">
-              <a:buNone/>
-            </a:pPr>
-            <a:r>
-              <a:rPr lang="en-US" sz="2000" b="1" dirty="0">
-                <a:solidFill>
-                  <a:srgbClr val="F2CD3A"/>
-                </a:solidFill>
-                <a:latin typeface="Calibri" pitchFamily="34" charset="0"/>
-                <a:ea typeface="Calibri" pitchFamily="34" charset="-122"/>
-                <a:cs typeface="Calibri" pitchFamily="34" charset="-120"/>
-              </a:rPr>
-              <a:t>Energy</a:t>
-            </a:r>
-            <a:endParaRPr lang="en-US" sz="2000" dirty="0"/>
-          </a:p>
-        </p:txBody>
-      </p:sp>
-      <p:sp>
-        <p:nvSpPr>
-          <p:cNvPr id="7" name="Text 4"/>
-          <p:cNvSpPr txBox="1"/>
-          <p:nvPr/>
-        </p:nvSpPr>
-        <p:spPr>
-          <a:xfrm>
-            <a:off x="822960" y="3337560"/>
-            <a:ext cx="2966618" cy="1645920"/>
-          </a:xfrm>
-          <a:prstGeom prst="rect">
-            <a:avLst/>
-          </a:prstGeom>
-          <a:noFill/>
-          <a:ln/>
-        </p:spPr>
-        <p:txBody>
-          <a:bodyPr wrap="square" lIns="0" tIns="0" rIns="0" bIns="0" rtlCol="0" anchor="t"/>
-          <a:lstStyle/>
-          <a:p>
-            <a:pPr indent="0" marL="0">
-              <a:buNone/>
-            </a:pPr>
-            <a:r>
-              <a:rPr lang="en-US" sz="1500" dirty="0">
-                <a:solidFill>
-                  <a:srgbClr val="E4E4E7"/>
-                </a:solidFill>
-                <a:latin typeface="Calibri" pitchFamily="34" charset="0"/>
-                <a:ea typeface="Calibri" pitchFamily="34" charset="-122"/>
-                <a:cs typeface="Calibri" pitchFamily="34" charset="-120"/>
-              </a:rPr>
-              <a:t>Proof of work costs what miners are paid, on any chain. At scale, Nexa gets up to 13,000× more transactions out of every kilowatt-hour than Bitcoin, on reusable GPUs, not throw-away ASICs.</a:t>
-            </a:r>
-            <a:endParaRPr lang="en-US" sz="1500" dirty="0"/>
-          </a:p>
-        </p:txBody>
-      </p:sp>
-      <p:sp>
-        <p:nvSpPr>
-          <p:cNvPr id="8" name="Shape 5"/>
-          <p:cNvSpPr/>
-          <p:nvPr/>
-        </p:nvSpPr>
-        <p:spPr>
-          <a:xfrm>
-            <a:off x="4338218" y="1691640"/>
-            <a:ext cx="3515258" cy="3566160"/>
-          </a:xfrm>
-          <a:prstGeom prst="roundRect">
-            <a:avLst>
-              <a:gd name="adj" fmla="val 3121"/>
-            </a:avLst>
-          </a:prstGeom>
-          <a:solidFill>
-            <a:srgbClr val="18181B"/>
-          </a:solidFill>
-          <a:ln w="9525">
-            <a:solidFill>
-              <a:srgbClr val="2E2E35"/>
-            </a:solidFill>
-            <a:prstDash val="solid"/>
-          </a:ln>
-        </p:spPr>
-      </p:sp>
-      <p:sp>
-        <p:nvSpPr>
-          <p:cNvPr id="9" name="Shape 6"/>
-          <p:cNvSpPr/>
-          <p:nvPr/>
-        </p:nvSpPr>
-        <p:spPr>
-          <a:xfrm>
-            <a:off x="4612538" y="1965960"/>
-            <a:ext cx="640080" cy="640080"/>
-          </a:xfrm>
-          <a:prstGeom prst="ellipse">
-            <a:avLst/>
-          </a:prstGeom>
-          <a:solidFill>
-            <a:srgbClr val="F2CD3A"/>
-          </a:solidFill>
-          <a:ln w="12700">
-            <a:solidFill>
-              <a:srgbClr val="F2CD3A"/>
-            </a:solidFill>
-            <a:prstDash val="solid"/>
-          </a:ln>
-        </p:spPr>
-      </p:sp>
-      <p:pic>
-        <p:nvPicPr>
-          <p:cNvPr id="10" name="Image 1" descr="preencoded.png">    </p:cNvPr>
-          <p:cNvPicPr>
-            <a:picLocks noChangeAspect="1"/>
-          </p:cNvPicPr>
-          <p:nvPr/>
-        </p:nvPicPr>
-        <p:blipFill>
-          <a:blip r:embed="rId2"/>
-          <a:stretch>
-            <a:fillRect/>
-          </a:stretch>
-        </p:blipFill>
-        <p:spPr>
-          <a:xfrm>
-            <a:off x="4766158" y="2119579"/>
-            <a:ext cx="332842" cy="332842"/>
-          </a:xfrm>
-          <a:prstGeom prst="rect">
-            <a:avLst/>
-          </a:prstGeom>
-        </p:spPr>
-      </p:pic>
-      <p:sp>
-        <p:nvSpPr>
-          <p:cNvPr id="11" name="Text 7"/>
-          <p:cNvSpPr txBox="1"/>
-          <p:nvPr/>
-        </p:nvSpPr>
-        <p:spPr>
-          <a:xfrm>
-            <a:off x="4612538" y="2788920"/>
-            <a:ext cx="2966618" cy="457200"/>
-          </a:xfrm>
-          <a:prstGeom prst="rect">
-            <a:avLst/>
-          </a:prstGeom>
-          <a:noFill/>
-          <a:ln/>
-        </p:spPr>
-        <p:txBody>
-          <a:bodyPr wrap="square" lIns="0" tIns="0" rIns="0" bIns="0" rtlCol="0" anchor="t"/>
-          <a:lstStyle/>
-          <a:p>
-            <a:pPr indent="0" marL="0">
-              <a:buNone/>
-            </a:pPr>
-            <a:r>
-              <a:rPr lang="en-US" sz="2000" b="1" dirty="0">
-                <a:solidFill>
-                  <a:srgbClr val="F2CD3A"/>
-                </a:solidFill>
-                <a:latin typeface="Calibri" pitchFamily="34" charset="0"/>
-                <a:ea typeface="Calibri" pitchFamily="34" charset="-122"/>
-                <a:cs typeface="Calibri" pitchFamily="34" charset="-120"/>
-              </a:rPr>
-              <a:t>Fairness</a:t>
-            </a:r>
-            <a:endParaRPr lang="en-US" sz="2000" dirty="0"/>
-          </a:p>
-        </p:txBody>
-      </p:sp>
-      <p:sp>
-        <p:nvSpPr>
-          <p:cNvPr id="12" name="Text 8"/>
-          <p:cNvSpPr txBox="1"/>
-          <p:nvPr/>
-        </p:nvSpPr>
-        <p:spPr>
-          <a:xfrm>
-            <a:off x="4612538" y="3337560"/>
-            <a:ext cx="2966618" cy="1645920"/>
-          </a:xfrm>
-          <a:prstGeom prst="rect">
-            <a:avLst/>
-          </a:prstGeom>
-          <a:noFill/>
-          <a:ln/>
-        </p:spPr>
-        <p:txBody>
-          <a:bodyPr wrap="square" lIns="0" tIns="0" rIns="0" bIns="0" rtlCol="0" anchor="t"/>
-          <a:lstStyle/>
-          <a:p>
-            <a:pPr indent="0" marL="0">
-              <a:buNone/>
-            </a:pPr>
-            <a:r>
-              <a:rPr lang="en-US" sz="1500" dirty="0">
-                <a:solidFill>
-                  <a:srgbClr val="E4E4E7"/>
-                </a:solidFill>
-                <a:latin typeface="Calibri" pitchFamily="34" charset="0"/>
-                <a:ea typeface="Calibri" pitchFamily="34" charset="-122"/>
-                <a:cs typeface="Calibri" pitchFamily="34" charset="-120"/>
-              </a:rPr>
-              <a:t>No premine, no ICO, no venture capital. 100% of the supply mined in public since 2022, open to anyone with a graphics card.</a:t>
-            </a:r>
-            <a:endParaRPr lang="en-US" sz="1500" dirty="0"/>
-          </a:p>
-        </p:txBody>
-      </p:sp>
-      <p:sp>
-        <p:nvSpPr>
-          <p:cNvPr id="13" name="Shape 9"/>
-          <p:cNvSpPr/>
-          <p:nvPr/>
-        </p:nvSpPr>
-        <p:spPr>
-          <a:xfrm>
-            <a:off x="8127797" y="1691640"/>
-            <a:ext cx="3515258" cy="3566160"/>
-          </a:xfrm>
-          <a:prstGeom prst="roundRect">
-            <a:avLst>
-              <a:gd name="adj" fmla="val 3121"/>
-            </a:avLst>
-          </a:prstGeom>
-          <a:solidFill>
-            <a:srgbClr val="18181B"/>
-          </a:solidFill>
-          <a:ln w="9525">
-            <a:solidFill>
-              <a:srgbClr val="2E2E35"/>
-            </a:solidFill>
-            <a:prstDash val="solid"/>
-          </a:ln>
-        </p:spPr>
-      </p:sp>
-      <p:sp>
-        <p:nvSpPr>
-          <p:cNvPr id="14" name="Shape 10"/>
-          <p:cNvSpPr/>
-          <p:nvPr/>
-        </p:nvSpPr>
-        <p:spPr>
-          <a:xfrm>
-            <a:off x="8402117" y="1965960"/>
-            <a:ext cx="640080" cy="640080"/>
-          </a:xfrm>
-          <a:prstGeom prst="ellipse">
-            <a:avLst/>
-          </a:prstGeom>
-          <a:solidFill>
-            <a:srgbClr val="F2CD3A"/>
-          </a:solidFill>
-          <a:ln w="12700">
-            <a:solidFill>
-              <a:srgbClr val="F2CD3A"/>
-            </a:solidFill>
-            <a:prstDash val="solid"/>
-          </a:ln>
-        </p:spPr>
-      </p:sp>
-      <p:pic>
-        <p:nvPicPr>
-          <p:cNvPr id="15" name="Image 2" descr="preencoded.png">    </p:cNvPr>
-          <p:cNvPicPr>
-            <a:picLocks noChangeAspect="1"/>
-          </p:cNvPicPr>
-          <p:nvPr/>
-        </p:nvPicPr>
-        <p:blipFill>
-          <a:blip r:embed="rId3"/>
-          <a:stretch>
-            <a:fillRect/>
-          </a:stretch>
-        </p:blipFill>
-        <p:spPr>
-          <a:xfrm>
-            <a:off x="8555736" y="2119579"/>
-            <a:ext cx="332842" cy="332842"/>
-          </a:xfrm>
-          <a:prstGeom prst="rect">
-            <a:avLst/>
-          </a:prstGeom>
-        </p:spPr>
-      </p:pic>
-      <p:sp>
-        <p:nvSpPr>
-          <p:cNvPr id="16" name="Text 11"/>
-          <p:cNvSpPr txBox="1"/>
-          <p:nvPr/>
-        </p:nvSpPr>
-        <p:spPr>
-          <a:xfrm>
-            <a:off x="8402117" y="2788920"/>
-            <a:ext cx="2966618" cy="457200"/>
-          </a:xfrm>
-          <a:prstGeom prst="rect">
-            <a:avLst/>
-          </a:prstGeom>
-          <a:noFill/>
-          <a:ln/>
-        </p:spPr>
-        <p:txBody>
-          <a:bodyPr wrap="square" lIns="0" tIns="0" rIns="0" bIns="0" rtlCol="0" anchor="t"/>
-          <a:lstStyle/>
-          <a:p>
-            <a:pPr indent="0" marL="0">
-              <a:buNone/>
-            </a:pPr>
-            <a:r>
-              <a:rPr lang="en-US" sz="2000" b="1" dirty="0">
-                <a:solidFill>
-                  <a:srgbClr val="F2CD3A"/>
-                </a:solidFill>
-                <a:latin typeface="Calibri" pitchFamily="34" charset="0"/>
-                <a:ea typeface="Calibri" pitchFamily="34" charset="-122"/>
-                <a:cs typeface="Calibri" pitchFamily="34" charset="-120"/>
-              </a:rPr>
-              <a:t>Utility</a:t>
-            </a:r>
-            <a:endParaRPr lang="en-US" sz="2000" dirty="0"/>
-          </a:p>
-        </p:txBody>
-      </p:sp>
-      <p:sp>
-        <p:nvSpPr>
-          <p:cNvPr id="17" name="Text 12"/>
-          <p:cNvSpPr txBox="1"/>
-          <p:nvPr/>
-        </p:nvSpPr>
-        <p:spPr>
-          <a:xfrm>
-            <a:off x="8402117" y="3337560"/>
-            <a:ext cx="2966618" cy="1645920"/>
-          </a:xfrm>
-          <a:prstGeom prst="rect">
-            <a:avLst/>
-          </a:prstGeom>
-          <a:noFill/>
-          <a:ln/>
-        </p:spPr>
-        <p:txBody>
-          <a:bodyPr wrap="square" lIns="0" tIns="0" rIns="0" bIns="0" rtlCol="0" anchor="t"/>
-          <a:lstStyle/>
-          <a:p>
-            <a:pPr indent="0" marL="0">
-              <a:buNone/>
-            </a:pPr>
-            <a:r>
-              <a:rPr lang="en-US" sz="1500" dirty="0">
-                <a:solidFill>
-                  <a:srgbClr val="E4E4E7"/>
-                </a:solidFill>
-                <a:latin typeface="Calibri" pitchFamily="34" charset="0"/>
-                <a:ea typeface="Calibri" pitchFamily="34" charset="-122"/>
-                <a:cs typeface="Calibri" pitchFamily="34" charset="-120"/>
-              </a:rPr>
-              <a:t>Two-second, sub-cent payments, protocol-native tokens for games, tickets and identity, and open outcry trading over CAPD. Built for use, not for speculation.</a:t>
-            </a:r>
-            <a:endParaRPr lang="en-US" sz="1500" dirty="0"/>
-          </a:p>
-        </p:txBody>
-      </p:sp>
-      <p:sp>
-        <p:nvSpPr>
-          <p:cNvPr id="18" name="Text 13"/>
-          <p:cNvSpPr txBox="1"/>
-          <p:nvPr/>
-        </p:nvSpPr>
-        <p:spPr>
-          <a:xfrm>
-            <a:off x="548640" y="5486400"/>
-            <a:ext cx="11094415" cy="731520"/>
-          </a:xfrm>
-          <a:prstGeom prst="rect">
-            <a:avLst/>
-          </a:prstGeom>
-          <a:noFill/>
-          <a:ln/>
-        </p:spPr>
-        <p:txBody>
-          <a:bodyPr wrap="square" lIns="0" tIns="0" rIns="0" bIns="0" rtlCol="0" anchor="ctr"/>
-          <a:lstStyle/>
-          <a:p>
-            <a:pPr indent="0" marL="0">
-              <a:buNone/>
-            </a:pPr>
-            <a:r>
-              <a:rPr lang="en-US" sz="1100" dirty="0">
-                <a:solidFill>
-                  <a:srgbClr val="A1A1AA"/>
-                </a:solidFill>
-                <a:latin typeface="Calibri" pitchFamily="34" charset="0"/>
-                <a:ea typeface="Calibri" pitchFamily="34" charset="-122"/>
-                <a:cs typeface="Calibri" pitchFamily="34" charset="-120"/>
-              </a:rPr>
-              <a:t>Sources: Cambridge CBECI (2026) · de Vries &amp; Stoll, Bitcoin's growing e-waste problem (2021) · ethereum.org · nexa.org and spec.nexa.org · Statistics Norway (SSB) · Norwegian government data-centre regulation (June 2025) · NTNU Norway: Borgelt et al. (2026), Hertwich et al. (2014), HighEFF (2024) · jqrgen.medium.com (Sept 2026)</a:t>
-            </a:r>
-            <a:endParaRPr lang="en-US" sz="1100" dirty="0"/>
-          </a:p>
-        </p:txBody>
-      </p:sp>
-      <p:pic>
-        <p:nvPicPr>
-          <p:cNvPr id="20" name="Image 3" descr="preencoded.png">    </p:cNvPr>
-          <p:cNvPicPr>
-            <a:picLocks noChangeAspect="1"/>
-          </p:cNvPicPr>
-          <p:nvPr/>
-        </p:nvPicPr>
-        <p:blipFill>
-          <a:blip r:embed="rId4"/>
-          <a:stretch>
-            <a:fillRect/>
-          </a:stretch>
-        </p:blipFill>
-        <p:spPr>
-          <a:xfrm>
-            <a:off x="548640" y="6355080"/>
-            <a:ext cx="256032" cy="246888"/>
-          </a:xfrm>
-          <a:prstGeom prst="rect">
-            <a:avLst/>
-          </a:prstGeom>
-        </p:spPr>
-      </p:pic>
-      <p:sp>
-        <p:nvSpPr>
-          <p:cNvPr id="21" name="Text 14"/>
-          <p:cNvSpPr txBox="1"/>
-          <p:nvPr/>
-        </p:nvSpPr>
-        <p:spPr>
-          <a:xfrm>
-            <a:off x="877824" y="6400800"/>
-            <a:ext cx="2743200" cy="274320"/>
-          </a:xfrm>
-          <a:prstGeom prst="rect">
-            <a:avLst/>
-          </a:prstGeom>
-          <a:noFill/>
-          <a:ln/>
-        </p:spPr>
-        <p:txBody>
-          <a:bodyPr wrap="square" lIns="0" tIns="0" rIns="0" bIns="0" rtlCol="0" anchor="ctr"/>
-          <a:lstStyle/>
-          <a:p>
-            <a:pPr algn="l" indent="0" marL="0">
-              <a:buNone/>
-            </a:pPr>
-            <a:r>
-              <a:rPr lang="en-US" sz="1000" dirty="0">
-                <a:solidFill>
-                  <a:srgbClr val="A1A1AA"/>
-                </a:solidFill>
-                <a:latin typeface="Calibri" pitchFamily="34" charset="0"/>
-                <a:ea typeface="Calibri" pitchFamily="34" charset="-122"/>
-                <a:cs typeface="Calibri" pitchFamily="34" charset="-120"/>
-              </a:rPr>
-              <a:t>Nexa · 2026</a:t>
-            </a:r>
-            <a:endParaRPr lang="en-US" sz="1000" dirty="0"/>
-          </a:p>
-        </p:txBody>
-      </p:sp>
-      <p:sp>
-        <p:nvSpPr>
-          <p:cNvPr id="22" name="Text 15"/>
-          <p:cNvSpPr txBox="1"/>
-          <p:nvPr/>
-        </p:nvSpPr>
-        <p:spPr>
-          <a:xfrm>
-            <a:off x="11094415" y="6400800"/>
-            <a:ext cx="548640" cy="274320"/>
-          </a:xfrm>
-          <a:prstGeom prst="rect">
-            <a:avLst/>
-          </a:prstGeom>
-          <a:noFill/>
-          <a:ln/>
-        </p:spPr>
-        <p:txBody>
-          <a:bodyPr wrap="square" lIns="0" tIns="0" rIns="0" bIns="0" rtlCol="0" anchor="ctr"/>
-          <a:lstStyle/>
-          <a:p>
-            <a:pPr algn="r" indent="0" marL="0">
-              <a:buNone/>
-            </a:pPr>
-            <a:r>
-              <a:rPr lang="en-US" sz="1000" dirty="0">
-                <a:solidFill>
-                  <a:srgbClr val="A1A1AA"/>
-                </a:solidFill>
-                <a:latin typeface="Calibri" pitchFamily="34" charset="0"/>
-                <a:ea typeface="Calibri" pitchFamily="34" charset="-122"/>
-                <a:cs typeface="Calibri" pitchFamily="34" charset="-120"/>
-              </a:rPr>
               <a:t>19</a:t>
             </a:r>
             <a:endParaRPr lang="en-US" sz="1000" dirty="0"/>
@@ -10924,6 +10983,680 @@
                 <a:cs typeface="Calibri" pitchFamily="34" charset="-120"/>
               </a:rPr>
               <a:t>2</a:t>
+            </a:r>
+            <a:endParaRPr lang="en-US" sz="1000" dirty="0"/>
+          </a:p>
+        </p:txBody>
+      </p:sp>
+    </p:spTree>
+  </p:cSld>
+  <p:clrMapOvr>
+    <a:masterClrMapping/>
+  </p:clrMapOvr>
+</p:sld>
+</file>
+
+<file path=ppt/slides/slide20.xml><?xml version="1.0" encoding="utf-8"?>
+<p:sld xmlns:a="http://schemas.openxmlformats.org/drawingml/2006/main" xmlns:r="http://schemas.openxmlformats.org/officeDocument/2006/relationships" xmlns:p="http://schemas.openxmlformats.org/presentationml/2006/main">
+  <p:cSld name="Slide 20">
+    <p:bg>
+      <p:bgPr>
+        <a:solidFill>
+          <a:srgbClr val="0A0A0F"/>
+        </a:solidFill>
+      </p:bgPr>
+    </p:bg>
+    <p:spTree>
+      <p:nvGrpSpPr>
+        <p:cNvPr id="1" name=""/>
+        <p:cNvGrpSpPr/>
+        <p:nvPr/>
+      </p:nvGrpSpPr>
+      <p:grpSpPr>
+        <a:xfrm>
+          <a:off x="0" y="0"/>
+          <a:ext cx="0" cy="0"/>
+          <a:chOff x="0" y="0"/>
+          <a:chExt cx="0" cy="0"/>
+        </a:xfrm>
+      </p:grpSpPr>
+      <p:sp>
+        <p:nvSpPr>
+          <p:cNvPr id="2" name="Text 0"/>
+          <p:cNvSpPr txBox="1"/>
+          <p:nvPr/>
+        </p:nvSpPr>
+        <p:spPr>
+          <a:xfrm>
+            <a:off x="548640" y="411480"/>
+            <a:ext cx="11094415" cy="1005840"/>
+          </a:xfrm>
+          <a:prstGeom prst="rect">
+            <a:avLst/>
+          </a:prstGeom>
+          <a:noFill/>
+          <a:ln/>
+        </p:spPr>
+        <p:txBody>
+          <a:bodyPr wrap="square" lIns="0" tIns="0" rIns="0" bIns="0" rtlCol="0" anchor="t"/>
+          <a:lstStyle/>
+          <a:p>
+            <a:pPr algn="l" indent="0" marL="0">
+              <a:buNone/>
+            </a:pPr>
+            <a:r>
+              <a:rPr lang="en-US" sz="3000" b="1" dirty="0">
+                <a:solidFill>
+                  <a:srgbClr val="FFFFFF"/>
+                </a:solidFill>
+                <a:latin typeface="Calibri" pitchFamily="34" charset="0"/>
+                <a:ea typeface="Calibri" pitchFamily="34" charset="-122"/>
+                <a:cs typeface="Calibri" pitchFamily="34" charset="-120"/>
+              </a:rPr>
+              <a:t>Three things to remember</a:t>
+            </a:r>
+            <a:endParaRPr lang="en-US" sz="3000" dirty="0"/>
+          </a:p>
+        </p:txBody>
+      </p:sp>
+      <p:sp>
+        <p:nvSpPr>
+          <p:cNvPr id="3" name="Shape 1"/>
+          <p:cNvSpPr/>
+          <p:nvPr/>
+        </p:nvSpPr>
+        <p:spPr>
+          <a:xfrm>
+            <a:off x="548640" y="1691640"/>
+            <a:ext cx="3515258" cy="3566160"/>
+          </a:xfrm>
+          <a:prstGeom prst="roundRect">
+            <a:avLst>
+              <a:gd name="adj" fmla="val 3121"/>
+            </a:avLst>
+          </a:prstGeom>
+          <a:solidFill>
+            <a:srgbClr val="18181B"/>
+          </a:solidFill>
+          <a:ln w="9525">
+            <a:solidFill>
+              <a:srgbClr val="2E2E35"/>
+            </a:solidFill>
+            <a:prstDash val="solid"/>
+          </a:ln>
+        </p:spPr>
+      </p:sp>
+      <p:sp>
+        <p:nvSpPr>
+          <p:cNvPr id="4" name="Shape 2"/>
+          <p:cNvSpPr/>
+          <p:nvPr/>
+        </p:nvSpPr>
+        <p:spPr>
+          <a:xfrm>
+            <a:off x="822960" y="1965960"/>
+            <a:ext cx="640080" cy="640080"/>
+          </a:xfrm>
+          <a:prstGeom prst="ellipse">
+            <a:avLst/>
+          </a:prstGeom>
+          <a:solidFill>
+            <a:srgbClr val="F2CD3A"/>
+          </a:solidFill>
+          <a:ln w="12700">
+            <a:solidFill>
+              <a:srgbClr val="F2CD3A"/>
+            </a:solidFill>
+            <a:prstDash val="solid"/>
+          </a:ln>
+        </p:spPr>
+      </p:sp>
+      <p:pic>
+        <p:nvPicPr>
+          <p:cNvPr id="5" name="Image 0" descr="preencoded.png">    </p:cNvPr>
+          <p:cNvPicPr>
+            <a:picLocks noChangeAspect="1"/>
+          </p:cNvPicPr>
+          <p:nvPr/>
+        </p:nvPicPr>
+        <p:blipFill>
+          <a:blip r:embed="rId1"/>
+          <a:stretch>
+            <a:fillRect/>
+          </a:stretch>
+        </p:blipFill>
+        <p:spPr>
+          <a:xfrm>
+            <a:off x="976579" y="2119579"/>
+            <a:ext cx="332842" cy="332842"/>
+          </a:xfrm>
+          <a:prstGeom prst="rect">
+            <a:avLst/>
+          </a:prstGeom>
+        </p:spPr>
+      </p:pic>
+      <p:sp>
+        <p:nvSpPr>
+          <p:cNvPr id="6" name="Text 3"/>
+          <p:cNvSpPr txBox="1"/>
+          <p:nvPr/>
+        </p:nvSpPr>
+        <p:spPr>
+          <a:xfrm>
+            <a:off x="822960" y="2788920"/>
+            <a:ext cx="2966618" cy="457200"/>
+          </a:xfrm>
+          <a:prstGeom prst="rect">
+            <a:avLst/>
+          </a:prstGeom>
+          <a:noFill/>
+          <a:ln/>
+        </p:spPr>
+        <p:txBody>
+          <a:bodyPr wrap="square" lIns="0" tIns="0" rIns="0" bIns="0" rtlCol="0" anchor="t"/>
+          <a:lstStyle/>
+          <a:p>
+            <a:pPr indent="0" marL="0">
+              <a:buNone/>
+            </a:pPr>
+            <a:r>
+              <a:rPr lang="en-US" sz="2000" b="1" dirty="0">
+                <a:solidFill>
+                  <a:srgbClr val="F2CD3A"/>
+                </a:solidFill>
+                <a:latin typeface="Calibri" pitchFamily="34" charset="0"/>
+                <a:ea typeface="Calibri" pitchFamily="34" charset="-122"/>
+                <a:cs typeface="Calibri" pitchFamily="34" charset="-120"/>
+              </a:rPr>
+              <a:t>Energy</a:t>
+            </a:r>
+            <a:endParaRPr lang="en-US" sz="2000" dirty="0"/>
+          </a:p>
+        </p:txBody>
+      </p:sp>
+      <p:sp>
+        <p:nvSpPr>
+          <p:cNvPr id="7" name="Text 4"/>
+          <p:cNvSpPr txBox="1"/>
+          <p:nvPr/>
+        </p:nvSpPr>
+        <p:spPr>
+          <a:xfrm>
+            <a:off x="822960" y="3337560"/>
+            <a:ext cx="2966618" cy="1645920"/>
+          </a:xfrm>
+          <a:prstGeom prst="rect">
+            <a:avLst/>
+          </a:prstGeom>
+          <a:noFill/>
+          <a:ln/>
+        </p:spPr>
+        <p:txBody>
+          <a:bodyPr wrap="square" lIns="0" tIns="0" rIns="0" bIns="0" rtlCol="0" anchor="t"/>
+          <a:lstStyle/>
+          <a:p>
+            <a:pPr indent="0" marL="0">
+              <a:buNone/>
+            </a:pPr>
+            <a:r>
+              <a:rPr lang="en-US" sz="1500" dirty="0">
+                <a:solidFill>
+                  <a:srgbClr val="E4E4E7"/>
+                </a:solidFill>
+                <a:latin typeface="Calibri" pitchFamily="34" charset="0"/>
+                <a:ea typeface="Calibri" pitchFamily="34" charset="-122"/>
+                <a:cs typeface="Calibri" pitchFamily="34" charset="-120"/>
+              </a:rPr>
+              <a:t>Proof of work costs what miners are paid, on any chain. At scale, Nexa gets up to 13,000× more transactions out of every kilowatt-hour than Bitcoin, on reusable GPUs, not throw-away ASICs.</a:t>
+            </a:r>
+            <a:endParaRPr lang="en-US" sz="1500" dirty="0"/>
+          </a:p>
+        </p:txBody>
+      </p:sp>
+      <p:sp>
+        <p:nvSpPr>
+          <p:cNvPr id="8" name="Shape 5"/>
+          <p:cNvSpPr/>
+          <p:nvPr/>
+        </p:nvSpPr>
+        <p:spPr>
+          <a:xfrm>
+            <a:off x="4338218" y="1691640"/>
+            <a:ext cx="3515258" cy="3566160"/>
+          </a:xfrm>
+          <a:prstGeom prst="roundRect">
+            <a:avLst>
+              <a:gd name="adj" fmla="val 3121"/>
+            </a:avLst>
+          </a:prstGeom>
+          <a:solidFill>
+            <a:srgbClr val="18181B"/>
+          </a:solidFill>
+          <a:ln w="9525">
+            <a:solidFill>
+              <a:srgbClr val="2E2E35"/>
+            </a:solidFill>
+            <a:prstDash val="solid"/>
+          </a:ln>
+        </p:spPr>
+      </p:sp>
+      <p:sp>
+        <p:nvSpPr>
+          <p:cNvPr id="9" name="Shape 6"/>
+          <p:cNvSpPr/>
+          <p:nvPr/>
+        </p:nvSpPr>
+        <p:spPr>
+          <a:xfrm>
+            <a:off x="4612538" y="1965960"/>
+            <a:ext cx="640080" cy="640080"/>
+          </a:xfrm>
+          <a:prstGeom prst="ellipse">
+            <a:avLst/>
+          </a:prstGeom>
+          <a:solidFill>
+            <a:srgbClr val="F2CD3A"/>
+          </a:solidFill>
+          <a:ln w="12700">
+            <a:solidFill>
+              <a:srgbClr val="F2CD3A"/>
+            </a:solidFill>
+            <a:prstDash val="solid"/>
+          </a:ln>
+        </p:spPr>
+      </p:sp>
+      <p:pic>
+        <p:nvPicPr>
+          <p:cNvPr id="10" name="Image 1" descr="preencoded.png">    </p:cNvPr>
+          <p:cNvPicPr>
+            <a:picLocks noChangeAspect="1"/>
+          </p:cNvPicPr>
+          <p:nvPr/>
+        </p:nvPicPr>
+        <p:blipFill>
+          <a:blip r:embed="rId2"/>
+          <a:stretch>
+            <a:fillRect/>
+          </a:stretch>
+        </p:blipFill>
+        <p:spPr>
+          <a:xfrm>
+            <a:off x="4766158" y="2119579"/>
+            <a:ext cx="332842" cy="332842"/>
+          </a:xfrm>
+          <a:prstGeom prst="rect">
+            <a:avLst/>
+          </a:prstGeom>
+        </p:spPr>
+      </p:pic>
+      <p:sp>
+        <p:nvSpPr>
+          <p:cNvPr id="11" name="Text 7"/>
+          <p:cNvSpPr txBox="1"/>
+          <p:nvPr/>
+        </p:nvSpPr>
+        <p:spPr>
+          <a:xfrm>
+            <a:off x="4612538" y="2788920"/>
+            <a:ext cx="2966618" cy="457200"/>
+          </a:xfrm>
+          <a:prstGeom prst="rect">
+            <a:avLst/>
+          </a:prstGeom>
+          <a:noFill/>
+          <a:ln/>
+        </p:spPr>
+        <p:txBody>
+          <a:bodyPr wrap="square" lIns="0" tIns="0" rIns="0" bIns="0" rtlCol="0" anchor="t"/>
+          <a:lstStyle/>
+          <a:p>
+            <a:pPr indent="0" marL="0">
+              <a:buNone/>
+            </a:pPr>
+            <a:r>
+              <a:rPr lang="en-US" sz="2000" b="1" dirty="0">
+                <a:solidFill>
+                  <a:srgbClr val="F2CD3A"/>
+                </a:solidFill>
+                <a:latin typeface="Calibri" pitchFamily="34" charset="0"/>
+                <a:ea typeface="Calibri" pitchFamily="34" charset="-122"/>
+                <a:cs typeface="Calibri" pitchFamily="34" charset="-120"/>
+              </a:rPr>
+              <a:t>Fairness</a:t>
+            </a:r>
+            <a:endParaRPr lang="en-US" sz="2000" dirty="0"/>
+          </a:p>
+        </p:txBody>
+      </p:sp>
+      <p:sp>
+        <p:nvSpPr>
+          <p:cNvPr id="12" name="Text 8"/>
+          <p:cNvSpPr txBox="1"/>
+          <p:nvPr/>
+        </p:nvSpPr>
+        <p:spPr>
+          <a:xfrm>
+            <a:off x="4612538" y="3337560"/>
+            <a:ext cx="2966618" cy="1645920"/>
+          </a:xfrm>
+          <a:prstGeom prst="rect">
+            <a:avLst/>
+          </a:prstGeom>
+          <a:noFill/>
+          <a:ln/>
+        </p:spPr>
+        <p:txBody>
+          <a:bodyPr wrap="square" lIns="0" tIns="0" rIns="0" bIns="0" rtlCol="0" anchor="t"/>
+          <a:lstStyle/>
+          <a:p>
+            <a:pPr indent="0" marL="0">
+              <a:buNone/>
+            </a:pPr>
+            <a:r>
+              <a:rPr lang="en-US" sz="1500" dirty="0">
+                <a:solidFill>
+                  <a:srgbClr val="E4E4E7"/>
+                </a:solidFill>
+                <a:latin typeface="Calibri" pitchFamily="34" charset="0"/>
+                <a:ea typeface="Calibri" pitchFamily="34" charset="-122"/>
+                <a:cs typeface="Calibri" pitchFamily="34" charset="-120"/>
+              </a:rPr>
+              <a:t>No premine, no ICO, no venture capital. 100% of the supply mined in public since 2022, open to anyone with a graphics card.</a:t>
+            </a:r>
+            <a:endParaRPr lang="en-US" sz="1500" dirty="0"/>
+          </a:p>
+        </p:txBody>
+      </p:sp>
+      <p:sp>
+        <p:nvSpPr>
+          <p:cNvPr id="13" name="Shape 9"/>
+          <p:cNvSpPr/>
+          <p:nvPr/>
+        </p:nvSpPr>
+        <p:spPr>
+          <a:xfrm>
+            <a:off x="8127797" y="1691640"/>
+            <a:ext cx="3515258" cy="3566160"/>
+          </a:xfrm>
+          <a:prstGeom prst="roundRect">
+            <a:avLst>
+              <a:gd name="adj" fmla="val 3121"/>
+            </a:avLst>
+          </a:prstGeom>
+          <a:solidFill>
+            <a:srgbClr val="18181B"/>
+          </a:solidFill>
+          <a:ln w="9525">
+            <a:solidFill>
+              <a:srgbClr val="2E2E35"/>
+            </a:solidFill>
+            <a:prstDash val="solid"/>
+          </a:ln>
+        </p:spPr>
+      </p:sp>
+      <p:sp>
+        <p:nvSpPr>
+          <p:cNvPr id="14" name="Shape 10"/>
+          <p:cNvSpPr/>
+          <p:nvPr/>
+        </p:nvSpPr>
+        <p:spPr>
+          <a:xfrm>
+            <a:off x="8402117" y="1965960"/>
+            <a:ext cx="640080" cy="640080"/>
+          </a:xfrm>
+          <a:prstGeom prst="ellipse">
+            <a:avLst/>
+          </a:prstGeom>
+          <a:solidFill>
+            <a:srgbClr val="F2CD3A"/>
+          </a:solidFill>
+          <a:ln w="12700">
+            <a:solidFill>
+              <a:srgbClr val="F2CD3A"/>
+            </a:solidFill>
+            <a:prstDash val="solid"/>
+          </a:ln>
+        </p:spPr>
+      </p:sp>
+      <p:pic>
+        <p:nvPicPr>
+          <p:cNvPr id="15" name="Image 2" descr="preencoded.png">    </p:cNvPr>
+          <p:cNvPicPr>
+            <a:picLocks noChangeAspect="1"/>
+          </p:cNvPicPr>
+          <p:nvPr/>
+        </p:nvPicPr>
+        <p:blipFill>
+          <a:blip r:embed="rId3"/>
+          <a:stretch>
+            <a:fillRect/>
+          </a:stretch>
+        </p:blipFill>
+        <p:spPr>
+          <a:xfrm>
+            <a:off x="8555736" y="2119579"/>
+            <a:ext cx="332842" cy="332842"/>
+          </a:xfrm>
+          <a:prstGeom prst="rect">
+            <a:avLst/>
+          </a:prstGeom>
+        </p:spPr>
+      </p:pic>
+      <p:sp>
+        <p:nvSpPr>
+          <p:cNvPr id="16" name="Text 11"/>
+          <p:cNvSpPr txBox="1"/>
+          <p:nvPr/>
+        </p:nvSpPr>
+        <p:spPr>
+          <a:xfrm>
+            <a:off x="8402117" y="2788920"/>
+            <a:ext cx="2966618" cy="457200"/>
+          </a:xfrm>
+          <a:prstGeom prst="rect">
+            <a:avLst/>
+          </a:prstGeom>
+          <a:noFill/>
+          <a:ln/>
+        </p:spPr>
+        <p:txBody>
+          <a:bodyPr wrap="square" lIns="0" tIns="0" rIns="0" bIns="0" rtlCol="0" anchor="t"/>
+          <a:lstStyle/>
+          <a:p>
+            <a:pPr indent="0" marL="0">
+              <a:buNone/>
+            </a:pPr>
+            <a:r>
+              <a:rPr lang="en-US" sz="2000" b="1" dirty="0">
+                <a:solidFill>
+                  <a:srgbClr val="F2CD3A"/>
+                </a:solidFill>
+                <a:latin typeface="Calibri" pitchFamily="34" charset="0"/>
+                <a:ea typeface="Calibri" pitchFamily="34" charset="-122"/>
+                <a:cs typeface="Calibri" pitchFamily="34" charset="-120"/>
+              </a:rPr>
+              <a:t>Utility</a:t>
+            </a:r>
+            <a:endParaRPr lang="en-US" sz="2000" dirty="0"/>
+          </a:p>
+        </p:txBody>
+      </p:sp>
+      <p:sp>
+        <p:nvSpPr>
+          <p:cNvPr id="17" name="Text 12"/>
+          <p:cNvSpPr txBox="1"/>
+          <p:nvPr/>
+        </p:nvSpPr>
+        <p:spPr>
+          <a:xfrm>
+            <a:off x="8402117" y="3337560"/>
+            <a:ext cx="2966618" cy="1645920"/>
+          </a:xfrm>
+          <a:prstGeom prst="rect">
+            <a:avLst/>
+          </a:prstGeom>
+          <a:noFill/>
+          <a:ln/>
+        </p:spPr>
+        <p:txBody>
+          <a:bodyPr wrap="square" lIns="0" tIns="0" rIns="0" bIns="0" rtlCol="0" anchor="t"/>
+          <a:lstStyle/>
+          <a:p>
+            <a:pPr indent="0" marL="0">
+              <a:buNone/>
+            </a:pPr>
+            <a:r>
+              <a:rPr lang="en-US" sz="1500" dirty="0">
+                <a:solidFill>
+                  <a:srgbClr val="E4E4E7"/>
+                </a:solidFill>
+                <a:latin typeface="Calibri" pitchFamily="34" charset="0"/>
+                <a:ea typeface="Calibri" pitchFamily="34" charset="-122"/>
+                <a:cs typeface="Calibri" pitchFamily="34" charset="-120"/>
+              </a:rPr>
+              <a:t>Two-second, sub-cent payments, protocol-native tokens for games, tickets and identity, and open outcry trading over CAPD. Built for use, not for speculation.</a:t>
+            </a:r>
+            <a:endParaRPr lang="en-US" sz="1500" dirty="0"/>
+          </a:p>
+        </p:txBody>
+      </p:sp>
+      <p:sp>
+        <p:nvSpPr>
+          <p:cNvPr id="18" name="Text 13"/>
+          <p:cNvSpPr txBox="1"/>
+          <p:nvPr/>
+        </p:nvSpPr>
+        <p:spPr>
+          <a:xfrm>
+            <a:off x="548640" y="5486400"/>
+            <a:ext cx="11094415" cy="731520"/>
+          </a:xfrm>
+          <a:prstGeom prst="rect">
+            <a:avLst/>
+          </a:prstGeom>
+          <a:noFill/>
+          <a:ln/>
+        </p:spPr>
+        <p:txBody>
+          <a:bodyPr wrap="square" lIns="0" tIns="0" rIns="0" bIns="0" rtlCol="0" anchor="ctr"/>
+          <a:lstStyle/>
+          <a:p>
+            <a:pPr indent="0" marL="0">
+              <a:buNone/>
+            </a:pPr>
+            <a:r>
+              <a:rPr lang="en-US" sz="1100" dirty="0">
+                <a:solidFill>
+                  <a:srgbClr val="A1A1AA"/>
+                </a:solidFill>
+                <a:latin typeface="Calibri" pitchFamily="34" charset="0"/>
+                <a:ea typeface="Calibri" pitchFamily="34" charset="-122"/>
+                <a:cs typeface="Calibri" pitchFamily="34" charset="-120"/>
+              </a:rPr>
+              <a:t>Sources: Cambridge CBECI (2026) · de Vries &amp; Stoll, Bitcoin's growing e-waste problem (2021) · ethereum.org · nexa.org and spec.nexa.org · Statistics Norway (SSB) · Norwegian government data-centre regulation (June 2025) · NTNU Norway: Borgelt et al. (2026), Hertwich et al. (2014), HighEFF (2024) · jqrgen.medium.com (Sept 2026)</a:t>
+            </a:r>
+            <a:endParaRPr lang="en-US" sz="1100" dirty="0"/>
+          </a:p>
+        </p:txBody>
+      </p:sp>
+      <p:pic>
+        <p:nvPicPr>
+          <p:cNvPr id="20" name="Image 3" descr="preencoded.png">    </p:cNvPr>
+          <p:cNvPicPr>
+            <a:picLocks noChangeAspect="1"/>
+          </p:cNvPicPr>
+          <p:nvPr/>
+        </p:nvPicPr>
+        <p:blipFill>
+          <a:blip r:embed="rId4"/>
+          <a:stretch>
+            <a:fillRect/>
+          </a:stretch>
+        </p:blipFill>
+        <p:spPr>
+          <a:xfrm>
+            <a:off x="548640" y="6355080"/>
+            <a:ext cx="256032" cy="246888"/>
+          </a:xfrm>
+          <a:prstGeom prst="rect">
+            <a:avLst/>
+          </a:prstGeom>
+        </p:spPr>
+      </p:pic>
+      <p:sp>
+        <p:nvSpPr>
+          <p:cNvPr id="21" name="Text 14"/>
+          <p:cNvSpPr txBox="1"/>
+          <p:nvPr/>
+        </p:nvSpPr>
+        <p:spPr>
+          <a:xfrm>
+            <a:off x="877824" y="6400800"/>
+            <a:ext cx="2743200" cy="274320"/>
+          </a:xfrm>
+          <a:prstGeom prst="rect">
+            <a:avLst/>
+          </a:prstGeom>
+          <a:noFill/>
+          <a:ln/>
+        </p:spPr>
+        <p:txBody>
+          <a:bodyPr wrap="square" lIns="0" tIns="0" rIns="0" bIns="0" rtlCol="0" anchor="ctr"/>
+          <a:lstStyle/>
+          <a:p>
+            <a:pPr algn="l" indent="0" marL="0">
+              <a:buNone/>
+            </a:pPr>
+            <a:r>
+              <a:rPr lang="en-US" sz="1000" dirty="0">
+                <a:solidFill>
+                  <a:srgbClr val="A1A1AA"/>
+                </a:solidFill>
+                <a:latin typeface="Calibri" pitchFamily="34" charset="0"/>
+                <a:ea typeface="Calibri" pitchFamily="34" charset="-122"/>
+                <a:cs typeface="Calibri" pitchFamily="34" charset="-120"/>
+              </a:rPr>
+              <a:t>Nexa · 2026</a:t>
+            </a:r>
+            <a:endParaRPr lang="en-US" sz="1000" dirty="0"/>
+          </a:p>
+        </p:txBody>
+      </p:sp>
+      <p:sp>
+        <p:nvSpPr>
+          <p:cNvPr id="22" name="Text 15"/>
+          <p:cNvSpPr txBox="1"/>
+          <p:nvPr/>
+        </p:nvSpPr>
+        <p:spPr>
+          <a:xfrm>
+            <a:off x="11094415" y="6400800"/>
+            <a:ext cx="548640" cy="274320"/>
+          </a:xfrm>
+          <a:prstGeom prst="rect">
+            <a:avLst/>
+          </a:prstGeom>
+          <a:noFill/>
+          <a:ln/>
+        </p:spPr>
+        <p:txBody>
+          <a:bodyPr wrap="square" lIns="0" tIns="0" rIns="0" bIns="0" rtlCol="0" anchor="ctr"/>
+          <a:lstStyle/>
+          <a:p>
+            <a:pPr algn="r" indent="0" marL="0">
+              <a:buNone/>
+            </a:pPr>
+            <a:r>
+              <a:rPr lang="en-US" sz="1000" dirty="0">
+                <a:solidFill>
+                  <a:srgbClr val="A1A1AA"/>
+                </a:solidFill>
+                <a:latin typeface="Calibri" pitchFamily="34" charset="0"/>
+                <a:ea typeface="Calibri" pitchFamily="34" charset="-122"/>
+                <a:cs typeface="Calibri" pitchFamily="34" charset="-120"/>
+              </a:rPr>
+              <a:t>20</a:t>
             </a:r>
             <a:endParaRPr lang="en-US" sz="1000" dirty="0"/>
           </a:p>
